--- a/solder_ball_diagram.pptx
+++ b/solder_ball_diagram.pptx
@@ -6,6 +6,9 @@
   </p:sldMasterIdLst>
   <p:sldIdLst>
     <p:sldId id="256" r:id="rId2"/>
+    <p:sldId id="257" r:id="rId3"/>
+    <p:sldId id="259" r:id="rId4"/>
+    <p:sldId id="258" r:id="rId5"/>
   </p:sldIdLst>
   <p:sldSz cx="12192000" cy="6858000"/>
   <p:notesSz cx="6858000" cy="9144000"/>
@@ -3347,2619 +3350,2955 @@
           <a:chExt cx="0" cy="0"/>
         </a:xfrm>
       </p:grpSpPr>
-      <p:grpSp>
-        <p:nvGrpSpPr>
-          <p:cNvPr id="49" name="Group 48">
-            <a:extLst>
-              <a:ext uri="{FF2B5EF4-FFF2-40B4-BE49-F238E27FC236}">
-                <a16:creationId xmlns:a16="http://schemas.microsoft.com/office/drawing/2014/main" id="{A7E2D3D2-1969-2DA5-F8D4-984DC5FF2D7A}"/>
-              </a:ext>
-            </a:extLst>
-          </p:cNvPr>
-          <p:cNvGrpSpPr/>
+      <p:sp>
+        <p:nvSpPr>
+          <p:cNvPr id="4" name="椭圆 14">
+            <a:extLst>
+              <a:ext uri="{FF2B5EF4-FFF2-40B4-BE49-F238E27FC236}">
+                <a16:creationId xmlns:a16="http://schemas.microsoft.com/office/drawing/2014/main" id="{551C5B42-5891-CB03-2DD4-B2E335849C42}"/>
+              </a:ext>
+            </a:extLst>
+          </p:cNvPr>
+          <p:cNvSpPr/>
           <p:nvPr/>
-        </p:nvGrpSpPr>
-        <p:grpSpPr>
+        </p:nvSpPr>
+        <p:spPr>
           <a:xfrm>
-            <a:off x="1347482" y="1062591"/>
-            <a:ext cx="4080054" cy="3401063"/>
-            <a:chOff x="1852307" y="1348341"/>
-            <a:chExt cx="4080054" cy="3401063"/>
-          </a:xfrm>
-        </p:grpSpPr>
-        <p:sp>
-          <p:nvSpPr>
-            <p:cNvPr id="4" name="椭圆 14">
-              <a:extLst>
-                <a:ext uri="{FF2B5EF4-FFF2-40B4-BE49-F238E27FC236}">
-                  <a16:creationId xmlns:a16="http://schemas.microsoft.com/office/drawing/2014/main" id="{551C5B42-5891-CB03-2DD4-B2E335849C42}"/>
-                </a:ext>
-              </a:extLst>
-            </p:cNvPr>
-            <p:cNvSpPr/>
-            <p:nvPr/>
-          </p:nvSpPr>
-          <p:spPr>
-            <a:xfrm>
-              <a:off x="2639763" y="2069460"/>
-              <a:ext cx="2528790" cy="2455833"/>
-            </a:xfrm>
-            <a:prstGeom prst="ellipse">
-              <a:avLst/>
-            </a:prstGeom>
-            <a:solidFill>
-              <a:schemeClr val="tx1">
-                <a:lumMod val="50000"/>
-                <a:lumOff val="50000"/>
-              </a:schemeClr>
-            </a:solidFill>
-            <a:ln>
-              <a:noFill/>
-            </a:ln>
-            <a:effectLst/>
-          </p:spPr>
-          <p:style>
-            <a:lnRef idx="1">
-              <a:schemeClr val="accent1"/>
-            </a:lnRef>
-            <a:fillRef idx="3">
-              <a:schemeClr val="accent1"/>
-            </a:fillRef>
-            <a:effectRef idx="2">
-              <a:schemeClr val="accent1"/>
-            </a:effectRef>
-            <a:fontRef idx="minor">
-              <a:schemeClr val="lt1"/>
-            </a:fontRef>
-          </p:style>
-          <p:txBody>
-            <a:bodyPr rtlCol="0" anchor="ctr"/>
-            <a:lstStyle/>
-            <a:p>
-              <a:pPr algn="ctr"/>
-              <a:endParaRPr lang="zh-CN" altLang="en-US" dirty="0"/>
-            </a:p>
-          </p:txBody>
-        </p:sp>
-        <p:sp>
-          <p:nvSpPr>
-            <p:cNvPr id="5" name="矩形 29">
-              <a:extLst>
-                <a:ext uri="{FF2B5EF4-FFF2-40B4-BE49-F238E27FC236}">
-                  <a16:creationId xmlns:a16="http://schemas.microsoft.com/office/drawing/2014/main" id="{9B3DD08F-74C0-BBB7-8441-94C98D53AFC6}"/>
-                </a:ext>
-              </a:extLst>
-            </p:cNvPr>
-            <p:cNvSpPr/>
-            <p:nvPr/>
-          </p:nvSpPr>
-          <p:spPr>
-            <a:xfrm>
-              <a:off x="4607605" y="2248044"/>
-              <a:ext cx="180755" cy="126754"/>
-            </a:xfrm>
-            <a:prstGeom prst="rect">
-              <a:avLst/>
-            </a:prstGeom>
+            <a:off x="2134938" y="1783710"/>
+            <a:ext cx="2528790" cy="2455833"/>
+          </a:xfrm>
+          <a:prstGeom prst="ellipse">
+            <a:avLst/>
+          </a:prstGeom>
+          <a:solidFill>
+            <a:schemeClr val="tx1">
+              <a:lumMod val="50000"/>
+              <a:lumOff val="50000"/>
+            </a:schemeClr>
+          </a:solidFill>
+          <a:ln>
+            <a:noFill/>
+          </a:ln>
+          <a:effectLst/>
+        </p:spPr>
+        <p:style>
+          <a:lnRef idx="1">
+            <a:schemeClr val="accent1"/>
+          </a:lnRef>
+          <a:fillRef idx="3">
+            <a:schemeClr val="accent1"/>
+          </a:fillRef>
+          <a:effectRef idx="2">
+            <a:schemeClr val="accent1"/>
+          </a:effectRef>
+          <a:fontRef idx="minor">
+            <a:schemeClr val="lt1"/>
+          </a:fontRef>
+        </p:style>
+        <p:txBody>
+          <a:bodyPr rtlCol="0" anchor="ctr"/>
+          <a:lstStyle/>
+          <a:p>
+            <a:pPr algn="ctr"/>
+            <a:endParaRPr lang="zh-CN" altLang="en-US" dirty="0"/>
+          </a:p>
+        </p:txBody>
+      </p:sp>
+      <p:sp>
+        <p:nvSpPr>
+          <p:cNvPr id="5" name="矩形 29">
+            <a:extLst>
+              <a:ext uri="{FF2B5EF4-FFF2-40B4-BE49-F238E27FC236}">
+                <a16:creationId xmlns:a16="http://schemas.microsoft.com/office/drawing/2014/main" id="{9B3DD08F-74C0-BBB7-8441-94C98D53AFC6}"/>
+              </a:ext>
+            </a:extLst>
+          </p:cNvPr>
+          <p:cNvSpPr/>
+          <p:nvPr/>
+        </p:nvSpPr>
+        <p:spPr>
+          <a:xfrm>
+            <a:off x="4102780" y="1962294"/>
+            <a:ext cx="180755" cy="126754"/>
+          </a:xfrm>
+          <a:prstGeom prst="rect">
+            <a:avLst/>
+          </a:prstGeom>
+          <a:solidFill>
+            <a:schemeClr val="bg1"/>
+          </a:solidFill>
+          <a:ln>
+            <a:noFill/>
+          </a:ln>
+          <a:effectLst/>
+        </p:spPr>
+        <p:style>
+          <a:lnRef idx="1">
+            <a:schemeClr val="accent1"/>
+          </a:lnRef>
+          <a:fillRef idx="3">
+            <a:schemeClr val="accent1"/>
+          </a:fillRef>
+          <a:effectRef idx="2">
+            <a:schemeClr val="accent1"/>
+          </a:effectRef>
+          <a:fontRef idx="minor">
+            <a:schemeClr val="lt1"/>
+          </a:fontRef>
+        </p:style>
+        <p:txBody>
+          <a:bodyPr rtlCol="0" anchor="ctr"/>
+          <a:lstStyle/>
+          <a:p>
+            <a:pPr algn="ctr"/>
+            <a:endParaRPr lang="zh-CN" altLang="en-US"/>
+          </a:p>
+        </p:txBody>
+      </p:sp>
+      <p:sp>
+        <p:nvSpPr>
+          <p:cNvPr id="6" name="矩形 28">
+            <a:extLst>
+              <a:ext uri="{FF2B5EF4-FFF2-40B4-BE49-F238E27FC236}">
+                <a16:creationId xmlns:a16="http://schemas.microsoft.com/office/drawing/2014/main" id="{EDEF4DD0-C559-A4F3-499A-7F786A814917}"/>
+              </a:ext>
+            </a:extLst>
+          </p:cNvPr>
+          <p:cNvSpPr/>
+          <p:nvPr/>
+        </p:nvSpPr>
+        <p:spPr>
+          <a:xfrm>
+            <a:off x="2516628" y="1952687"/>
+            <a:ext cx="180755" cy="126754"/>
+          </a:xfrm>
+          <a:prstGeom prst="rect">
+            <a:avLst/>
+          </a:prstGeom>
+          <a:solidFill>
+            <a:schemeClr val="bg1"/>
+          </a:solidFill>
+          <a:ln>
+            <a:noFill/>
+          </a:ln>
+          <a:effectLst/>
+        </p:spPr>
+        <p:style>
+          <a:lnRef idx="1">
+            <a:schemeClr val="accent1"/>
+          </a:lnRef>
+          <a:fillRef idx="3">
+            <a:schemeClr val="accent1"/>
+          </a:fillRef>
+          <a:effectRef idx="2">
+            <a:schemeClr val="accent1"/>
+          </a:effectRef>
+          <a:fontRef idx="minor">
+            <a:schemeClr val="lt1"/>
+          </a:fontRef>
+        </p:style>
+        <p:txBody>
+          <a:bodyPr rtlCol="0" anchor="ctr"/>
+          <a:lstStyle/>
+          <a:p>
+            <a:pPr algn="ctr"/>
+            <a:endParaRPr lang="zh-CN" altLang="en-US"/>
+          </a:p>
+        </p:txBody>
+      </p:sp>
+      <p:sp>
+        <p:nvSpPr>
+          <p:cNvPr id="7" name="矩形 11">
+            <a:extLst>
+              <a:ext uri="{FF2B5EF4-FFF2-40B4-BE49-F238E27FC236}">
+                <a16:creationId xmlns:a16="http://schemas.microsoft.com/office/drawing/2014/main" id="{6C9455F5-6632-58CA-4326-BDB71C27D8DE}"/>
+              </a:ext>
+            </a:extLst>
+          </p:cNvPr>
+          <p:cNvSpPr/>
+          <p:nvPr/>
+        </p:nvSpPr>
+        <p:spPr>
+          <a:xfrm>
+            <a:off x="2119594" y="3864760"/>
+            <a:ext cx="2559523" cy="183137"/>
+          </a:xfrm>
+          <a:prstGeom prst="rect">
+            <a:avLst/>
+          </a:prstGeom>
+          <a:solidFill>
+            <a:srgbClr val="FFC000"/>
+          </a:solidFill>
+          <a:ln>
+            <a:noFill/>
+          </a:ln>
+          <a:effectLst/>
+        </p:spPr>
+        <p:style>
+          <a:lnRef idx="1">
+            <a:schemeClr val="accent1"/>
+          </a:lnRef>
+          <a:fillRef idx="3">
+            <a:schemeClr val="accent1"/>
+          </a:fillRef>
+          <a:effectRef idx="2">
+            <a:schemeClr val="accent1"/>
+          </a:effectRef>
+          <a:fontRef idx="minor">
+            <a:schemeClr val="lt1"/>
+          </a:fontRef>
+        </p:style>
+        <p:txBody>
+          <a:bodyPr rtlCol="0" anchor="ctr"/>
+          <a:lstStyle/>
+          <a:p>
+            <a:pPr algn="ctr"/>
+            <a:endParaRPr lang="zh-CN" altLang="en-US" dirty="0"/>
+          </a:p>
+        </p:txBody>
+      </p:sp>
+      <p:sp>
+        <p:nvSpPr>
+          <p:cNvPr id="8" name="梯形 12">
+            <a:extLst>
+              <a:ext uri="{FF2B5EF4-FFF2-40B4-BE49-F238E27FC236}">
+                <a16:creationId xmlns:a16="http://schemas.microsoft.com/office/drawing/2014/main" id="{A77BE582-CA3A-DB03-8192-3F979C6CEB4F}"/>
+              </a:ext>
+            </a:extLst>
+          </p:cNvPr>
+          <p:cNvSpPr/>
+          <p:nvPr/>
+        </p:nvSpPr>
+        <p:spPr>
+          <a:xfrm>
+            <a:off x="2479742" y="3681711"/>
+            <a:ext cx="1840707" cy="189003"/>
+          </a:xfrm>
+          <a:prstGeom prst="trapezoid">
+            <a:avLst>
+              <a:gd name="adj" fmla="val 109615"/>
+            </a:avLst>
+          </a:prstGeom>
+          <a:solidFill>
+            <a:srgbClr val="FFC000"/>
+          </a:solidFill>
+          <a:ln>
+            <a:noFill/>
+          </a:ln>
+          <a:effectLst/>
+        </p:spPr>
+        <p:style>
+          <a:lnRef idx="1">
+            <a:schemeClr val="accent1"/>
+          </a:lnRef>
+          <a:fillRef idx="3">
+            <a:schemeClr val="accent1"/>
+          </a:fillRef>
+          <a:effectRef idx="2">
+            <a:schemeClr val="accent1"/>
+          </a:effectRef>
+          <a:fontRef idx="minor">
+            <a:schemeClr val="lt1"/>
+          </a:fontRef>
+        </p:style>
+        <p:txBody>
+          <a:bodyPr rtlCol="0" anchor="ctr"/>
+          <a:lstStyle/>
+          <a:p>
+            <a:pPr algn="ctr"/>
+            <a:endParaRPr lang="zh-CN" altLang="en-US" dirty="0"/>
+          </a:p>
+        </p:txBody>
+      </p:sp>
+      <p:sp>
+        <p:nvSpPr>
+          <p:cNvPr id="9" name="矩形 15">
+            <a:extLst>
+              <a:ext uri="{FF2B5EF4-FFF2-40B4-BE49-F238E27FC236}">
+                <a16:creationId xmlns:a16="http://schemas.microsoft.com/office/drawing/2014/main" id="{E7B6882B-B95D-8753-E171-26C4C1458673}"/>
+              </a:ext>
+            </a:extLst>
+          </p:cNvPr>
+          <p:cNvSpPr/>
+          <p:nvPr/>
+        </p:nvSpPr>
+        <p:spPr>
+          <a:xfrm>
+            <a:off x="1936817" y="4047216"/>
+            <a:ext cx="2903221" cy="297180"/>
+          </a:xfrm>
+          <a:prstGeom prst="rect">
+            <a:avLst/>
+          </a:prstGeom>
+          <a:solidFill>
+            <a:schemeClr val="bg1"/>
+          </a:solidFill>
+          <a:ln>
             <a:solidFill>
               <a:schemeClr val="bg1"/>
             </a:solidFill>
-            <a:ln>
-              <a:noFill/>
-            </a:ln>
-            <a:effectLst/>
-          </p:spPr>
-          <p:style>
-            <a:lnRef idx="1">
-              <a:schemeClr val="accent1"/>
-            </a:lnRef>
-            <a:fillRef idx="3">
-              <a:schemeClr val="accent1"/>
-            </a:fillRef>
-            <a:effectRef idx="2">
-              <a:schemeClr val="accent1"/>
-            </a:effectRef>
-            <a:fontRef idx="minor">
-              <a:schemeClr val="lt1"/>
-            </a:fontRef>
-          </p:style>
-          <p:txBody>
-            <a:bodyPr rtlCol="0" anchor="ctr"/>
-            <a:lstStyle/>
-            <a:p>
-              <a:pPr algn="ctr"/>
-              <a:endParaRPr lang="zh-CN" altLang="en-US"/>
-            </a:p>
-          </p:txBody>
-        </p:sp>
-        <p:sp>
-          <p:nvSpPr>
-            <p:cNvPr id="6" name="矩形 28">
-              <a:extLst>
-                <a:ext uri="{FF2B5EF4-FFF2-40B4-BE49-F238E27FC236}">
-                  <a16:creationId xmlns:a16="http://schemas.microsoft.com/office/drawing/2014/main" id="{EDEF4DD0-C559-A4F3-499A-7F786A814917}"/>
-                </a:ext>
-              </a:extLst>
-            </p:cNvPr>
-            <p:cNvSpPr/>
-            <p:nvPr/>
-          </p:nvSpPr>
-          <p:spPr>
-            <a:xfrm>
-              <a:off x="3021453" y="2238437"/>
-              <a:ext cx="180755" cy="126754"/>
-            </a:xfrm>
-            <a:prstGeom prst="rect">
-              <a:avLst/>
-            </a:prstGeom>
+          </a:ln>
+          <a:effectLst/>
+        </p:spPr>
+        <p:style>
+          <a:lnRef idx="1">
+            <a:schemeClr val="accent1"/>
+          </a:lnRef>
+          <a:fillRef idx="3">
+            <a:schemeClr val="accent1"/>
+          </a:fillRef>
+          <a:effectRef idx="2">
+            <a:schemeClr val="accent1"/>
+          </a:effectRef>
+          <a:fontRef idx="minor">
+            <a:schemeClr val="lt1"/>
+          </a:fontRef>
+        </p:style>
+        <p:txBody>
+          <a:bodyPr rtlCol="0" anchor="ctr"/>
+          <a:lstStyle/>
+          <a:p>
+            <a:pPr algn="ctr"/>
+            <a:endParaRPr lang="zh-CN" altLang="en-US"/>
+          </a:p>
+        </p:txBody>
+      </p:sp>
+      <p:sp>
+        <p:nvSpPr>
+          <p:cNvPr id="10" name="矩形 16">
+            <a:extLst>
+              <a:ext uri="{FF2B5EF4-FFF2-40B4-BE49-F238E27FC236}">
+                <a16:creationId xmlns:a16="http://schemas.microsoft.com/office/drawing/2014/main" id="{08729FB5-80AE-0E31-C13F-0178D68EDC99}"/>
+              </a:ext>
+            </a:extLst>
+          </p:cNvPr>
+          <p:cNvSpPr/>
+          <p:nvPr/>
+        </p:nvSpPr>
+        <p:spPr>
+          <a:xfrm>
+            <a:off x="2527395" y="2058340"/>
+            <a:ext cx="180755" cy="61358"/>
+          </a:xfrm>
+          <a:prstGeom prst="rect">
+            <a:avLst/>
+          </a:prstGeom>
+          <a:solidFill>
+            <a:srgbClr val="FFC000"/>
+          </a:solidFill>
+          <a:ln>
+            <a:noFill/>
+          </a:ln>
+          <a:effectLst/>
+        </p:spPr>
+        <p:style>
+          <a:lnRef idx="1">
+            <a:schemeClr val="accent1"/>
+          </a:lnRef>
+          <a:fillRef idx="3">
+            <a:schemeClr val="accent1"/>
+          </a:fillRef>
+          <a:effectRef idx="2">
+            <a:schemeClr val="accent1"/>
+          </a:effectRef>
+          <a:fontRef idx="minor">
+            <a:schemeClr val="lt1"/>
+          </a:fontRef>
+        </p:style>
+        <p:txBody>
+          <a:bodyPr rtlCol="0" anchor="ctr"/>
+          <a:lstStyle/>
+          <a:p>
+            <a:pPr algn="ctr"/>
+            <a:endParaRPr lang="zh-CN" altLang="en-US"/>
+          </a:p>
+        </p:txBody>
+      </p:sp>
+      <p:sp>
+        <p:nvSpPr>
+          <p:cNvPr id="11" name="矩形 17">
+            <a:extLst>
+              <a:ext uri="{FF2B5EF4-FFF2-40B4-BE49-F238E27FC236}">
+                <a16:creationId xmlns:a16="http://schemas.microsoft.com/office/drawing/2014/main" id="{5B04B361-55F5-949C-33EF-57B922950E49}"/>
+              </a:ext>
+            </a:extLst>
+          </p:cNvPr>
+          <p:cNvSpPr/>
+          <p:nvPr/>
+        </p:nvSpPr>
+        <p:spPr>
+          <a:xfrm>
+            <a:off x="2713039" y="1930695"/>
+            <a:ext cx="1372587" cy="61681"/>
+          </a:xfrm>
+          <a:prstGeom prst="rect">
+            <a:avLst/>
+          </a:prstGeom>
+          <a:solidFill>
+            <a:srgbClr val="FFC000"/>
+          </a:solidFill>
+          <a:ln>
+            <a:noFill/>
+          </a:ln>
+          <a:effectLst/>
+        </p:spPr>
+        <p:style>
+          <a:lnRef idx="1">
+            <a:schemeClr val="accent1"/>
+          </a:lnRef>
+          <a:fillRef idx="3">
+            <a:schemeClr val="accent1"/>
+          </a:fillRef>
+          <a:effectRef idx="2">
+            <a:schemeClr val="accent1"/>
+          </a:effectRef>
+          <a:fontRef idx="minor">
+            <a:schemeClr val="lt1"/>
+          </a:fontRef>
+        </p:style>
+        <p:txBody>
+          <a:bodyPr rtlCol="0" anchor="ctr"/>
+          <a:lstStyle/>
+          <a:p>
+            <a:pPr algn="ctr"/>
+            <a:endParaRPr lang="zh-CN" altLang="en-US"/>
+          </a:p>
+        </p:txBody>
+      </p:sp>
+      <p:sp>
+        <p:nvSpPr>
+          <p:cNvPr id="12" name="平行四边形 18">
+            <a:extLst>
+              <a:ext uri="{FF2B5EF4-FFF2-40B4-BE49-F238E27FC236}">
+                <a16:creationId xmlns:a16="http://schemas.microsoft.com/office/drawing/2014/main" id="{4AB697E1-103F-2F20-B2CA-5F043F251029}"/>
+              </a:ext>
+            </a:extLst>
+          </p:cNvPr>
+          <p:cNvSpPr/>
+          <p:nvPr/>
+        </p:nvSpPr>
+        <p:spPr>
+          <a:xfrm>
+            <a:off x="2633885" y="1930694"/>
+            <a:ext cx="151206" cy="189003"/>
+          </a:xfrm>
+          <a:prstGeom prst="parallelogram">
+            <a:avLst>
+              <a:gd name="adj" fmla="val 51629"/>
+            </a:avLst>
+          </a:prstGeom>
+          <a:solidFill>
+            <a:srgbClr val="FFC000"/>
+          </a:solidFill>
+          <a:ln>
+            <a:noFill/>
+          </a:ln>
+          <a:effectLst/>
+        </p:spPr>
+        <p:style>
+          <a:lnRef idx="1">
+            <a:schemeClr val="accent1"/>
+          </a:lnRef>
+          <a:fillRef idx="3">
+            <a:schemeClr val="accent1"/>
+          </a:fillRef>
+          <a:effectRef idx="2">
+            <a:schemeClr val="accent1"/>
+          </a:effectRef>
+          <a:fontRef idx="minor">
+            <a:schemeClr val="lt1"/>
+          </a:fontRef>
+        </p:style>
+        <p:txBody>
+          <a:bodyPr rtlCol="0" anchor="ctr"/>
+          <a:lstStyle/>
+          <a:p>
+            <a:pPr algn="ctr"/>
+            <a:endParaRPr lang="zh-CN" altLang="en-US" dirty="0"/>
+          </a:p>
+        </p:txBody>
+      </p:sp>
+      <p:sp>
+        <p:nvSpPr>
+          <p:cNvPr id="13" name="矩形 20">
+            <a:extLst>
+              <a:ext uri="{FF2B5EF4-FFF2-40B4-BE49-F238E27FC236}">
+                <a16:creationId xmlns:a16="http://schemas.microsoft.com/office/drawing/2014/main" id="{943B0D7C-2846-2BD5-56A4-43596B3C9C7F}"/>
+              </a:ext>
+            </a:extLst>
+          </p:cNvPr>
+          <p:cNvSpPr/>
+          <p:nvPr/>
+        </p:nvSpPr>
+        <p:spPr>
+          <a:xfrm>
+            <a:off x="2459264" y="1869012"/>
+            <a:ext cx="1876425" cy="61681"/>
+          </a:xfrm>
+          <a:prstGeom prst="rect">
+            <a:avLst/>
+          </a:prstGeom>
+          <a:solidFill>
+            <a:schemeClr val="bg2">
+              <a:lumMod val="50000"/>
+            </a:schemeClr>
+          </a:solidFill>
+          <a:ln>
+            <a:noFill/>
+          </a:ln>
+          <a:effectLst/>
+        </p:spPr>
+        <p:style>
+          <a:lnRef idx="1">
+            <a:schemeClr val="accent1"/>
+          </a:lnRef>
+          <a:fillRef idx="3">
+            <a:schemeClr val="accent1"/>
+          </a:fillRef>
+          <a:effectRef idx="2">
+            <a:schemeClr val="accent1"/>
+          </a:effectRef>
+          <a:fontRef idx="minor">
+            <a:schemeClr val="lt1"/>
+          </a:fontRef>
+        </p:style>
+        <p:txBody>
+          <a:bodyPr rtlCol="0" anchor="ctr"/>
+          <a:lstStyle/>
+          <a:p>
+            <a:pPr algn="ctr"/>
+            <a:endParaRPr lang="zh-CN" altLang="en-US"/>
+          </a:p>
+        </p:txBody>
+      </p:sp>
+      <p:sp>
+        <p:nvSpPr>
+          <p:cNvPr id="14" name="矩形 21">
+            <a:extLst>
+              <a:ext uri="{FF2B5EF4-FFF2-40B4-BE49-F238E27FC236}">
+                <a16:creationId xmlns:a16="http://schemas.microsoft.com/office/drawing/2014/main" id="{17ADA884-37C2-2E40-2192-8FBA62B3A016}"/>
+              </a:ext>
+            </a:extLst>
+          </p:cNvPr>
+          <p:cNvSpPr/>
+          <p:nvPr/>
+        </p:nvSpPr>
+        <p:spPr>
+          <a:xfrm>
+            <a:off x="2364808" y="1764216"/>
+            <a:ext cx="2164080" cy="107970"/>
+          </a:xfrm>
+          <a:prstGeom prst="rect">
+            <a:avLst/>
+          </a:prstGeom>
+          <a:solidFill>
+            <a:schemeClr val="bg1"/>
+          </a:solidFill>
+          <a:ln>
             <a:solidFill>
               <a:schemeClr val="bg1"/>
             </a:solidFill>
-            <a:ln>
+          </a:ln>
+          <a:effectLst/>
+        </p:spPr>
+        <p:style>
+          <a:lnRef idx="1">
+            <a:schemeClr val="accent1"/>
+          </a:lnRef>
+          <a:fillRef idx="3">
+            <a:schemeClr val="accent1"/>
+          </a:fillRef>
+          <a:effectRef idx="2">
+            <a:schemeClr val="accent1"/>
+          </a:effectRef>
+          <a:fontRef idx="minor">
+            <a:schemeClr val="lt1"/>
+          </a:fontRef>
+        </p:style>
+        <p:txBody>
+          <a:bodyPr rtlCol="0" anchor="ctr"/>
+          <a:lstStyle/>
+          <a:p>
+            <a:pPr algn="ctr"/>
+            <a:endParaRPr lang="zh-CN" altLang="en-US"/>
+          </a:p>
+        </p:txBody>
+      </p:sp>
+      <p:sp>
+        <p:nvSpPr>
+          <p:cNvPr id="15" name="平行四边形 22">
+            <a:extLst>
+              <a:ext uri="{FF2B5EF4-FFF2-40B4-BE49-F238E27FC236}">
+                <a16:creationId xmlns:a16="http://schemas.microsoft.com/office/drawing/2014/main" id="{B8E6F9B3-ADE5-75F6-76F0-FE263EED224A}"/>
+              </a:ext>
+            </a:extLst>
+          </p:cNvPr>
+          <p:cNvSpPr/>
+          <p:nvPr/>
+        </p:nvSpPr>
+        <p:spPr>
+          <a:xfrm flipH="1">
+            <a:off x="4010023" y="1930694"/>
+            <a:ext cx="151206" cy="189003"/>
+          </a:xfrm>
+          <a:prstGeom prst="parallelogram">
+            <a:avLst>
+              <a:gd name="adj" fmla="val 51629"/>
+            </a:avLst>
+          </a:prstGeom>
+          <a:solidFill>
+            <a:srgbClr val="FFC000"/>
+          </a:solidFill>
+          <a:ln>
+            <a:noFill/>
+          </a:ln>
+          <a:effectLst/>
+        </p:spPr>
+        <p:style>
+          <a:lnRef idx="1">
+            <a:schemeClr val="accent1"/>
+          </a:lnRef>
+          <a:fillRef idx="3">
+            <a:schemeClr val="accent1"/>
+          </a:fillRef>
+          <a:effectRef idx="2">
+            <a:schemeClr val="accent1"/>
+          </a:effectRef>
+          <a:fontRef idx="minor">
+            <a:schemeClr val="lt1"/>
+          </a:fontRef>
+        </p:style>
+        <p:txBody>
+          <a:bodyPr rtlCol="0" anchor="ctr"/>
+          <a:lstStyle/>
+          <a:p>
+            <a:pPr algn="ctr"/>
+            <a:endParaRPr lang="zh-CN" altLang="en-US" dirty="0"/>
+          </a:p>
+        </p:txBody>
+      </p:sp>
+      <p:sp>
+        <p:nvSpPr>
+          <p:cNvPr id="16" name="矩形 23">
+            <a:extLst>
+              <a:ext uri="{FF2B5EF4-FFF2-40B4-BE49-F238E27FC236}">
+                <a16:creationId xmlns:a16="http://schemas.microsoft.com/office/drawing/2014/main" id="{079E2F54-12EF-6182-A8BC-25CF7147D136}"/>
+              </a:ext>
+            </a:extLst>
+          </p:cNvPr>
+          <p:cNvSpPr/>
+          <p:nvPr/>
+        </p:nvSpPr>
+        <p:spPr>
+          <a:xfrm>
+            <a:off x="4087154" y="2057772"/>
+            <a:ext cx="180755" cy="61358"/>
+          </a:xfrm>
+          <a:prstGeom prst="rect">
+            <a:avLst/>
+          </a:prstGeom>
+          <a:solidFill>
+            <a:srgbClr val="FFC000"/>
+          </a:solidFill>
+          <a:ln>
+            <a:noFill/>
+          </a:ln>
+          <a:effectLst/>
+        </p:spPr>
+        <p:style>
+          <a:lnRef idx="1">
+            <a:schemeClr val="accent1"/>
+          </a:lnRef>
+          <a:fillRef idx="3">
+            <a:schemeClr val="accent1"/>
+          </a:fillRef>
+          <a:effectRef idx="2">
+            <a:schemeClr val="accent1"/>
+          </a:effectRef>
+          <a:fontRef idx="minor">
+            <a:schemeClr val="lt1"/>
+          </a:fontRef>
+        </p:style>
+        <p:txBody>
+          <a:bodyPr rtlCol="0" anchor="ctr"/>
+          <a:lstStyle/>
+          <a:p>
+            <a:pPr algn="ctr"/>
+            <a:endParaRPr lang="zh-CN" altLang="en-US"/>
+          </a:p>
+        </p:txBody>
+      </p:sp>
+      <p:cxnSp>
+        <p:nvCxnSpPr>
+          <p:cNvPr id="17" name="直接连接符 32">
+            <a:extLst>
+              <a:ext uri="{FF2B5EF4-FFF2-40B4-BE49-F238E27FC236}">
+                <a16:creationId xmlns:a16="http://schemas.microsoft.com/office/drawing/2014/main" id="{2AAED2FA-0DB5-E839-443A-D3777EDA6941}"/>
+              </a:ext>
+            </a:extLst>
+          </p:cNvPr>
+          <p:cNvCxnSpPr>
+            <a:cxnSpLocks/>
+          </p:cNvCxnSpPr>
+          <p:nvPr/>
+        </p:nvCxnSpPr>
+        <p:spPr>
+          <a:xfrm flipV="1">
+            <a:off x="2479742" y="3864760"/>
+            <a:ext cx="0" cy="391589"/>
+          </a:xfrm>
+          <a:prstGeom prst="line">
+            <a:avLst/>
+          </a:prstGeom>
+          <a:ln w="12700">
+            <a:solidFill>
+              <a:schemeClr val="tx1"/>
+            </a:solidFill>
+            <a:prstDash val="sysDash"/>
+          </a:ln>
+          <a:effectLst/>
+        </p:spPr>
+        <p:style>
+          <a:lnRef idx="2">
+            <a:schemeClr val="accent1"/>
+          </a:lnRef>
+          <a:fillRef idx="0">
+            <a:schemeClr val="accent1"/>
+          </a:fillRef>
+          <a:effectRef idx="1">
+            <a:schemeClr val="accent1"/>
+          </a:effectRef>
+          <a:fontRef idx="minor">
+            <a:schemeClr val="tx1"/>
+          </a:fontRef>
+        </p:style>
+      </p:cxnSp>
+      <p:cxnSp>
+        <p:nvCxnSpPr>
+          <p:cNvPr id="18" name="直接连接符 33">
+            <a:extLst>
+              <a:ext uri="{FF2B5EF4-FFF2-40B4-BE49-F238E27FC236}">
+                <a16:creationId xmlns:a16="http://schemas.microsoft.com/office/drawing/2014/main" id="{EC7E9C66-DA0C-AF41-B3B8-D9A450E0C371}"/>
+              </a:ext>
+            </a:extLst>
+          </p:cNvPr>
+          <p:cNvCxnSpPr>
+            <a:cxnSpLocks/>
+          </p:cNvCxnSpPr>
+          <p:nvPr/>
+        </p:nvCxnSpPr>
+        <p:spPr>
+          <a:xfrm flipV="1">
+            <a:off x="4310040" y="3867539"/>
+            <a:ext cx="0" cy="388810"/>
+          </a:xfrm>
+          <a:prstGeom prst="line">
+            <a:avLst/>
+          </a:prstGeom>
+          <a:ln w="12700">
+            <a:solidFill>
+              <a:schemeClr val="tx1"/>
+            </a:solidFill>
+            <a:prstDash val="sysDash"/>
+          </a:ln>
+          <a:effectLst/>
+        </p:spPr>
+        <p:style>
+          <a:lnRef idx="2">
+            <a:schemeClr val="accent1"/>
+          </a:lnRef>
+          <a:fillRef idx="0">
+            <a:schemeClr val="accent1"/>
+          </a:fillRef>
+          <a:effectRef idx="1">
+            <a:schemeClr val="accent1"/>
+          </a:effectRef>
+          <a:fontRef idx="minor">
+            <a:schemeClr val="tx1"/>
+          </a:fontRef>
+        </p:style>
+      </p:cxnSp>
+      <mc:AlternateContent xmlns:mc="http://schemas.openxmlformats.org/markup-compatibility/2006">
+        <mc:Choice xmlns:a14="http://schemas.microsoft.com/office/drawing/2010/main" Requires="a14">
+          <p:sp>
+            <p:nvSpPr>
+              <p:cNvPr id="19" name="文本框 34">
+                <a:extLst>
+                  <a:ext uri="{FF2B5EF4-FFF2-40B4-BE49-F238E27FC236}">
+                    <a16:creationId xmlns:a16="http://schemas.microsoft.com/office/drawing/2014/main" id="{9BFF6D14-AAFB-1623-268A-38D518B54B1E}"/>
+                  </a:ext>
+                </a:extLst>
+              </p:cNvPr>
+              <p:cNvSpPr txBox="1"/>
+              <p:nvPr/>
+            </p:nvSpPr>
+            <p:spPr>
+              <a:xfrm>
+                <a:off x="3006804" y="4069635"/>
+                <a:ext cx="678326" cy="394019"/>
+              </a:xfrm>
+              <a:prstGeom prst="rect">
+                <a:avLst/>
+              </a:prstGeom>
               <a:noFill/>
-            </a:ln>
-            <a:effectLst/>
-          </p:spPr>
-          <p:style>
-            <a:lnRef idx="1">
-              <a:schemeClr val="accent1"/>
-            </a:lnRef>
-            <a:fillRef idx="3">
-              <a:schemeClr val="accent1"/>
-            </a:fillRef>
-            <a:effectRef idx="2">
-              <a:schemeClr val="accent1"/>
-            </a:effectRef>
-            <a:fontRef idx="minor">
-              <a:schemeClr val="lt1"/>
-            </a:fontRef>
-          </p:style>
-          <p:txBody>
-            <a:bodyPr rtlCol="0" anchor="ctr"/>
-            <a:lstStyle/>
-            <a:p>
-              <a:pPr algn="ctr"/>
-              <a:endParaRPr lang="zh-CN" altLang="en-US"/>
-            </a:p>
-          </p:txBody>
-        </p:sp>
-        <p:sp>
-          <p:nvSpPr>
-            <p:cNvPr id="7" name="矩形 11">
-              <a:extLst>
-                <a:ext uri="{FF2B5EF4-FFF2-40B4-BE49-F238E27FC236}">
-                  <a16:creationId xmlns:a16="http://schemas.microsoft.com/office/drawing/2014/main" id="{6C9455F5-6632-58CA-4326-BDB71C27D8DE}"/>
-                </a:ext>
-              </a:extLst>
-            </p:cNvPr>
-            <p:cNvSpPr/>
-            <p:nvPr/>
-          </p:nvSpPr>
-          <p:spPr>
-            <a:xfrm>
-              <a:off x="2624419" y="4150510"/>
-              <a:ext cx="2559523" cy="183137"/>
-            </a:xfrm>
-            <a:prstGeom prst="rect">
-              <a:avLst/>
-            </a:prstGeom>
+            </p:spPr>
+            <p:txBody>
+              <a:bodyPr wrap="none" rtlCol="0">
+                <a:spAutoFit/>
+              </a:bodyPr>
+              <a:lstStyle/>
+              <a:p>
+                <a:pPr/>
+                <a14:m>
+                  <m:oMathPara xmlns:m="http://schemas.openxmlformats.org/officeDocument/2006/math">
+                    <m:oMathParaPr>
+                      <m:jc m:val="centerGroup"/>
+                    </m:oMathParaPr>
+                    <m:oMath xmlns:m="http://schemas.openxmlformats.org/officeDocument/2006/math">
+                      <m:sSub>
+                        <m:sSubPr>
+                          <m:ctrlPr>
+                            <a:rPr lang="en-GB" altLang="zh-CN" b="0" i="1" smtClean="0">
+                              <a:latin typeface="Cambria Math" panose="02040503050406030204" pitchFamily="18" charset="0"/>
+                            </a:rPr>
+                          </m:ctrlPr>
+                        </m:sSubPr>
+                        <m:e>
+                          <m:r>
+                            <a:rPr lang="en-GB" altLang="zh-CN" b="0" i="1" smtClean="0">
+                              <a:latin typeface="Cambria Math" panose="02040503050406030204" pitchFamily="18" charset="0"/>
+                            </a:rPr>
+                            <m:t>𝑑</m:t>
+                          </m:r>
+                        </m:e>
+                        <m:sub>
+                          <m:r>
+                            <m:rPr>
+                              <m:sty m:val="p"/>
+                            </m:rPr>
+                            <a:rPr lang="en-GB" altLang="zh-CN" b="0" i="0" smtClean="0">
+                              <a:latin typeface="Cambria Math" panose="02040503050406030204" pitchFamily="18" charset="0"/>
+                            </a:rPr>
+                            <m:t>pad</m:t>
+                          </m:r>
+                        </m:sub>
+                      </m:sSub>
+                    </m:oMath>
+                  </m:oMathPara>
+                </a14:m>
+                <a:endParaRPr lang="zh-CN" altLang="en-US" dirty="0"/>
+              </a:p>
+            </p:txBody>
+          </p:sp>
+        </mc:Choice>
+        <mc:Fallback>
+          <p:sp>
+            <p:nvSpPr>
+              <p:cNvPr id="19" name="文本框 34">
+                <a:extLst>
+                  <a:ext uri="{FF2B5EF4-FFF2-40B4-BE49-F238E27FC236}">
+                    <a16:creationId xmlns:a16="http://schemas.microsoft.com/office/drawing/2014/main" id="{9BFF6D14-AAFB-1623-268A-38D518B54B1E}"/>
+                  </a:ext>
+                </a:extLst>
+              </p:cNvPr>
+              <p:cNvSpPr txBox="1">
+                <a:spLocks noRot="1" noChangeAspect="1" noMove="1" noResize="1" noEditPoints="1" noAdjustHandles="1" noChangeArrowheads="1" noChangeShapeType="1" noTextEdit="1"/>
+              </p:cNvSpPr>
+              <p:nvPr/>
+            </p:nvSpPr>
+            <p:spPr>
+              <a:xfrm>
+                <a:off x="3006804" y="4069635"/>
+                <a:ext cx="678326" cy="394019"/>
+              </a:xfrm>
+              <a:prstGeom prst="rect">
+                <a:avLst/>
+              </a:prstGeom>
+              <a:blipFill>
+                <a:blip r:embed="rId2"/>
+                <a:stretch>
+                  <a:fillRect b="-10938"/>
+                </a:stretch>
+              </a:blipFill>
+            </p:spPr>
+            <p:txBody>
+              <a:bodyPr/>
+              <a:lstStyle/>
+              <a:p>
+                <a:r>
+                  <a:rPr lang="nl-NL">
+                    <a:noFill/>
+                  </a:rPr>
+                  <a:t> </a:t>
+                </a:r>
+              </a:p>
+            </p:txBody>
+          </p:sp>
+        </mc:Fallback>
+      </mc:AlternateContent>
+      <p:cxnSp>
+        <p:nvCxnSpPr>
+          <p:cNvPr id="20" name="直接箭头连接符 36">
+            <a:extLst>
+              <a:ext uri="{FF2B5EF4-FFF2-40B4-BE49-F238E27FC236}">
+                <a16:creationId xmlns:a16="http://schemas.microsoft.com/office/drawing/2014/main" id="{074EC014-F403-2BFF-3F93-B22432857656}"/>
+              </a:ext>
+            </a:extLst>
+          </p:cNvPr>
+          <p:cNvCxnSpPr>
+            <a:cxnSpLocks/>
+          </p:cNvCxnSpPr>
+          <p:nvPr/>
+        </p:nvCxnSpPr>
+        <p:spPr>
+          <a:xfrm flipH="1">
+            <a:off x="2514044" y="4267565"/>
+            <a:ext cx="492760" cy="0"/>
+          </a:xfrm>
+          <a:prstGeom prst="straightConnector1">
+            <a:avLst/>
+          </a:prstGeom>
+          <a:ln w="12700">
             <a:solidFill>
-              <a:srgbClr val="FFC000"/>
+              <a:schemeClr val="tx1"/>
             </a:solidFill>
-            <a:ln>
+            <a:tailEnd type="triangle"/>
+          </a:ln>
+        </p:spPr>
+        <p:style>
+          <a:lnRef idx="2">
+            <a:schemeClr val="accent1"/>
+          </a:lnRef>
+          <a:fillRef idx="0">
+            <a:schemeClr val="accent1"/>
+          </a:fillRef>
+          <a:effectRef idx="1">
+            <a:schemeClr val="accent1"/>
+          </a:effectRef>
+          <a:fontRef idx="minor">
+            <a:schemeClr val="tx1"/>
+          </a:fontRef>
+        </p:style>
+      </p:cxnSp>
+      <p:cxnSp>
+        <p:nvCxnSpPr>
+          <p:cNvPr id="21" name="直接箭头连接符 37">
+            <a:extLst>
+              <a:ext uri="{FF2B5EF4-FFF2-40B4-BE49-F238E27FC236}">
+                <a16:creationId xmlns:a16="http://schemas.microsoft.com/office/drawing/2014/main" id="{6A3A3ED7-3F99-E95A-8949-4FC76F790AB5}"/>
+              </a:ext>
+            </a:extLst>
+          </p:cNvPr>
+          <p:cNvCxnSpPr>
+            <a:cxnSpLocks/>
+          </p:cNvCxnSpPr>
+          <p:nvPr/>
+        </p:nvCxnSpPr>
+        <p:spPr>
+          <a:xfrm>
+            <a:off x="3774013" y="4267565"/>
+            <a:ext cx="492760" cy="0"/>
+          </a:xfrm>
+          <a:prstGeom prst="straightConnector1">
+            <a:avLst/>
+          </a:prstGeom>
+          <a:ln w="12700">
+            <a:solidFill>
+              <a:schemeClr val="tx1"/>
+            </a:solidFill>
+            <a:tailEnd type="triangle"/>
+          </a:ln>
+        </p:spPr>
+        <p:style>
+          <a:lnRef idx="2">
+            <a:schemeClr val="accent1"/>
+          </a:lnRef>
+          <a:fillRef idx="0">
+            <a:schemeClr val="accent1"/>
+          </a:fillRef>
+          <a:effectRef idx="1">
+            <a:schemeClr val="accent1"/>
+          </a:effectRef>
+          <a:fontRef idx="minor">
+            <a:schemeClr val="tx1"/>
+          </a:fontRef>
+        </p:style>
+      </p:cxnSp>
+      <p:cxnSp>
+        <p:nvCxnSpPr>
+          <p:cNvPr id="22" name="直接连接符 38">
+            <a:extLst>
+              <a:ext uri="{FF2B5EF4-FFF2-40B4-BE49-F238E27FC236}">
+                <a16:creationId xmlns:a16="http://schemas.microsoft.com/office/drawing/2014/main" id="{DB77A8F7-F180-CFF7-24BD-13186EF79739}"/>
+              </a:ext>
+            </a:extLst>
+          </p:cNvPr>
+          <p:cNvCxnSpPr>
+            <a:cxnSpLocks/>
+          </p:cNvCxnSpPr>
+          <p:nvPr/>
+        </p:nvCxnSpPr>
+        <p:spPr>
+          <a:xfrm rot="16200000" flipH="1" flipV="1">
+            <a:off x="4558066" y="3609680"/>
+            <a:ext cx="0" cy="487680"/>
+          </a:xfrm>
+          <a:prstGeom prst="line">
+            <a:avLst/>
+          </a:prstGeom>
+          <a:ln w="12700">
+            <a:solidFill>
+              <a:schemeClr val="tx1"/>
+            </a:solidFill>
+            <a:prstDash val="sysDash"/>
+          </a:ln>
+          <a:effectLst/>
+        </p:spPr>
+        <p:style>
+          <a:lnRef idx="2">
+            <a:schemeClr val="accent1"/>
+          </a:lnRef>
+          <a:fillRef idx="0">
+            <a:schemeClr val="accent1"/>
+          </a:fillRef>
+          <a:effectRef idx="1">
+            <a:schemeClr val="accent1"/>
+          </a:effectRef>
+          <a:fontRef idx="minor">
+            <a:schemeClr val="tx1"/>
+          </a:fontRef>
+        </p:style>
+      </p:cxnSp>
+      <p:cxnSp>
+        <p:nvCxnSpPr>
+          <p:cNvPr id="23" name="直接连接符 40">
+            <a:extLst>
+              <a:ext uri="{FF2B5EF4-FFF2-40B4-BE49-F238E27FC236}">
+                <a16:creationId xmlns:a16="http://schemas.microsoft.com/office/drawing/2014/main" id="{2BA61931-7759-B1F8-A5FD-91787F9D8380}"/>
+              </a:ext>
+            </a:extLst>
+          </p:cNvPr>
+          <p:cNvCxnSpPr>
+            <a:cxnSpLocks/>
+          </p:cNvCxnSpPr>
+          <p:nvPr/>
+        </p:nvCxnSpPr>
+        <p:spPr>
+          <a:xfrm>
+            <a:off x="4118042" y="3681880"/>
+            <a:ext cx="683864" cy="0"/>
+          </a:xfrm>
+          <a:prstGeom prst="line">
+            <a:avLst/>
+          </a:prstGeom>
+          <a:ln w="12700">
+            <a:solidFill>
+              <a:schemeClr val="tx1"/>
+            </a:solidFill>
+            <a:prstDash val="sysDash"/>
+          </a:ln>
+          <a:effectLst/>
+        </p:spPr>
+        <p:style>
+          <a:lnRef idx="2">
+            <a:schemeClr val="accent1"/>
+          </a:lnRef>
+          <a:fillRef idx="0">
+            <a:schemeClr val="accent1"/>
+          </a:fillRef>
+          <a:effectRef idx="1">
+            <a:schemeClr val="accent1"/>
+          </a:effectRef>
+          <a:fontRef idx="minor">
+            <a:schemeClr val="tx1"/>
+          </a:fontRef>
+        </p:style>
+      </p:cxnSp>
+      <mc:AlternateContent xmlns:mc="http://schemas.openxmlformats.org/markup-compatibility/2006">
+        <mc:Choice xmlns:a14="http://schemas.microsoft.com/office/drawing/2010/main" Requires="a14">
+          <p:sp>
+            <p:nvSpPr>
+              <p:cNvPr id="24" name="文本框 41">
+                <a:extLst>
+                  <a:ext uri="{FF2B5EF4-FFF2-40B4-BE49-F238E27FC236}">
+                    <a16:creationId xmlns:a16="http://schemas.microsoft.com/office/drawing/2014/main" id="{6BBFA5D5-5554-D3FE-1E80-8BCB11E0A820}"/>
+                  </a:ext>
+                </a:extLst>
+              </p:cNvPr>
+              <p:cNvSpPr txBox="1"/>
+              <p:nvPr/>
+            </p:nvSpPr>
+            <p:spPr>
+              <a:xfrm>
+                <a:off x="4794286" y="3564136"/>
+                <a:ext cx="633250" cy="394019"/>
+              </a:xfrm>
+              <a:prstGeom prst="rect">
+                <a:avLst/>
+              </a:prstGeom>
               <a:noFill/>
-            </a:ln>
-            <a:effectLst/>
-          </p:spPr>
-          <p:style>
-            <a:lnRef idx="1">
-              <a:schemeClr val="accent1"/>
-            </a:lnRef>
-            <a:fillRef idx="3">
-              <a:schemeClr val="accent1"/>
-            </a:fillRef>
-            <a:effectRef idx="2">
-              <a:schemeClr val="accent1"/>
-            </a:effectRef>
-            <a:fontRef idx="minor">
-              <a:schemeClr val="lt1"/>
-            </a:fontRef>
-          </p:style>
-          <p:txBody>
-            <a:bodyPr rtlCol="0" anchor="ctr"/>
-            <a:lstStyle/>
-            <a:p>
-              <a:pPr algn="ctr"/>
-              <a:endParaRPr lang="zh-CN" altLang="en-US" dirty="0"/>
-            </a:p>
-          </p:txBody>
-        </p:sp>
-        <p:sp>
-          <p:nvSpPr>
-            <p:cNvPr id="8" name="梯形 12">
-              <a:extLst>
-                <a:ext uri="{FF2B5EF4-FFF2-40B4-BE49-F238E27FC236}">
-                  <a16:creationId xmlns:a16="http://schemas.microsoft.com/office/drawing/2014/main" id="{A77BE582-CA3A-DB03-8192-3F979C6CEB4F}"/>
-                </a:ext>
-              </a:extLst>
-            </p:cNvPr>
-            <p:cNvSpPr/>
-            <p:nvPr/>
-          </p:nvSpPr>
-          <p:spPr>
-            <a:xfrm>
-              <a:off x="2984567" y="3967461"/>
-              <a:ext cx="1840707" cy="189003"/>
-            </a:xfrm>
-            <a:prstGeom prst="trapezoid">
-              <a:avLst>
-                <a:gd name="adj" fmla="val 109615"/>
-              </a:avLst>
-            </a:prstGeom>
+            </p:spPr>
+            <p:txBody>
+              <a:bodyPr wrap="none" rtlCol="0">
+                <a:spAutoFit/>
+              </a:bodyPr>
+              <a:lstStyle/>
+              <a:p>
+                <a:pPr/>
+                <a14:m>
+                  <m:oMathPara xmlns:m="http://schemas.openxmlformats.org/officeDocument/2006/math">
+                    <m:oMathParaPr>
+                      <m:jc m:val="centerGroup"/>
+                    </m:oMathParaPr>
+                    <m:oMath xmlns:m="http://schemas.openxmlformats.org/officeDocument/2006/math">
+                      <m:sSub>
+                        <m:sSubPr>
+                          <m:ctrlPr>
+                            <a:rPr lang="en-GB" altLang="zh-CN" b="0" i="1" smtClean="0">
+                              <a:latin typeface="Cambria Math" panose="02040503050406030204" pitchFamily="18" charset="0"/>
+                            </a:rPr>
+                          </m:ctrlPr>
+                        </m:sSubPr>
+                        <m:e>
+                          <m:r>
+                            <a:rPr lang="en-GB" altLang="zh-CN" b="0" i="1" smtClean="0">
+                              <a:latin typeface="Cambria Math" panose="02040503050406030204" pitchFamily="18" charset="0"/>
+                            </a:rPr>
+                            <m:t>𝑡</m:t>
+                          </m:r>
+                        </m:e>
+                        <m:sub>
+                          <m:r>
+                            <m:rPr>
+                              <m:sty m:val="p"/>
+                            </m:rPr>
+                            <a:rPr lang="en-GB" altLang="zh-CN" b="0" i="0" smtClean="0">
+                              <a:latin typeface="Cambria Math" panose="02040503050406030204" pitchFamily="18" charset="0"/>
+                            </a:rPr>
+                            <m:t>pad</m:t>
+                          </m:r>
+                        </m:sub>
+                      </m:sSub>
+                    </m:oMath>
+                  </m:oMathPara>
+                </a14:m>
+                <a:endParaRPr lang="zh-CN" altLang="en-US" dirty="0"/>
+              </a:p>
+            </p:txBody>
+          </p:sp>
+        </mc:Choice>
+        <mc:Fallback>
+          <p:sp>
+            <p:nvSpPr>
+              <p:cNvPr id="24" name="文本框 41">
+                <a:extLst>
+                  <a:ext uri="{FF2B5EF4-FFF2-40B4-BE49-F238E27FC236}">
+                    <a16:creationId xmlns:a16="http://schemas.microsoft.com/office/drawing/2014/main" id="{6BBFA5D5-5554-D3FE-1E80-8BCB11E0A820}"/>
+                  </a:ext>
+                </a:extLst>
+              </p:cNvPr>
+              <p:cNvSpPr txBox="1">
+                <a:spLocks noRot="1" noChangeAspect="1" noMove="1" noResize="1" noEditPoints="1" noAdjustHandles="1" noChangeArrowheads="1" noChangeShapeType="1" noTextEdit="1"/>
+              </p:cNvSpPr>
+              <p:nvPr/>
+            </p:nvSpPr>
+            <p:spPr>
+              <a:xfrm>
+                <a:off x="4794286" y="3564136"/>
+                <a:ext cx="633250" cy="394019"/>
+              </a:xfrm>
+              <a:prstGeom prst="rect">
+                <a:avLst/>
+              </a:prstGeom>
+              <a:blipFill>
+                <a:blip r:embed="rId3"/>
+                <a:stretch>
+                  <a:fillRect b="-10938"/>
+                </a:stretch>
+              </a:blipFill>
+            </p:spPr>
+            <p:txBody>
+              <a:bodyPr/>
+              <a:lstStyle/>
+              <a:p>
+                <a:r>
+                  <a:rPr lang="nl-NL">
+                    <a:noFill/>
+                  </a:rPr>
+                  <a:t> </a:t>
+                </a:r>
+              </a:p>
+            </p:txBody>
+          </p:sp>
+        </mc:Fallback>
+      </mc:AlternateContent>
+      <p:cxnSp>
+        <p:nvCxnSpPr>
+          <p:cNvPr id="25" name="直接箭头连接符 44">
+            <a:extLst>
+              <a:ext uri="{FF2B5EF4-FFF2-40B4-BE49-F238E27FC236}">
+                <a16:creationId xmlns:a16="http://schemas.microsoft.com/office/drawing/2014/main" id="{19D68F92-9C17-4799-F871-079E3D255337}"/>
+              </a:ext>
+            </a:extLst>
+          </p:cNvPr>
+          <p:cNvCxnSpPr>
+            <a:cxnSpLocks/>
+          </p:cNvCxnSpPr>
+          <p:nvPr/>
+        </p:nvCxnSpPr>
+        <p:spPr>
+          <a:xfrm flipV="1">
+            <a:off x="4776291" y="3670115"/>
+            <a:ext cx="0" cy="209885"/>
+          </a:xfrm>
+          <a:prstGeom prst="straightConnector1">
+            <a:avLst/>
+          </a:prstGeom>
+          <a:ln w="12700">
             <a:solidFill>
-              <a:srgbClr val="FFC000"/>
+              <a:schemeClr val="tx1"/>
             </a:solidFill>
-            <a:ln>
+            <a:headEnd type="triangle"/>
+            <a:tailEnd type="triangle"/>
+          </a:ln>
+          <a:effectLst/>
+        </p:spPr>
+        <p:style>
+          <a:lnRef idx="2">
+            <a:schemeClr val="accent1"/>
+          </a:lnRef>
+          <a:fillRef idx="0">
+            <a:schemeClr val="accent1"/>
+          </a:fillRef>
+          <a:effectRef idx="1">
+            <a:schemeClr val="accent1"/>
+          </a:effectRef>
+          <a:fontRef idx="minor">
+            <a:schemeClr val="tx1"/>
+          </a:fontRef>
+        </p:style>
+      </p:cxnSp>
+      <p:cxnSp>
+        <p:nvCxnSpPr>
+          <p:cNvPr id="26" name="直接连接符 48">
+            <a:extLst>
+              <a:ext uri="{FF2B5EF4-FFF2-40B4-BE49-F238E27FC236}">
+                <a16:creationId xmlns:a16="http://schemas.microsoft.com/office/drawing/2014/main" id="{72A36516-94F5-1AFE-C805-C9CDC98A6AD3}"/>
+              </a:ext>
+            </a:extLst>
+          </p:cNvPr>
+          <p:cNvCxnSpPr>
+            <a:cxnSpLocks/>
+          </p:cNvCxnSpPr>
+          <p:nvPr/>
+        </p:nvCxnSpPr>
+        <p:spPr>
+          <a:xfrm flipV="1">
+            <a:off x="2134938" y="2813200"/>
+            <a:ext cx="0" cy="391589"/>
+          </a:xfrm>
+          <a:prstGeom prst="line">
+            <a:avLst/>
+          </a:prstGeom>
+          <a:ln w="12700">
+            <a:solidFill>
+              <a:schemeClr val="tx1"/>
+            </a:solidFill>
+            <a:prstDash val="sysDash"/>
+          </a:ln>
+          <a:effectLst/>
+        </p:spPr>
+        <p:style>
+          <a:lnRef idx="2">
+            <a:schemeClr val="accent1"/>
+          </a:lnRef>
+          <a:fillRef idx="0">
+            <a:schemeClr val="accent1"/>
+          </a:fillRef>
+          <a:effectRef idx="1">
+            <a:schemeClr val="accent1"/>
+          </a:effectRef>
+          <a:fontRef idx="minor">
+            <a:schemeClr val="tx1"/>
+          </a:fontRef>
+        </p:style>
+      </p:cxnSp>
+      <p:cxnSp>
+        <p:nvCxnSpPr>
+          <p:cNvPr id="27" name="直接连接符 49">
+            <a:extLst>
+              <a:ext uri="{FF2B5EF4-FFF2-40B4-BE49-F238E27FC236}">
+                <a16:creationId xmlns:a16="http://schemas.microsoft.com/office/drawing/2014/main" id="{28E8C7AA-D4FA-16DD-3140-C5AC95B412C6}"/>
+              </a:ext>
+            </a:extLst>
+          </p:cNvPr>
+          <p:cNvCxnSpPr>
+            <a:cxnSpLocks/>
+          </p:cNvCxnSpPr>
+          <p:nvPr/>
+        </p:nvCxnSpPr>
+        <p:spPr>
+          <a:xfrm flipV="1">
+            <a:off x="2532826" y="2813200"/>
+            <a:ext cx="0" cy="388810"/>
+          </a:xfrm>
+          <a:prstGeom prst="line">
+            <a:avLst/>
+          </a:prstGeom>
+          <a:ln w="12700">
+            <a:solidFill>
+              <a:schemeClr val="tx1"/>
+            </a:solidFill>
+            <a:prstDash val="sysDash"/>
+          </a:ln>
+          <a:effectLst/>
+        </p:spPr>
+        <p:style>
+          <a:lnRef idx="2">
+            <a:schemeClr val="accent1"/>
+          </a:lnRef>
+          <a:fillRef idx="0">
+            <a:schemeClr val="accent1"/>
+          </a:fillRef>
+          <a:effectRef idx="1">
+            <a:schemeClr val="accent1"/>
+          </a:effectRef>
+          <a:fontRef idx="minor">
+            <a:schemeClr val="tx1"/>
+          </a:fontRef>
+        </p:style>
+      </p:cxnSp>
+      <p:cxnSp>
+        <p:nvCxnSpPr>
+          <p:cNvPr id="28" name="直接箭头连接符 51">
+            <a:extLst>
+              <a:ext uri="{FF2B5EF4-FFF2-40B4-BE49-F238E27FC236}">
+                <a16:creationId xmlns:a16="http://schemas.microsoft.com/office/drawing/2014/main" id="{C5247297-5E4F-5227-3488-B56F169CA607}"/>
+              </a:ext>
+            </a:extLst>
+          </p:cNvPr>
+          <p:cNvCxnSpPr/>
+          <p:nvPr/>
+        </p:nvCxnSpPr>
+        <p:spPr>
+          <a:xfrm>
+            <a:off x="2142558" y="3026662"/>
+            <a:ext cx="379106" cy="0"/>
+          </a:xfrm>
+          <a:prstGeom prst="straightConnector1">
+            <a:avLst/>
+          </a:prstGeom>
+          <a:ln w="12700">
+            <a:solidFill>
+              <a:schemeClr val="tx1"/>
+            </a:solidFill>
+            <a:headEnd type="triangle"/>
+            <a:tailEnd type="triangle"/>
+          </a:ln>
+          <a:effectLst/>
+        </p:spPr>
+        <p:style>
+          <a:lnRef idx="2">
+            <a:schemeClr val="accent1"/>
+          </a:lnRef>
+          <a:fillRef idx="0">
+            <a:schemeClr val="accent1"/>
+          </a:fillRef>
+          <a:effectRef idx="1">
+            <a:schemeClr val="accent1"/>
+          </a:effectRef>
+          <a:fontRef idx="minor">
+            <a:schemeClr val="tx1"/>
+          </a:fontRef>
+        </p:style>
+      </p:cxnSp>
+      <mc:AlternateContent xmlns:mc="http://schemas.openxmlformats.org/markup-compatibility/2006">
+        <mc:Choice xmlns:a14="http://schemas.microsoft.com/office/drawing/2010/main" Requires="a14">
+          <p:sp>
+            <p:nvSpPr>
+              <p:cNvPr id="29" name="文本框 52">
+                <a:extLst>
+                  <a:ext uri="{FF2B5EF4-FFF2-40B4-BE49-F238E27FC236}">
+                    <a16:creationId xmlns:a16="http://schemas.microsoft.com/office/drawing/2014/main" id="{B4D3E390-0BB2-3EA2-2405-C25CA859BA9F}"/>
+                  </a:ext>
+                </a:extLst>
+              </p:cNvPr>
+              <p:cNvSpPr txBox="1"/>
+              <p:nvPr/>
+            </p:nvSpPr>
+            <p:spPr>
+              <a:xfrm>
+                <a:off x="2144125" y="2453403"/>
+                <a:ext cx="625428" cy="369332"/>
+              </a:xfrm>
+              <a:prstGeom prst="rect">
+                <a:avLst/>
+              </a:prstGeom>
               <a:noFill/>
-            </a:ln>
-            <a:effectLst/>
-          </p:spPr>
-          <p:style>
-            <a:lnRef idx="1">
-              <a:schemeClr val="accent1"/>
-            </a:lnRef>
-            <a:fillRef idx="3">
-              <a:schemeClr val="accent1"/>
-            </a:fillRef>
-            <a:effectRef idx="2">
-              <a:schemeClr val="accent1"/>
-            </a:effectRef>
-            <a:fontRef idx="minor">
-              <a:schemeClr val="lt1"/>
-            </a:fontRef>
-          </p:style>
-          <p:txBody>
-            <a:bodyPr rtlCol="0" anchor="ctr"/>
-            <a:lstStyle/>
-            <a:p>
-              <a:pPr algn="ctr"/>
-              <a:endParaRPr lang="zh-CN" altLang="en-US" dirty="0"/>
-            </a:p>
-          </p:txBody>
-        </p:sp>
-        <p:sp>
-          <p:nvSpPr>
-            <p:cNvPr id="9" name="矩形 15">
-              <a:extLst>
-                <a:ext uri="{FF2B5EF4-FFF2-40B4-BE49-F238E27FC236}">
-                  <a16:creationId xmlns:a16="http://schemas.microsoft.com/office/drawing/2014/main" id="{E7B6882B-B95D-8753-E171-26C4C1458673}"/>
-                </a:ext>
-              </a:extLst>
-            </p:cNvPr>
-            <p:cNvSpPr/>
-            <p:nvPr/>
-          </p:nvSpPr>
-          <p:spPr>
-            <a:xfrm>
-              <a:off x="2441642" y="4332966"/>
-              <a:ext cx="2903221" cy="297180"/>
-            </a:xfrm>
-            <a:prstGeom prst="rect">
-              <a:avLst/>
-            </a:prstGeom>
+            </p:spPr>
+            <p:txBody>
+              <a:bodyPr wrap="none" rtlCol="0">
+                <a:spAutoFit/>
+              </a:bodyPr>
+              <a:lstStyle/>
+              <a:p>
+                <a:pPr/>
+                <a14:m>
+                  <m:oMathPara xmlns:m="http://schemas.openxmlformats.org/officeDocument/2006/math">
+                    <m:oMathParaPr>
+                      <m:jc m:val="centerGroup"/>
+                    </m:oMathParaPr>
+                    <m:oMath xmlns:m="http://schemas.openxmlformats.org/officeDocument/2006/math">
+                      <m:sSub>
+                        <m:sSubPr>
+                          <m:ctrlPr>
+                            <a:rPr lang="en-GB" altLang="zh-CN" b="0" i="1" smtClean="0">
+                              <a:latin typeface="Cambria Math" panose="02040503050406030204" pitchFamily="18" charset="0"/>
+                            </a:rPr>
+                          </m:ctrlPr>
+                        </m:sSubPr>
+                        <m:e>
+                          <m:r>
+                            <a:rPr lang="en-GB" altLang="zh-CN" b="0" i="1" smtClean="0">
+                              <a:latin typeface="Cambria Math" panose="02040503050406030204" pitchFamily="18" charset="0"/>
+                            </a:rPr>
+                            <m:t>𝑑</m:t>
+                          </m:r>
+                        </m:e>
+                        <m:sub>
+                          <m:r>
+                            <m:rPr>
+                              <m:sty m:val="p"/>
+                            </m:rPr>
+                            <a:rPr lang="en-GB" altLang="zh-CN" b="0" i="0" smtClean="0">
+                              <a:latin typeface="Cambria Math" panose="02040503050406030204" pitchFamily="18" charset="0"/>
+                            </a:rPr>
+                            <m:t>del</m:t>
+                          </m:r>
+                        </m:sub>
+                      </m:sSub>
+                    </m:oMath>
+                  </m:oMathPara>
+                </a14:m>
+                <a:endParaRPr lang="zh-CN" altLang="en-US" dirty="0"/>
+              </a:p>
+            </p:txBody>
+          </p:sp>
+        </mc:Choice>
+        <mc:Fallback>
+          <p:sp>
+            <p:nvSpPr>
+              <p:cNvPr id="29" name="文本框 52">
+                <a:extLst>
+                  <a:ext uri="{FF2B5EF4-FFF2-40B4-BE49-F238E27FC236}">
+                    <a16:creationId xmlns:a16="http://schemas.microsoft.com/office/drawing/2014/main" id="{B4D3E390-0BB2-3EA2-2405-C25CA859BA9F}"/>
+                  </a:ext>
+                </a:extLst>
+              </p:cNvPr>
+              <p:cNvSpPr txBox="1">
+                <a:spLocks noRot="1" noChangeAspect="1" noMove="1" noResize="1" noEditPoints="1" noAdjustHandles="1" noChangeArrowheads="1" noChangeShapeType="1" noTextEdit="1"/>
+              </p:cNvSpPr>
+              <p:nvPr/>
+            </p:nvSpPr>
+            <p:spPr>
+              <a:xfrm>
+                <a:off x="2144125" y="2453403"/>
+                <a:ext cx="625428" cy="369332"/>
+              </a:xfrm>
+              <a:prstGeom prst="rect">
+                <a:avLst/>
+              </a:prstGeom>
+              <a:blipFill>
+                <a:blip r:embed="rId4"/>
+                <a:stretch>
+                  <a:fillRect/>
+                </a:stretch>
+              </a:blipFill>
+            </p:spPr>
+            <p:txBody>
+              <a:bodyPr/>
+              <a:lstStyle/>
+              <a:p>
+                <a:r>
+                  <a:rPr lang="nl-NL">
+                    <a:noFill/>
+                  </a:rPr>
+                  <a:t> </a:t>
+                </a:r>
+              </a:p>
+            </p:txBody>
+          </p:sp>
+        </mc:Fallback>
+      </mc:AlternateContent>
+      <p:cxnSp>
+        <p:nvCxnSpPr>
+          <p:cNvPr id="30" name="直接箭头连接符 57">
+            <a:extLst>
+              <a:ext uri="{FF2B5EF4-FFF2-40B4-BE49-F238E27FC236}">
+                <a16:creationId xmlns:a16="http://schemas.microsoft.com/office/drawing/2014/main" id="{C66D4462-DB2E-230E-EEA7-B8CAA4DB4266}"/>
+              </a:ext>
+            </a:extLst>
+          </p:cNvPr>
+          <p:cNvCxnSpPr>
+            <a:cxnSpLocks/>
+          </p:cNvCxnSpPr>
+          <p:nvPr/>
+        </p:nvCxnSpPr>
+        <p:spPr>
+          <a:xfrm>
+            <a:off x="4276009" y="2088451"/>
+            <a:ext cx="199205" cy="0"/>
+          </a:xfrm>
+          <a:prstGeom prst="straightConnector1">
+            <a:avLst/>
+          </a:prstGeom>
+          <a:ln w="12700">
             <a:solidFill>
-              <a:schemeClr val="bg1"/>
+              <a:schemeClr val="tx1"/>
             </a:solidFill>
-            <a:ln>
-              <a:solidFill>
-                <a:schemeClr val="bg1"/>
-              </a:solidFill>
-            </a:ln>
-            <a:effectLst/>
-          </p:spPr>
-          <p:style>
-            <a:lnRef idx="1">
-              <a:schemeClr val="accent1"/>
-            </a:lnRef>
-            <a:fillRef idx="3">
-              <a:schemeClr val="accent1"/>
-            </a:fillRef>
-            <a:effectRef idx="2">
-              <a:schemeClr val="accent1"/>
-            </a:effectRef>
-            <a:fontRef idx="minor">
-              <a:schemeClr val="lt1"/>
-            </a:fontRef>
-          </p:style>
-          <p:txBody>
-            <a:bodyPr rtlCol="0" anchor="ctr"/>
-            <a:lstStyle/>
-            <a:p>
-              <a:pPr algn="ctr"/>
-              <a:endParaRPr lang="zh-CN" altLang="en-US"/>
-            </a:p>
-          </p:txBody>
-        </p:sp>
-        <p:sp>
-          <p:nvSpPr>
-            <p:cNvPr id="10" name="矩形 16">
-              <a:extLst>
-                <a:ext uri="{FF2B5EF4-FFF2-40B4-BE49-F238E27FC236}">
-                  <a16:creationId xmlns:a16="http://schemas.microsoft.com/office/drawing/2014/main" id="{08729FB5-80AE-0E31-C13F-0178D68EDC99}"/>
-                </a:ext>
-              </a:extLst>
-            </p:cNvPr>
-            <p:cNvSpPr/>
-            <p:nvPr/>
-          </p:nvSpPr>
-          <p:spPr>
-            <a:xfrm>
-              <a:off x="3032220" y="2344090"/>
-              <a:ext cx="180755" cy="61358"/>
-            </a:xfrm>
-            <a:prstGeom prst="rect">
-              <a:avLst/>
-            </a:prstGeom>
+            <a:tailEnd type="triangle"/>
+          </a:ln>
+        </p:spPr>
+        <p:style>
+          <a:lnRef idx="2">
+            <a:schemeClr val="accent1"/>
+          </a:lnRef>
+          <a:fillRef idx="0">
+            <a:schemeClr val="accent1"/>
+          </a:fillRef>
+          <a:effectRef idx="1">
+            <a:schemeClr val="accent1"/>
+          </a:effectRef>
+          <a:fontRef idx="minor">
+            <a:schemeClr val="tx1"/>
+          </a:fontRef>
+        </p:style>
+      </p:cxnSp>
+      <mc:AlternateContent xmlns:mc="http://schemas.openxmlformats.org/markup-compatibility/2006">
+        <mc:Choice xmlns:a14="http://schemas.microsoft.com/office/drawing/2010/main" Requires="a14">
+          <p:sp>
+            <p:nvSpPr>
+              <p:cNvPr id="31" name="文本框 59">
+                <a:extLst>
+                  <a:ext uri="{FF2B5EF4-FFF2-40B4-BE49-F238E27FC236}">
+                    <a16:creationId xmlns:a16="http://schemas.microsoft.com/office/drawing/2014/main" id="{09F91885-7197-2E58-95DC-2DF0A89116DA}"/>
+                  </a:ext>
+                </a:extLst>
+              </p:cNvPr>
+              <p:cNvSpPr txBox="1"/>
+              <p:nvPr/>
+            </p:nvSpPr>
+            <p:spPr>
+              <a:xfrm>
+                <a:off x="4434559" y="1895168"/>
+                <a:ext cx="692561" cy="369332"/>
+              </a:xfrm>
+              <a:prstGeom prst="rect">
+                <a:avLst/>
+              </a:prstGeom>
+              <a:noFill/>
+            </p:spPr>
+            <p:txBody>
+              <a:bodyPr wrap="none" rtlCol="0">
+                <a:spAutoFit/>
+              </a:bodyPr>
+              <a:lstStyle/>
+              <a:p>
+                <a:pPr/>
+                <a14:m>
+                  <m:oMathPara xmlns:m="http://schemas.openxmlformats.org/officeDocument/2006/math">
+                    <m:oMathParaPr>
+                      <m:jc m:val="centerGroup"/>
+                    </m:oMathParaPr>
+                    <m:oMath xmlns:m="http://schemas.openxmlformats.org/officeDocument/2006/math">
+                      <m:sSub>
+                        <m:sSubPr>
+                          <m:ctrlPr>
+                            <a:rPr lang="en-GB" altLang="zh-CN" b="0" i="1" smtClean="0">
+                              <a:latin typeface="Cambria Math" panose="02040503050406030204" pitchFamily="18" charset="0"/>
+                            </a:rPr>
+                          </m:ctrlPr>
+                        </m:sSubPr>
+                        <m:e>
+                          <m:r>
+                            <a:rPr lang="en-GB" altLang="zh-CN" b="0" i="1" smtClean="0">
+                              <a:latin typeface="Cambria Math" panose="02040503050406030204" pitchFamily="18" charset="0"/>
+                            </a:rPr>
+                            <m:t>𝑡</m:t>
+                          </m:r>
+                        </m:e>
+                        <m:sub>
+                          <m:r>
+                            <m:rPr>
+                              <m:sty m:val="p"/>
+                            </m:rPr>
+                            <a:rPr lang="en-GB" altLang="zh-CN" b="0" i="0" smtClean="0">
+                              <a:latin typeface="Cambria Math" panose="02040503050406030204" pitchFamily="18" charset="0"/>
+                            </a:rPr>
+                            <m:t>ubm</m:t>
+                          </m:r>
+                        </m:sub>
+                      </m:sSub>
+                    </m:oMath>
+                  </m:oMathPara>
+                </a14:m>
+                <a:endParaRPr lang="zh-CN" altLang="en-US" dirty="0"/>
+              </a:p>
+            </p:txBody>
+          </p:sp>
+        </mc:Choice>
+        <mc:Fallback>
+          <p:sp>
+            <p:nvSpPr>
+              <p:cNvPr id="31" name="文本框 59">
+                <a:extLst>
+                  <a:ext uri="{FF2B5EF4-FFF2-40B4-BE49-F238E27FC236}">
+                    <a16:creationId xmlns:a16="http://schemas.microsoft.com/office/drawing/2014/main" id="{09F91885-7197-2E58-95DC-2DF0A89116DA}"/>
+                  </a:ext>
+                </a:extLst>
+              </p:cNvPr>
+              <p:cNvSpPr txBox="1">
+                <a:spLocks noRot="1" noChangeAspect="1" noMove="1" noResize="1" noEditPoints="1" noAdjustHandles="1" noChangeArrowheads="1" noChangeShapeType="1" noTextEdit="1"/>
+              </p:cNvSpPr>
+              <p:nvPr/>
+            </p:nvSpPr>
+            <p:spPr>
+              <a:xfrm>
+                <a:off x="4434559" y="1895168"/>
+                <a:ext cx="692561" cy="369332"/>
+              </a:xfrm>
+              <a:prstGeom prst="rect">
+                <a:avLst/>
+              </a:prstGeom>
+              <a:blipFill>
+                <a:blip r:embed="rId5"/>
+                <a:stretch>
+                  <a:fillRect b="-1667"/>
+                </a:stretch>
+              </a:blipFill>
+            </p:spPr>
+            <p:txBody>
+              <a:bodyPr/>
+              <a:lstStyle/>
+              <a:p>
+                <a:r>
+                  <a:rPr lang="nl-NL">
+                    <a:noFill/>
+                  </a:rPr>
+                  <a:t> </a:t>
+                </a:r>
+              </a:p>
+            </p:txBody>
+          </p:sp>
+        </mc:Fallback>
+      </mc:AlternateContent>
+      <mc:AlternateContent xmlns:mc="http://schemas.openxmlformats.org/markup-compatibility/2006">
+        <mc:Choice xmlns:a14="http://schemas.microsoft.com/office/drawing/2010/main" Requires="a14">
+          <p:sp>
+            <p:nvSpPr>
+              <p:cNvPr id="32" name="文本框 64">
+                <a:extLst>
+                  <a:ext uri="{FF2B5EF4-FFF2-40B4-BE49-F238E27FC236}">
+                    <a16:creationId xmlns:a16="http://schemas.microsoft.com/office/drawing/2014/main" id="{73EA87E7-47EB-1079-3C03-BE8B8FE4F9D3}"/>
+                  </a:ext>
+                </a:extLst>
+              </p:cNvPr>
+              <p:cNvSpPr txBox="1"/>
+              <p:nvPr/>
+            </p:nvSpPr>
+            <p:spPr>
+              <a:xfrm>
+                <a:off x="1347482" y="2650413"/>
+                <a:ext cx="671915" cy="369332"/>
+              </a:xfrm>
+              <a:prstGeom prst="rect">
+                <a:avLst/>
+              </a:prstGeom>
+              <a:noFill/>
+            </p:spPr>
+            <p:txBody>
+              <a:bodyPr wrap="none" rtlCol="0">
+                <a:spAutoFit/>
+              </a:bodyPr>
+              <a:lstStyle/>
+              <a:p>
+                <a:pPr/>
+                <a14:m>
+                  <m:oMathPara xmlns:m="http://schemas.openxmlformats.org/officeDocument/2006/math">
+                    <m:oMathParaPr>
+                      <m:jc m:val="centerGroup"/>
+                    </m:oMathParaPr>
+                    <m:oMath xmlns:m="http://schemas.openxmlformats.org/officeDocument/2006/math">
+                      <m:sSub>
+                        <m:sSubPr>
+                          <m:ctrlPr>
+                            <a:rPr lang="en-GB" altLang="zh-CN" b="0" i="1" smtClean="0">
+                              <a:latin typeface="Cambria Math" panose="02040503050406030204" pitchFamily="18" charset="0"/>
+                            </a:rPr>
+                          </m:ctrlPr>
+                        </m:sSubPr>
+                        <m:e>
+                          <m:r>
+                            <a:rPr lang="en-GB" altLang="zh-CN" b="0" i="1" smtClean="0">
+                              <a:latin typeface="Cambria Math" panose="02040503050406030204" pitchFamily="18" charset="0"/>
+                            </a:rPr>
+                            <m:t>h</m:t>
+                          </m:r>
+                        </m:e>
+                        <m:sub>
+                          <m:r>
+                            <m:rPr>
+                              <m:sty m:val="p"/>
+                            </m:rPr>
+                            <a:rPr lang="en-GB" altLang="zh-CN" b="0" i="0" smtClean="0">
+                              <a:latin typeface="Cambria Math" panose="02040503050406030204" pitchFamily="18" charset="0"/>
+                            </a:rPr>
+                            <m:t>ball</m:t>
+                          </m:r>
+                        </m:sub>
+                      </m:sSub>
+                    </m:oMath>
+                  </m:oMathPara>
+                </a14:m>
+                <a:endParaRPr lang="zh-CN" altLang="en-US" dirty="0"/>
+              </a:p>
+            </p:txBody>
+          </p:sp>
+        </mc:Choice>
+        <mc:Fallback>
+          <p:sp>
+            <p:nvSpPr>
+              <p:cNvPr id="32" name="文本框 64">
+                <a:extLst>
+                  <a:ext uri="{FF2B5EF4-FFF2-40B4-BE49-F238E27FC236}">
+                    <a16:creationId xmlns:a16="http://schemas.microsoft.com/office/drawing/2014/main" id="{73EA87E7-47EB-1079-3C03-BE8B8FE4F9D3}"/>
+                  </a:ext>
+                </a:extLst>
+              </p:cNvPr>
+              <p:cNvSpPr txBox="1">
+                <a:spLocks noRot="1" noChangeAspect="1" noMove="1" noResize="1" noEditPoints="1" noAdjustHandles="1" noChangeArrowheads="1" noChangeShapeType="1" noTextEdit="1"/>
+              </p:cNvSpPr>
+              <p:nvPr/>
+            </p:nvSpPr>
+            <p:spPr>
+              <a:xfrm>
+                <a:off x="1347482" y="2650413"/>
+                <a:ext cx="671915" cy="369332"/>
+              </a:xfrm>
+              <a:prstGeom prst="rect">
+                <a:avLst/>
+              </a:prstGeom>
+              <a:blipFill>
+                <a:blip r:embed="rId6"/>
+                <a:stretch>
+                  <a:fillRect b="-1667"/>
+                </a:stretch>
+              </a:blipFill>
+            </p:spPr>
+            <p:txBody>
+              <a:bodyPr/>
+              <a:lstStyle/>
+              <a:p>
+                <a:r>
+                  <a:rPr lang="nl-NL">
+                    <a:noFill/>
+                  </a:rPr>
+                  <a:t> </a:t>
+                </a:r>
+              </a:p>
+            </p:txBody>
+          </p:sp>
+        </mc:Fallback>
+      </mc:AlternateContent>
+      <p:cxnSp>
+        <p:nvCxnSpPr>
+          <p:cNvPr id="33" name="直接连接符 65">
+            <a:extLst>
+              <a:ext uri="{FF2B5EF4-FFF2-40B4-BE49-F238E27FC236}">
+                <a16:creationId xmlns:a16="http://schemas.microsoft.com/office/drawing/2014/main" id="{71B99A2D-F457-70DF-B787-BA3573F0FADA}"/>
+              </a:ext>
+            </a:extLst>
+          </p:cNvPr>
+          <p:cNvCxnSpPr>
+            <a:cxnSpLocks/>
+          </p:cNvCxnSpPr>
+          <p:nvPr/>
+        </p:nvCxnSpPr>
+        <p:spPr>
+          <a:xfrm>
+            <a:off x="1936817" y="1992274"/>
+            <a:ext cx="1484682" cy="0"/>
+          </a:xfrm>
+          <a:prstGeom prst="line">
+            <a:avLst/>
+          </a:prstGeom>
+          <a:ln w="12700">
             <a:solidFill>
-              <a:srgbClr val="FFC000"/>
+              <a:schemeClr val="tx1"/>
             </a:solidFill>
-            <a:ln>
+            <a:prstDash val="sysDash"/>
+          </a:ln>
+          <a:effectLst/>
+        </p:spPr>
+        <p:style>
+          <a:lnRef idx="2">
+            <a:schemeClr val="accent1"/>
+          </a:lnRef>
+          <a:fillRef idx="0">
+            <a:schemeClr val="accent1"/>
+          </a:fillRef>
+          <a:effectRef idx="1">
+            <a:schemeClr val="accent1"/>
+          </a:effectRef>
+          <a:fontRef idx="minor">
+            <a:schemeClr val="tx1"/>
+          </a:fontRef>
+        </p:style>
+      </p:cxnSp>
+      <p:cxnSp>
+        <p:nvCxnSpPr>
+          <p:cNvPr id="34" name="直接连接符 67">
+            <a:extLst>
+              <a:ext uri="{FF2B5EF4-FFF2-40B4-BE49-F238E27FC236}">
+                <a16:creationId xmlns:a16="http://schemas.microsoft.com/office/drawing/2014/main" id="{6BFE6BDF-6B0A-7CC4-0E5F-971409CF404F}"/>
+              </a:ext>
+            </a:extLst>
+          </p:cNvPr>
+          <p:cNvCxnSpPr>
+            <a:cxnSpLocks/>
+          </p:cNvCxnSpPr>
+          <p:nvPr/>
+        </p:nvCxnSpPr>
+        <p:spPr>
+          <a:xfrm>
+            <a:off x="1946926" y="3681711"/>
+            <a:ext cx="1484682" cy="0"/>
+          </a:xfrm>
+          <a:prstGeom prst="line">
+            <a:avLst/>
+          </a:prstGeom>
+          <a:ln w="12700">
+            <a:solidFill>
+              <a:schemeClr val="tx1"/>
+            </a:solidFill>
+            <a:prstDash val="sysDash"/>
+          </a:ln>
+          <a:effectLst/>
+        </p:spPr>
+        <p:style>
+          <a:lnRef idx="2">
+            <a:schemeClr val="accent1"/>
+          </a:lnRef>
+          <a:fillRef idx="0">
+            <a:schemeClr val="accent1"/>
+          </a:fillRef>
+          <a:effectRef idx="1">
+            <a:schemeClr val="accent1"/>
+          </a:effectRef>
+          <a:fontRef idx="minor">
+            <a:schemeClr val="tx1"/>
+          </a:fontRef>
+        </p:style>
+      </p:cxnSp>
+      <p:cxnSp>
+        <p:nvCxnSpPr>
+          <p:cNvPr id="35" name="直接箭头连接符 68">
+            <a:extLst>
+              <a:ext uri="{FF2B5EF4-FFF2-40B4-BE49-F238E27FC236}">
+                <a16:creationId xmlns:a16="http://schemas.microsoft.com/office/drawing/2014/main" id="{F87B1142-BD76-6E5D-FC1D-31929D2ACB2A}"/>
+              </a:ext>
+            </a:extLst>
+          </p:cNvPr>
+          <p:cNvCxnSpPr>
+            <a:cxnSpLocks/>
+          </p:cNvCxnSpPr>
+          <p:nvPr/>
+        </p:nvCxnSpPr>
+        <p:spPr>
+          <a:xfrm flipV="1">
+            <a:off x="1962166" y="1992376"/>
+            <a:ext cx="0" cy="1689335"/>
+          </a:xfrm>
+          <a:prstGeom prst="straightConnector1">
+            <a:avLst/>
+          </a:prstGeom>
+          <a:ln w="12700">
+            <a:solidFill>
+              <a:schemeClr val="tx1"/>
+            </a:solidFill>
+            <a:prstDash val="solid"/>
+            <a:headEnd type="triangle"/>
+            <a:tailEnd type="triangle"/>
+          </a:ln>
+          <a:effectLst/>
+        </p:spPr>
+        <p:style>
+          <a:lnRef idx="2">
+            <a:schemeClr val="accent1"/>
+          </a:lnRef>
+          <a:fillRef idx="0">
+            <a:schemeClr val="accent1"/>
+          </a:fillRef>
+          <a:effectRef idx="1">
+            <a:schemeClr val="accent1"/>
+          </a:effectRef>
+          <a:fontRef idx="minor">
+            <a:schemeClr val="tx1"/>
+          </a:fontRef>
+        </p:style>
+      </p:cxnSp>
+      <p:cxnSp>
+        <p:nvCxnSpPr>
+          <p:cNvPr id="36" name="直接连接符 69">
+            <a:extLst>
+              <a:ext uri="{FF2B5EF4-FFF2-40B4-BE49-F238E27FC236}">
+                <a16:creationId xmlns:a16="http://schemas.microsoft.com/office/drawing/2014/main" id="{83E07AD7-19F2-8EFF-E574-E23CE09B280E}"/>
+              </a:ext>
+            </a:extLst>
+          </p:cNvPr>
+          <p:cNvCxnSpPr>
+            <a:cxnSpLocks/>
+          </p:cNvCxnSpPr>
+          <p:nvPr/>
+        </p:nvCxnSpPr>
+        <p:spPr>
+          <a:xfrm flipV="1">
+            <a:off x="2532826" y="1248687"/>
+            <a:ext cx="0" cy="785858"/>
+          </a:xfrm>
+          <a:prstGeom prst="line">
+            <a:avLst/>
+          </a:prstGeom>
+          <a:ln w="12700">
+            <a:solidFill>
+              <a:schemeClr val="tx1"/>
+            </a:solidFill>
+            <a:prstDash val="sysDash"/>
+          </a:ln>
+          <a:effectLst/>
+        </p:spPr>
+        <p:style>
+          <a:lnRef idx="2">
+            <a:schemeClr val="accent1"/>
+          </a:lnRef>
+          <a:fillRef idx="0">
+            <a:schemeClr val="accent1"/>
+          </a:fillRef>
+          <a:effectRef idx="1">
+            <a:schemeClr val="accent1"/>
+          </a:effectRef>
+          <a:fontRef idx="minor">
+            <a:schemeClr val="tx1"/>
+          </a:fontRef>
+        </p:style>
+      </p:cxnSp>
+      <p:cxnSp>
+        <p:nvCxnSpPr>
+          <p:cNvPr id="37" name="直接连接符 70">
+            <a:extLst>
+              <a:ext uri="{FF2B5EF4-FFF2-40B4-BE49-F238E27FC236}">
+                <a16:creationId xmlns:a16="http://schemas.microsoft.com/office/drawing/2014/main" id="{DAFA7AB6-81CD-39F3-C5F2-CD5F6F9AAD07}"/>
+              </a:ext>
+            </a:extLst>
+          </p:cNvPr>
+          <p:cNvCxnSpPr>
+            <a:cxnSpLocks/>
+          </p:cNvCxnSpPr>
+          <p:nvPr/>
+        </p:nvCxnSpPr>
+        <p:spPr>
+          <a:xfrm flipV="1">
+            <a:off x="4266581" y="1248687"/>
+            <a:ext cx="0" cy="785858"/>
+          </a:xfrm>
+          <a:prstGeom prst="line">
+            <a:avLst/>
+          </a:prstGeom>
+          <a:ln w="12700">
+            <a:solidFill>
+              <a:schemeClr val="tx1"/>
+            </a:solidFill>
+            <a:prstDash val="sysDash"/>
+          </a:ln>
+          <a:effectLst/>
+        </p:spPr>
+        <p:style>
+          <a:lnRef idx="2">
+            <a:schemeClr val="accent1"/>
+          </a:lnRef>
+          <a:fillRef idx="0">
+            <a:schemeClr val="accent1"/>
+          </a:fillRef>
+          <a:effectRef idx="1">
+            <a:schemeClr val="accent1"/>
+          </a:effectRef>
+          <a:fontRef idx="minor">
+            <a:schemeClr val="tx1"/>
+          </a:fontRef>
+        </p:style>
+      </p:cxnSp>
+      <mc:AlternateContent xmlns:mc="http://schemas.openxmlformats.org/markup-compatibility/2006">
+        <mc:Choice xmlns:a14="http://schemas.microsoft.com/office/drawing/2010/main" Requires="a14">
+          <p:sp>
+            <p:nvSpPr>
+              <p:cNvPr id="38" name="文本框 71">
+                <a:extLst>
+                  <a:ext uri="{FF2B5EF4-FFF2-40B4-BE49-F238E27FC236}">
+                    <a16:creationId xmlns:a16="http://schemas.microsoft.com/office/drawing/2014/main" id="{CE3F4E67-F389-FBD0-2888-7426EF1E3216}"/>
+                  </a:ext>
+                </a:extLst>
+              </p:cNvPr>
+              <p:cNvSpPr txBox="1"/>
+              <p:nvPr/>
+            </p:nvSpPr>
+            <p:spPr>
+              <a:xfrm>
+                <a:off x="3052039" y="1062591"/>
+                <a:ext cx="738920" cy="369332"/>
+              </a:xfrm>
+              <a:prstGeom prst="rect">
+                <a:avLst/>
+              </a:prstGeom>
               <a:noFill/>
-            </a:ln>
-            <a:effectLst/>
-          </p:spPr>
-          <p:style>
-            <a:lnRef idx="1">
-              <a:schemeClr val="accent1"/>
-            </a:lnRef>
-            <a:fillRef idx="3">
-              <a:schemeClr val="accent1"/>
-            </a:fillRef>
-            <a:effectRef idx="2">
-              <a:schemeClr val="accent1"/>
-            </a:effectRef>
-            <a:fontRef idx="minor">
-              <a:schemeClr val="lt1"/>
-            </a:fontRef>
-          </p:style>
-          <p:txBody>
-            <a:bodyPr rtlCol="0" anchor="ctr"/>
-            <a:lstStyle/>
-            <a:p>
-              <a:pPr algn="ctr"/>
-              <a:endParaRPr lang="zh-CN" altLang="en-US"/>
-            </a:p>
-          </p:txBody>
-        </p:sp>
-        <p:sp>
-          <p:nvSpPr>
-            <p:cNvPr id="11" name="矩形 17">
-              <a:extLst>
-                <a:ext uri="{FF2B5EF4-FFF2-40B4-BE49-F238E27FC236}">
-                  <a16:creationId xmlns:a16="http://schemas.microsoft.com/office/drawing/2014/main" id="{5B04B361-55F5-949C-33EF-57B922950E49}"/>
-                </a:ext>
-              </a:extLst>
-            </p:cNvPr>
-            <p:cNvSpPr/>
-            <p:nvPr/>
-          </p:nvSpPr>
-          <p:spPr>
-            <a:xfrm>
-              <a:off x="3217864" y="2216445"/>
-              <a:ext cx="1372587" cy="61681"/>
-            </a:xfrm>
-            <a:prstGeom prst="rect">
-              <a:avLst/>
-            </a:prstGeom>
+            </p:spPr>
+            <p:txBody>
+              <a:bodyPr wrap="none" rtlCol="0">
+                <a:spAutoFit/>
+              </a:bodyPr>
+              <a:lstStyle/>
+              <a:p>
+                <a:pPr/>
+                <a14:m>
+                  <m:oMathPara xmlns:m="http://schemas.openxmlformats.org/officeDocument/2006/math">
+                    <m:oMathParaPr>
+                      <m:jc m:val="centerGroup"/>
+                    </m:oMathParaPr>
+                    <m:oMath xmlns:m="http://schemas.openxmlformats.org/officeDocument/2006/math">
+                      <m:sSub>
+                        <m:sSubPr>
+                          <m:ctrlPr>
+                            <a:rPr lang="en-GB" altLang="zh-CN" b="0" i="1" smtClean="0">
+                              <a:latin typeface="Cambria Math" panose="02040503050406030204" pitchFamily="18" charset="0"/>
+                            </a:rPr>
+                          </m:ctrlPr>
+                        </m:sSubPr>
+                        <m:e>
+                          <m:r>
+                            <a:rPr lang="en-GB" altLang="zh-CN" b="0" i="1" smtClean="0">
+                              <a:latin typeface="Cambria Math" panose="02040503050406030204" pitchFamily="18" charset="0"/>
+                            </a:rPr>
+                            <m:t>𝑑</m:t>
+                          </m:r>
+                        </m:e>
+                        <m:sub>
+                          <m:r>
+                            <m:rPr>
+                              <m:sty m:val="p"/>
+                            </m:rPr>
+                            <a:rPr lang="en-GB" altLang="zh-CN" b="0" i="0" smtClean="0">
+                              <a:latin typeface="Cambria Math" panose="02040503050406030204" pitchFamily="18" charset="0"/>
+                            </a:rPr>
+                            <m:t>ubm</m:t>
+                          </m:r>
+                        </m:sub>
+                      </m:sSub>
+                    </m:oMath>
+                  </m:oMathPara>
+                </a14:m>
+                <a:endParaRPr lang="zh-CN" altLang="en-US" dirty="0"/>
+              </a:p>
+            </p:txBody>
+          </p:sp>
+        </mc:Choice>
+        <mc:Fallback>
+          <p:sp>
+            <p:nvSpPr>
+              <p:cNvPr id="38" name="文本框 71">
+                <a:extLst>
+                  <a:ext uri="{FF2B5EF4-FFF2-40B4-BE49-F238E27FC236}">
+                    <a16:creationId xmlns:a16="http://schemas.microsoft.com/office/drawing/2014/main" id="{CE3F4E67-F389-FBD0-2888-7426EF1E3216}"/>
+                  </a:ext>
+                </a:extLst>
+              </p:cNvPr>
+              <p:cNvSpPr txBox="1">
+                <a:spLocks noRot="1" noChangeAspect="1" noMove="1" noResize="1" noEditPoints="1" noAdjustHandles="1" noChangeArrowheads="1" noChangeShapeType="1" noTextEdit="1"/>
+              </p:cNvSpPr>
+              <p:nvPr/>
+            </p:nvSpPr>
+            <p:spPr>
+              <a:xfrm>
+                <a:off x="3052039" y="1062591"/>
+                <a:ext cx="738920" cy="369332"/>
+              </a:xfrm>
+              <a:prstGeom prst="rect">
+                <a:avLst/>
+              </a:prstGeom>
+              <a:blipFill>
+                <a:blip r:embed="rId7"/>
+                <a:stretch>
+                  <a:fillRect/>
+                </a:stretch>
+              </a:blipFill>
+            </p:spPr>
+            <p:txBody>
+              <a:bodyPr/>
+              <a:lstStyle/>
+              <a:p>
+                <a:r>
+                  <a:rPr lang="nl-NL">
+                    <a:noFill/>
+                  </a:rPr>
+                  <a:t> </a:t>
+                </a:r>
+              </a:p>
+            </p:txBody>
+          </p:sp>
+        </mc:Fallback>
+      </mc:AlternateContent>
+      <p:cxnSp>
+        <p:nvCxnSpPr>
+          <p:cNvPr id="39" name="直接箭头连接符 72">
+            <a:extLst>
+              <a:ext uri="{FF2B5EF4-FFF2-40B4-BE49-F238E27FC236}">
+                <a16:creationId xmlns:a16="http://schemas.microsoft.com/office/drawing/2014/main" id="{CAAEF860-14D0-E92C-E928-B30B76FE844C}"/>
+              </a:ext>
+            </a:extLst>
+          </p:cNvPr>
+          <p:cNvCxnSpPr>
+            <a:cxnSpLocks/>
+          </p:cNvCxnSpPr>
+          <p:nvPr/>
+        </p:nvCxnSpPr>
+        <p:spPr>
+          <a:xfrm flipH="1">
+            <a:off x="2523173" y="1272759"/>
+            <a:ext cx="492760" cy="0"/>
+          </a:xfrm>
+          <a:prstGeom prst="straightConnector1">
+            <a:avLst/>
+          </a:prstGeom>
+          <a:ln w="12700">
             <a:solidFill>
-              <a:srgbClr val="FFC000"/>
+              <a:schemeClr val="tx1"/>
             </a:solidFill>
-            <a:ln>
+            <a:tailEnd type="triangle"/>
+          </a:ln>
+        </p:spPr>
+        <p:style>
+          <a:lnRef idx="2">
+            <a:schemeClr val="accent1"/>
+          </a:lnRef>
+          <a:fillRef idx="0">
+            <a:schemeClr val="accent1"/>
+          </a:fillRef>
+          <a:effectRef idx="1">
+            <a:schemeClr val="accent1"/>
+          </a:effectRef>
+          <a:fontRef idx="minor">
+            <a:schemeClr val="tx1"/>
+          </a:fontRef>
+        </p:style>
+      </p:cxnSp>
+      <p:cxnSp>
+        <p:nvCxnSpPr>
+          <p:cNvPr id="40" name="直接箭头连接符 73">
+            <a:extLst>
+              <a:ext uri="{FF2B5EF4-FFF2-40B4-BE49-F238E27FC236}">
+                <a16:creationId xmlns:a16="http://schemas.microsoft.com/office/drawing/2014/main" id="{11D78BCD-D451-10B4-4159-45779EAE517B}"/>
+              </a:ext>
+            </a:extLst>
+          </p:cNvPr>
+          <p:cNvCxnSpPr>
+            <a:cxnSpLocks/>
+          </p:cNvCxnSpPr>
+          <p:nvPr/>
+        </p:nvCxnSpPr>
+        <p:spPr>
+          <a:xfrm>
+            <a:off x="3783142" y="1272759"/>
+            <a:ext cx="492760" cy="0"/>
+          </a:xfrm>
+          <a:prstGeom prst="straightConnector1">
+            <a:avLst/>
+          </a:prstGeom>
+          <a:ln w="12700">
+            <a:solidFill>
+              <a:schemeClr val="tx1"/>
+            </a:solidFill>
+            <a:tailEnd type="triangle"/>
+          </a:ln>
+        </p:spPr>
+        <p:style>
+          <a:lnRef idx="2">
+            <a:schemeClr val="accent1"/>
+          </a:lnRef>
+          <a:fillRef idx="0">
+            <a:schemeClr val="accent1"/>
+          </a:fillRef>
+          <a:effectRef idx="1">
+            <a:schemeClr val="accent1"/>
+          </a:effectRef>
+          <a:fontRef idx="minor">
+            <a:schemeClr val="tx1"/>
+          </a:fontRef>
+        </p:style>
+      </p:cxnSp>
+      <p:cxnSp>
+        <p:nvCxnSpPr>
+          <p:cNvPr id="41" name="直接连接符 74">
+            <a:extLst>
+              <a:ext uri="{FF2B5EF4-FFF2-40B4-BE49-F238E27FC236}">
+                <a16:creationId xmlns:a16="http://schemas.microsoft.com/office/drawing/2014/main" id="{88EF6689-4377-2960-C7D9-C2A640BD7C68}"/>
+              </a:ext>
+            </a:extLst>
+          </p:cNvPr>
+          <p:cNvCxnSpPr>
+            <a:cxnSpLocks/>
+          </p:cNvCxnSpPr>
+          <p:nvPr/>
+        </p:nvCxnSpPr>
+        <p:spPr>
+          <a:xfrm flipV="1">
+            <a:off x="2715770" y="1632202"/>
+            <a:ext cx="0" cy="298491"/>
+          </a:xfrm>
+          <a:prstGeom prst="line">
+            <a:avLst/>
+          </a:prstGeom>
+          <a:ln w="12700">
+            <a:solidFill>
+              <a:schemeClr val="tx1"/>
+            </a:solidFill>
+            <a:prstDash val="sysDash"/>
+          </a:ln>
+          <a:effectLst/>
+        </p:spPr>
+        <p:style>
+          <a:lnRef idx="2">
+            <a:schemeClr val="accent1"/>
+          </a:lnRef>
+          <a:fillRef idx="0">
+            <a:schemeClr val="accent1"/>
+          </a:fillRef>
+          <a:effectRef idx="1">
+            <a:schemeClr val="accent1"/>
+          </a:effectRef>
+          <a:fontRef idx="minor">
+            <a:schemeClr val="tx1"/>
+          </a:fontRef>
+        </p:style>
+      </p:cxnSp>
+      <p:cxnSp>
+        <p:nvCxnSpPr>
+          <p:cNvPr id="42" name="直接连接符 78">
+            <a:extLst>
+              <a:ext uri="{FF2B5EF4-FFF2-40B4-BE49-F238E27FC236}">
+                <a16:creationId xmlns:a16="http://schemas.microsoft.com/office/drawing/2014/main" id="{0A6FBBB7-7357-A281-527C-7D4E41E285F1}"/>
+              </a:ext>
+            </a:extLst>
+          </p:cNvPr>
+          <p:cNvCxnSpPr>
+            <a:cxnSpLocks/>
+          </p:cNvCxnSpPr>
+          <p:nvPr/>
+        </p:nvCxnSpPr>
+        <p:spPr>
+          <a:xfrm flipV="1">
+            <a:off x="4085626" y="1630210"/>
+            <a:ext cx="0" cy="298491"/>
+          </a:xfrm>
+          <a:prstGeom prst="line">
+            <a:avLst/>
+          </a:prstGeom>
+          <a:ln w="12700">
+            <a:solidFill>
+              <a:schemeClr val="tx1"/>
+            </a:solidFill>
+            <a:prstDash val="sysDash"/>
+          </a:ln>
+          <a:effectLst/>
+        </p:spPr>
+        <p:style>
+          <a:lnRef idx="2">
+            <a:schemeClr val="accent1"/>
+          </a:lnRef>
+          <a:fillRef idx="0">
+            <a:schemeClr val="accent1"/>
+          </a:fillRef>
+          <a:effectRef idx="1">
+            <a:schemeClr val="accent1"/>
+          </a:effectRef>
+          <a:fontRef idx="minor">
+            <a:schemeClr val="tx1"/>
+          </a:fontRef>
+        </p:style>
+      </p:cxnSp>
+      <mc:AlternateContent xmlns:mc="http://schemas.openxmlformats.org/markup-compatibility/2006">
+        <mc:Choice xmlns:a14="http://schemas.microsoft.com/office/drawing/2010/main" Requires="a14">
+          <p:sp>
+            <p:nvSpPr>
+              <p:cNvPr id="43" name="文本框 79">
+                <a:extLst>
+                  <a:ext uri="{FF2B5EF4-FFF2-40B4-BE49-F238E27FC236}">
+                    <a16:creationId xmlns:a16="http://schemas.microsoft.com/office/drawing/2014/main" id="{81CC1F50-44EA-8119-C996-8916A8E1E77D}"/>
+                  </a:ext>
+                </a:extLst>
+              </p:cNvPr>
+              <p:cNvSpPr txBox="1"/>
+              <p:nvPr/>
+            </p:nvSpPr>
+            <p:spPr>
+              <a:xfrm>
+                <a:off x="3024102" y="1433542"/>
+                <a:ext cx="750462" cy="394019"/>
+              </a:xfrm>
+              <a:prstGeom prst="rect">
+                <a:avLst/>
+              </a:prstGeom>
               <a:noFill/>
-            </a:ln>
-            <a:effectLst/>
-          </p:spPr>
-          <p:style>
-            <a:lnRef idx="1">
-              <a:schemeClr val="accent1"/>
-            </a:lnRef>
-            <a:fillRef idx="3">
-              <a:schemeClr val="accent1"/>
-            </a:fillRef>
-            <a:effectRef idx="2">
-              <a:schemeClr val="accent1"/>
-            </a:effectRef>
-            <a:fontRef idx="minor">
-              <a:schemeClr val="lt1"/>
-            </a:fontRef>
-          </p:style>
-          <p:txBody>
-            <a:bodyPr rtlCol="0" anchor="ctr"/>
-            <a:lstStyle/>
-            <a:p>
-              <a:pPr algn="ctr"/>
-              <a:endParaRPr lang="zh-CN" altLang="en-US"/>
-            </a:p>
-          </p:txBody>
-        </p:sp>
-        <p:sp>
-          <p:nvSpPr>
-            <p:cNvPr id="12" name="平行四边形 18">
-              <a:extLst>
-                <a:ext uri="{FF2B5EF4-FFF2-40B4-BE49-F238E27FC236}">
-                  <a16:creationId xmlns:a16="http://schemas.microsoft.com/office/drawing/2014/main" id="{4AB697E1-103F-2F20-B2CA-5F043F251029}"/>
-                </a:ext>
-              </a:extLst>
-            </p:cNvPr>
-            <p:cNvSpPr/>
-            <p:nvPr/>
-          </p:nvSpPr>
-          <p:spPr>
-            <a:xfrm>
-              <a:off x="3138710" y="2216444"/>
-              <a:ext cx="151206" cy="189003"/>
-            </a:xfrm>
-            <a:prstGeom prst="parallelogram">
-              <a:avLst>
-                <a:gd name="adj" fmla="val 51629"/>
-              </a:avLst>
-            </a:prstGeom>
+            </p:spPr>
+            <p:txBody>
+              <a:bodyPr wrap="none" rtlCol="0">
+                <a:spAutoFit/>
+              </a:bodyPr>
+              <a:lstStyle/>
+              <a:p>
+                <a:pPr/>
+                <a14:m>
+                  <m:oMathPara xmlns:m="http://schemas.openxmlformats.org/officeDocument/2006/math">
+                    <m:oMathParaPr>
+                      <m:jc m:val="centerGroup"/>
+                    </m:oMathParaPr>
+                    <m:oMath xmlns:m="http://schemas.openxmlformats.org/officeDocument/2006/math">
+                      <m:sSub>
+                        <m:sSubPr>
+                          <m:ctrlPr>
+                            <a:rPr lang="en-GB" altLang="zh-CN" b="0" i="1" smtClean="0">
+                              <a:latin typeface="Cambria Math" panose="02040503050406030204" pitchFamily="18" charset="0"/>
+                            </a:rPr>
+                          </m:ctrlPr>
+                        </m:sSubPr>
+                        <m:e>
+                          <m:r>
+                            <a:rPr lang="en-GB" altLang="zh-CN" b="0" i="1" smtClean="0">
+                              <a:latin typeface="Cambria Math" panose="02040503050406030204" pitchFamily="18" charset="0"/>
+                            </a:rPr>
+                            <m:t>𝑑</m:t>
+                          </m:r>
+                        </m:e>
+                        <m:sub>
+                          <m:r>
+                            <m:rPr>
+                              <m:sty m:val="p"/>
+                            </m:rPr>
+                            <a:rPr lang="en-GB" altLang="zh-CN" b="0" i="0" smtClean="0">
+                              <a:latin typeface="Cambria Math" panose="02040503050406030204" pitchFamily="18" charset="0"/>
+                            </a:rPr>
+                            <m:t>rep</m:t>
+                          </m:r>
+                          <m:r>
+                            <a:rPr lang="en-GB" altLang="zh-CN" b="0" i="0" smtClean="0">
+                              <a:latin typeface="Cambria Math" panose="02040503050406030204" pitchFamily="18" charset="0"/>
+                            </a:rPr>
+                            <m:t>1</m:t>
+                          </m:r>
+                        </m:sub>
+                      </m:sSub>
+                    </m:oMath>
+                  </m:oMathPara>
+                </a14:m>
+                <a:endParaRPr lang="zh-CN" altLang="en-US" dirty="0"/>
+              </a:p>
+            </p:txBody>
+          </p:sp>
+        </mc:Choice>
+        <mc:Fallback>
+          <p:sp>
+            <p:nvSpPr>
+              <p:cNvPr id="43" name="文本框 79">
+                <a:extLst>
+                  <a:ext uri="{FF2B5EF4-FFF2-40B4-BE49-F238E27FC236}">
+                    <a16:creationId xmlns:a16="http://schemas.microsoft.com/office/drawing/2014/main" id="{81CC1F50-44EA-8119-C996-8916A8E1E77D}"/>
+                  </a:ext>
+                </a:extLst>
+              </p:cNvPr>
+              <p:cNvSpPr txBox="1">
+                <a:spLocks noRot="1" noChangeAspect="1" noMove="1" noResize="1" noEditPoints="1" noAdjustHandles="1" noChangeArrowheads="1" noChangeShapeType="1" noTextEdit="1"/>
+              </p:cNvSpPr>
+              <p:nvPr/>
+            </p:nvSpPr>
+            <p:spPr>
+              <a:xfrm>
+                <a:off x="3024102" y="1433542"/>
+                <a:ext cx="750462" cy="394019"/>
+              </a:xfrm>
+              <a:prstGeom prst="rect">
+                <a:avLst/>
+              </a:prstGeom>
+              <a:blipFill>
+                <a:blip r:embed="rId8"/>
+                <a:stretch>
+                  <a:fillRect b="-7692"/>
+                </a:stretch>
+              </a:blipFill>
+            </p:spPr>
+            <p:txBody>
+              <a:bodyPr/>
+              <a:lstStyle/>
+              <a:p>
+                <a:r>
+                  <a:rPr lang="nl-NL">
+                    <a:noFill/>
+                  </a:rPr>
+                  <a:t> </a:t>
+                </a:r>
+              </a:p>
+            </p:txBody>
+          </p:sp>
+        </mc:Fallback>
+      </mc:AlternateContent>
+      <p:cxnSp>
+        <p:nvCxnSpPr>
+          <p:cNvPr id="44" name="直接箭头连接符 80">
+            <a:extLst>
+              <a:ext uri="{FF2B5EF4-FFF2-40B4-BE49-F238E27FC236}">
+                <a16:creationId xmlns:a16="http://schemas.microsoft.com/office/drawing/2014/main" id="{86CCBB68-1842-0B78-C2AE-A7092EAB83A5}"/>
+              </a:ext>
+            </a:extLst>
+          </p:cNvPr>
+          <p:cNvCxnSpPr>
+            <a:cxnSpLocks/>
+          </p:cNvCxnSpPr>
+          <p:nvPr/>
+        </p:nvCxnSpPr>
+        <p:spPr>
+          <a:xfrm flipV="1">
+            <a:off x="3766393" y="1636527"/>
+            <a:ext cx="328767" cy="0"/>
+          </a:xfrm>
+          <a:prstGeom prst="straightConnector1">
+            <a:avLst/>
+          </a:prstGeom>
+          <a:ln w="12700">
             <a:solidFill>
-              <a:srgbClr val="FFC000"/>
+              <a:schemeClr val="tx1"/>
             </a:solidFill>
-            <a:ln>
-              <a:noFill/>
-            </a:ln>
-            <a:effectLst/>
-          </p:spPr>
-          <p:style>
-            <a:lnRef idx="1">
-              <a:schemeClr val="accent1"/>
-            </a:lnRef>
-            <a:fillRef idx="3">
-              <a:schemeClr val="accent1"/>
-            </a:fillRef>
-            <a:effectRef idx="2">
-              <a:schemeClr val="accent1"/>
-            </a:effectRef>
-            <a:fontRef idx="minor">
-              <a:schemeClr val="lt1"/>
-            </a:fontRef>
-          </p:style>
-          <p:txBody>
-            <a:bodyPr rtlCol="0" anchor="ctr"/>
-            <a:lstStyle/>
-            <a:p>
-              <a:pPr algn="ctr"/>
-              <a:endParaRPr lang="zh-CN" altLang="en-US" dirty="0"/>
-            </a:p>
-          </p:txBody>
-        </p:sp>
-        <p:sp>
-          <p:nvSpPr>
-            <p:cNvPr id="13" name="矩形 20">
-              <a:extLst>
-                <a:ext uri="{FF2B5EF4-FFF2-40B4-BE49-F238E27FC236}">
-                  <a16:creationId xmlns:a16="http://schemas.microsoft.com/office/drawing/2014/main" id="{943B0D7C-2846-2BD5-56A4-43596B3C9C7F}"/>
-                </a:ext>
-              </a:extLst>
-            </p:cNvPr>
-            <p:cNvSpPr/>
-            <p:nvPr/>
-          </p:nvSpPr>
-          <p:spPr>
-            <a:xfrm>
-              <a:off x="2964089" y="2154762"/>
-              <a:ext cx="1876425" cy="61681"/>
-            </a:xfrm>
-            <a:prstGeom prst="rect">
-              <a:avLst/>
-            </a:prstGeom>
+            <a:tailEnd type="triangle"/>
+          </a:ln>
+        </p:spPr>
+        <p:style>
+          <a:lnRef idx="2">
+            <a:schemeClr val="accent1"/>
+          </a:lnRef>
+          <a:fillRef idx="0">
+            <a:schemeClr val="accent1"/>
+          </a:fillRef>
+          <a:effectRef idx="1">
+            <a:schemeClr val="accent1"/>
+          </a:effectRef>
+          <a:fontRef idx="minor">
+            <a:schemeClr val="tx1"/>
+          </a:fontRef>
+        </p:style>
+      </p:cxnSp>
+      <p:cxnSp>
+        <p:nvCxnSpPr>
+          <p:cNvPr id="45" name="直接箭头连接符 82">
+            <a:extLst>
+              <a:ext uri="{FF2B5EF4-FFF2-40B4-BE49-F238E27FC236}">
+                <a16:creationId xmlns:a16="http://schemas.microsoft.com/office/drawing/2014/main" id="{965FFF52-AE36-2131-2903-C46D161DAF19}"/>
+              </a:ext>
+            </a:extLst>
+          </p:cNvPr>
+          <p:cNvCxnSpPr>
+            <a:cxnSpLocks/>
+          </p:cNvCxnSpPr>
+          <p:nvPr/>
+        </p:nvCxnSpPr>
+        <p:spPr>
+          <a:xfrm flipH="1" flipV="1">
+            <a:off x="2715770" y="1641616"/>
+            <a:ext cx="328767" cy="0"/>
+          </a:xfrm>
+          <a:prstGeom prst="straightConnector1">
+            <a:avLst/>
+          </a:prstGeom>
+          <a:ln w="12700">
             <a:solidFill>
-              <a:schemeClr val="bg2">
-                <a:lumMod val="50000"/>
-              </a:schemeClr>
+              <a:schemeClr val="tx1"/>
             </a:solidFill>
-            <a:ln>
-              <a:noFill/>
-            </a:ln>
-            <a:effectLst/>
-          </p:spPr>
-          <p:style>
-            <a:lnRef idx="1">
-              <a:schemeClr val="accent1"/>
-            </a:lnRef>
-            <a:fillRef idx="3">
-              <a:schemeClr val="accent1"/>
-            </a:fillRef>
-            <a:effectRef idx="2">
-              <a:schemeClr val="accent1"/>
-            </a:effectRef>
-            <a:fontRef idx="minor">
-              <a:schemeClr val="lt1"/>
-            </a:fontRef>
-          </p:style>
-          <p:txBody>
-            <a:bodyPr rtlCol="0" anchor="ctr"/>
-            <a:lstStyle/>
-            <a:p>
-              <a:pPr algn="ctr"/>
-              <a:endParaRPr lang="zh-CN" altLang="en-US"/>
-            </a:p>
-          </p:txBody>
-        </p:sp>
-        <p:sp>
-          <p:nvSpPr>
-            <p:cNvPr id="14" name="矩形 21">
-              <a:extLst>
-                <a:ext uri="{FF2B5EF4-FFF2-40B4-BE49-F238E27FC236}">
-                  <a16:creationId xmlns:a16="http://schemas.microsoft.com/office/drawing/2014/main" id="{17ADA884-37C2-2E40-2192-8FBA62B3A016}"/>
-                </a:ext>
-              </a:extLst>
-            </p:cNvPr>
-            <p:cNvSpPr/>
-            <p:nvPr/>
-          </p:nvSpPr>
-          <p:spPr>
-            <a:xfrm>
-              <a:off x="2869633" y="2049966"/>
-              <a:ext cx="2164080" cy="107970"/>
-            </a:xfrm>
-            <a:prstGeom prst="rect">
-              <a:avLst/>
-            </a:prstGeom>
-            <a:solidFill>
-              <a:schemeClr val="bg1"/>
-            </a:solidFill>
-            <a:ln>
-              <a:solidFill>
-                <a:schemeClr val="bg1"/>
-              </a:solidFill>
-            </a:ln>
-            <a:effectLst/>
-          </p:spPr>
-          <p:style>
-            <a:lnRef idx="1">
-              <a:schemeClr val="accent1"/>
-            </a:lnRef>
-            <a:fillRef idx="3">
-              <a:schemeClr val="accent1"/>
-            </a:fillRef>
-            <a:effectRef idx="2">
-              <a:schemeClr val="accent1"/>
-            </a:effectRef>
-            <a:fontRef idx="minor">
-              <a:schemeClr val="lt1"/>
-            </a:fontRef>
-          </p:style>
-          <p:txBody>
-            <a:bodyPr rtlCol="0" anchor="ctr"/>
-            <a:lstStyle/>
-            <a:p>
-              <a:pPr algn="ctr"/>
-              <a:endParaRPr lang="zh-CN" altLang="en-US"/>
-            </a:p>
-          </p:txBody>
-        </p:sp>
-        <p:sp>
-          <p:nvSpPr>
-            <p:cNvPr id="15" name="平行四边形 22">
-              <a:extLst>
-                <a:ext uri="{FF2B5EF4-FFF2-40B4-BE49-F238E27FC236}">
-                  <a16:creationId xmlns:a16="http://schemas.microsoft.com/office/drawing/2014/main" id="{B8E6F9B3-ADE5-75F6-76F0-FE263EED224A}"/>
-                </a:ext>
-              </a:extLst>
-            </p:cNvPr>
-            <p:cNvSpPr/>
-            <p:nvPr/>
-          </p:nvSpPr>
-          <p:spPr>
-            <a:xfrm flipH="1">
-              <a:off x="4514848" y="2216444"/>
-              <a:ext cx="151206" cy="189003"/>
-            </a:xfrm>
-            <a:prstGeom prst="parallelogram">
-              <a:avLst>
-                <a:gd name="adj" fmla="val 51629"/>
-              </a:avLst>
-            </a:prstGeom>
-            <a:solidFill>
-              <a:srgbClr val="FFC000"/>
-            </a:solidFill>
-            <a:ln>
-              <a:noFill/>
-            </a:ln>
-            <a:effectLst/>
-          </p:spPr>
-          <p:style>
-            <a:lnRef idx="1">
-              <a:schemeClr val="accent1"/>
-            </a:lnRef>
-            <a:fillRef idx="3">
-              <a:schemeClr val="accent1"/>
-            </a:fillRef>
-            <a:effectRef idx="2">
-              <a:schemeClr val="accent1"/>
-            </a:effectRef>
-            <a:fontRef idx="minor">
-              <a:schemeClr val="lt1"/>
-            </a:fontRef>
-          </p:style>
-          <p:txBody>
-            <a:bodyPr rtlCol="0" anchor="ctr"/>
-            <a:lstStyle/>
-            <a:p>
-              <a:pPr algn="ctr"/>
-              <a:endParaRPr lang="zh-CN" altLang="en-US" dirty="0"/>
-            </a:p>
-          </p:txBody>
-        </p:sp>
-        <p:sp>
-          <p:nvSpPr>
-            <p:cNvPr id="16" name="矩形 23">
-              <a:extLst>
-                <a:ext uri="{FF2B5EF4-FFF2-40B4-BE49-F238E27FC236}">
-                  <a16:creationId xmlns:a16="http://schemas.microsoft.com/office/drawing/2014/main" id="{079E2F54-12EF-6182-A8BC-25CF7147D136}"/>
-                </a:ext>
-              </a:extLst>
-            </p:cNvPr>
-            <p:cNvSpPr/>
-            <p:nvPr/>
-          </p:nvSpPr>
-          <p:spPr>
-            <a:xfrm>
-              <a:off x="4591979" y="2343522"/>
-              <a:ext cx="180755" cy="61358"/>
-            </a:xfrm>
-            <a:prstGeom prst="rect">
-              <a:avLst/>
-            </a:prstGeom>
-            <a:solidFill>
-              <a:srgbClr val="FFC000"/>
-            </a:solidFill>
-            <a:ln>
-              <a:noFill/>
-            </a:ln>
-            <a:effectLst/>
-          </p:spPr>
-          <p:style>
-            <a:lnRef idx="1">
-              <a:schemeClr val="accent1"/>
-            </a:lnRef>
-            <a:fillRef idx="3">
-              <a:schemeClr val="accent1"/>
-            </a:fillRef>
-            <a:effectRef idx="2">
-              <a:schemeClr val="accent1"/>
-            </a:effectRef>
-            <a:fontRef idx="minor">
-              <a:schemeClr val="lt1"/>
-            </a:fontRef>
-          </p:style>
-          <p:txBody>
-            <a:bodyPr rtlCol="0" anchor="ctr"/>
-            <a:lstStyle/>
-            <a:p>
-              <a:pPr algn="ctr"/>
-              <a:endParaRPr lang="zh-CN" altLang="en-US"/>
-            </a:p>
-          </p:txBody>
-        </p:sp>
-        <p:cxnSp>
-          <p:nvCxnSpPr>
-            <p:cNvPr id="17" name="直接连接符 32">
-              <a:extLst>
-                <a:ext uri="{FF2B5EF4-FFF2-40B4-BE49-F238E27FC236}">
-                  <a16:creationId xmlns:a16="http://schemas.microsoft.com/office/drawing/2014/main" id="{2AAED2FA-0DB5-E839-443A-D3777EDA6941}"/>
-                </a:ext>
-              </a:extLst>
-            </p:cNvPr>
-            <p:cNvCxnSpPr>
-              <a:cxnSpLocks/>
-            </p:cNvCxnSpPr>
-            <p:nvPr/>
-          </p:nvCxnSpPr>
-          <p:spPr>
-            <a:xfrm flipV="1">
-              <a:off x="2984567" y="4150510"/>
-              <a:ext cx="0" cy="391589"/>
-            </a:xfrm>
-            <a:prstGeom prst="line">
-              <a:avLst/>
-            </a:prstGeom>
-            <a:ln w="12700">
-              <a:solidFill>
-                <a:schemeClr val="tx1"/>
-              </a:solidFill>
-              <a:prstDash val="sysDash"/>
-            </a:ln>
-            <a:effectLst/>
-          </p:spPr>
-          <p:style>
-            <a:lnRef idx="2">
-              <a:schemeClr val="accent1"/>
-            </a:lnRef>
-            <a:fillRef idx="0">
-              <a:schemeClr val="accent1"/>
-            </a:fillRef>
-            <a:effectRef idx="1">
-              <a:schemeClr val="accent1"/>
-            </a:effectRef>
-            <a:fontRef idx="minor">
-              <a:schemeClr val="tx1"/>
-            </a:fontRef>
-          </p:style>
-        </p:cxnSp>
-        <p:cxnSp>
-          <p:nvCxnSpPr>
-            <p:cNvPr id="18" name="直接连接符 33">
-              <a:extLst>
-                <a:ext uri="{FF2B5EF4-FFF2-40B4-BE49-F238E27FC236}">
-                  <a16:creationId xmlns:a16="http://schemas.microsoft.com/office/drawing/2014/main" id="{EC7E9C66-DA0C-AF41-B3B8-D9A450E0C371}"/>
-                </a:ext>
-              </a:extLst>
-            </p:cNvPr>
-            <p:cNvCxnSpPr>
-              <a:cxnSpLocks/>
-            </p:cNvCxnSpPr>
-            <p:nvPr/>
-          </p:nvCxnSpPr>
-          <p:spPr>
-            <a:xfrm flipV="1">
-              <a:off x="4814865" y="4153289"/>
-              <a:ext cx="0" cy="388810"/>
-            </a:xfrm>
-            <a:prstGeom prst="line">
-              <a:avLst/>
-            </a:prstGeom>
-            <a:ln w="12700">
-              <a:solidFill>
-                <a:schemeClr val="tx1"/>
-              </a:solidFill>
-              <a:prstDash val="sysDash"/>
-            </a:ln>
-            <a:effectLst/>
-          </p:spPr>
-          <p:style>
-            <a:lnRef idx="2">
-              <a:schemeClr val="accent1"/>
-            </a:lnRef>
-            <a:fillRef idx="0">
-              <a:schemeClr val="accent1"/>
-            </a:fillRef>
-            <a:effectRef idx="1">
-              <a:schemeClr val="accent1"/>
-            </a:effectRef>
-            <a:fontRef idx="minor">
-              <a:schemeClr val="tx1"/>
-            </a:fontRef>
-          </p:style>
-        </p:cxnSp>
-        <mc:AlternateContent xmlns:mc="http://schemas.openxmlformats.org/markup-compatibility/2006">
-          <mc:Choice xmlns:a14="http://schemas.microsoft.com/office/drawing/2010/main" Requires="a14">
-            <p:sp>
-              <p:nvSpPr>
-                <p:cNvPr id="19" name="文本框 34">
-                  <a:extLst>
-                    <a:ext uri="{FF2B5EF4-FFF2-40B4-BE49-F238E27FC236}">
-                      <a16:creationId xmlns:a16="http://schemas.microsoft.com/office/drawing/2014/main" id="{9BFF6D14-AAFB-1623-268A-38D518B54B1E}"/>
-                    </a:ext>
-                  </a:extLst>
-                </p:cNvPr>
-                <p:cNvSpPr txBox="1"/>
-                <p:nvPr/>
-              </p:nvSpPr>
-              <p:spPr>
-                <a:xfrm>
-                  <a:off x="3511629" y="4355385"/>
-                  <a:ext cx="678326" cy="394019"/>
-                </a:xfrm>
-                <a:prstGeom prst="rect">
-                  <a:avLst/>
-                </a:prstGeom>
-                <a:noFill/>
-              </p:spPr>
-              <p:txBody>
-                <a:bodyPr wrap="none" rtlCol="0">
-                  <a:spAutoFit/>
-                </a:bodyPr>
-                <a:lstStyle/>
-                <a:p>
-                  <a14:m>
-                    <m:oMathPara xmlns:m="http://schemas.openxmlformats.org/officeDocument/2006/math">
-                      <m:oMathParaPr>
-                        <m:jc m:val="centerGroup"/>
-                      </m:oMathParaPr>
-                      <m:oMath xmlns:m="http://schemas.openxmlformats.org/officeDocument/2006/math">
-                        <m:sSub>
-                          <m:sSubPr>
-                            <m:ctrlPr>
-                              <a:rPr lang="en-GB" altLang="zh-CN" b="0" i="1" smtClean="0">
-                                <a:latin typeface="Cambria Math" panose="02040503050406030204" pitchFamily="18" charset="0"/>
-                              </a:rPr>
-                            </m:ctrlPr>
-                          </m:sSubPr>
-                          <m:e>
-                            <m:r>
-                              <a:rPr lang="en-GB" altLang="zh-CN" b="0" i="1" smtClean="0">
-                                <a:latin typeface="Cambria Math" panose="02040503050406030204" pitchFamily="18" charset="0"/>
-                              </a:rPr>
-                              <m:t>𝑑</m:t>
-                            </m:r>
-                          </m:e>
-                          <m:sub>
-                            <m:r>
-                              <m:rPr>
-                                <m:sty m:val="p"/>
-                              </m:rPr>
-                              <a:rPr lang="en-GB" altLang="zh-CN" b="0" i="0" smtClean="0">
-                                <a:latin typeface="Cambria Math" panose="02040503050406030204" pitchFamily="18" charset="0"/>
-                              </a:rPr>
-                              <m:t>pad</m:t>
-                            </m:r>
-                          </m:sub>
-                        </m:sSub>
-                      </m:oMath>
-                    </m:oMathPara>
-                  </a14:m>
-                  <a:endParaRPr lang="zh-CN" altLang="en-US" dirty="0"/>
-                </a:p>
-              </p:txBody>
-            </p:sp>
-          </mc:Choice>
-          <mc:Fallback>
-            <p:sp>
-              <p:nvSpPr>
-                <p:cNvPr id="19" name="文本框 34">
-                  <a:extLst>
-                    <a:ext uri="{FF2B5EF4-FFF2-40B4-BE49-F238E27FC236}">
-                      <a16:creationId xmlns:a16="http://schemas.microsoft.com/office/drawing/2014/main" id="{9BFF6D14-AAFB-1623-268A-38D518B54B1E}"/>
-                    </a:ext>
-                  </a:extLst>
-                </p:cNvPr>
-                <p:cNvSpPr txBox="1">
-                  <a:spLocks noRot="1" noChangeAspect="1" noMove="1" noResize="1" noEditPoints="1" noAdjustHandles="1" noChangeArrowheads="1" noChangeShapeType="1" noTextEdit="1"/>
-                </p:cNvSpPr>
-                <p:nvPr/>
-              </p:nvSpPr>
-              <p:spPr>
-                <a:xfrm>
-                  <a:off x="3511629" y="4355385"/>
-                  <a:ext cx="678326" cy="394019"/>
-                </a:xfrm>
-                <a:prstGeom prst="rect">
-                  <a:avLst/>
-                </a:prstGeom>
-                <a:blipFill>
-                  <a:blip r:embed="rId2"/>
-                  <a:stretch>
-                    <a:fillRect b="-10938"/>
-                  </a:stretch>
-                </a:blipFill>
-              </p:spPr>
-              <p:txBody>
-                <a:bodyPr/>
-                <a:lstStyle/>
-                <a:p>
-                  <a:r>
-                    <a:rPr lang="nl-NL">
-                      <a:noFill/>
-                    </a:rPr>
-                    <a:t> </a:t>
-                  </a:r>
-                </a:p>
-              </p:txBody>
-            </p:sp>
-          </mc:Fallback>
-        </mc:AlternateContent>
-        <p:cxnSp>
-          <p:nvCxnSpPr>
-            <p:cNvPr id="20" name="直接箭头连接符 36">
-              <a:extLst>
-                <a:ext uri="{FF2B5EF4-FFF2-40B4-BE49-F238E27FC236}">
-                  <a16:creationId xmlns:a16="http://schemas.microsoft.com/office/drawing/2014/main" id="{074EC014-F403-2BFF-3F93-B22432857656}"/>
-                </a:ext>
-              </a:extLst>
-            </p:cNvPr>
-            <p:cNvCxnSpPr>
-              <a:cxnSpLocks/>
-            </p:cNvCxnSpPr>
-            <p:nvPr/>
-          </p:nvCxnSpPr>
-          <p:spPr>
-            <a:xfrm flipH="1">
-              <a:off x="3018869" y="4553315"/>
-              <a:ext cx="492760" cy="0"/>
-            </a:xfrm>
-            <a:prstGeom prst="straightConnector1">
-              <a:avLst/>
-            </a:prstGeom>
-            <a:ln w="12700">
-              <a:solidFill>
-                <a:schemeClr val="tx1"/>
-              </a:solidFill>
-              <a:tailEnd type="triangle"/>
-            </a:ln>
-          </p:spPr>
-          <p:style>
-            <a:lnRef idx="2">
-              <a:schemeClr val="accent1"/>
-            </a:lnRef>
-            <a:fillRef idx="0">
-              <a:schemeClr val="accent1"/>
-            </a:fillRef>
-            <a:effectRef idx="1">
-              <a:schemeClr val="accent1"/>
-            </a:effectRef>
-            <a:fontRef idx="minor">
-              <a:schemeClr val="tx1"/>
-            </a:fontRef>
-          </p:style>
-        </p:cxnSp>
-        <p:cxnSp>
-          <p:nvCxnSpPr>
-            <p:cNvPr id="21" name="直接箭头连接符 37">
-              <a:extLst>
-                <a:ext uri="{FF2B5EF4-FFF2-40B4-BE49-F238E27FC236}">
-                  <a16:creationId xmlns:a16="http://schemas.microsoft.com/office/drawing/2014/main" id="{6A3A3ED7-3F99-E95A-8949-4FC76F790AB5}"/>
-                </a:ext>
-              </a:extLst>
-            </p:cNvPr>
-            <p:cNvCxnSpPr>
-              <a:cxnSpLocks/>
-            </p:cNvCxnSpPr>
-            <p:nvPr/>
-          </p:nvCxnSpPr>
-          <p:spPr>
-            <a:xfrm>
-              <a:off x="4278838" y="4553315"/>
-              <a:ext cx="492760" cy="0"/>
-            </a:xfrm>
-            <a:prstGeom prst="straightConnector1">
-              <a:avLst/>
-            </a:prstGeom>
-            <a:ln w="12700">
-              <a:solidFill>
-                <a:schemeClr val="tx1"/>
-              </a:solidFill>
-              <a:tailEnd type="triangle"/>
-            </a:ln>
-          </p:spPr>
-          <p:style>
-            <a:lnRef idx="2">
-              <a:schemeClr val="accent1"/>
-            </a:lnRef>
-            <a:fillRef idx="0">
-              <a:schemeClr val="accent1"/>
-            </a:fillRef>
-            <a:effectRef idx="1">
-              <a:schemeClr val="accent1"/>
-            </a:effectRef>
-            <a:fontRef idx="minor">
-              <a:schemeClr val="tx1"/>
-            </a:fontRef>
-          </p:style>
-        </p:cxnSp>
-        <p:cxnSp>
-          <p:nvCxnSpPr>
-            <p:cNvPr id="22" name="直接连接符 38">
-              <a:extLst>
-                <a:ext uri="{FF2B5EF4-FFF2-40B4-BE49-F238E27FC236}">
-                  <a16:creationId xmlns:a16="http://schemas.microsoft.com/office/drawing/2014/main" id="{DB77A8F7-F180-CFF7-24BD-13186EF79739}"/>
-                </a:ext>
-              </a:extLst>
-            </p:cNvPr>
-            <p:cNvCxnSpPr>
-              <a:cxnSpLocks/>
-            </p:cNvCxnSpPr>
-            <p:nvPr/>
-          </p:nvCxnSpPr>
-          <p:spPr>
-            <a:xfrm rot="16200000" flipH="1" flipV="1">
-              <a:off x="5062891" y="3895430"/>
-              <a:ext cx="0" cy="487680"/>
-            </a:xfrm>
-            <a:prstGeom prst="line">
-              <a:avLst/>
-            </a:prstGeom>
-            <a:ln w="12700">
-              <a:solidFill>
-                <a:schemeClr val="tx1"/>
-              </a:solidFill>
-              <a:prstDash val="sysDash"/>
-            </a:ln>
-            <a:effectLst/>
-          </p:spPr>
-          <p:style>
-            <a:lnRef idx="2">
-              <a:schemeClr val="accent1"/>
-            </a:lnRef>
-            <a:fillRef idx="0">
-              <a:schemeClr val="accent1"/>
-            </a:fillRef>
-            <a:effectRef idx="1">
-              <a:schemeClr val="accent1"/>
-            </a:effectRef>
-            <a:fontRef idx="minor">
-              <a:schemeClr val="tx1"/>
-            </a:fontRef>
-          </p:style>
-        </p:cxnSp>
-        <p:cxnSp>
-          <p:nvCxnSpPr>
-            <p:cNvPr id="23" name="直接连接符 40">
-              <a:extLst>
-                <a:ext uri="{FF2B5EF4-FFF2-40B4-BE49-F238E27FC236}">
-                  <a16:creationId xmlns:a16="http://schemas.microsoft.com/office/drawing/2014/main" id="{2BA61931-7759-B1F8-A5FD-91787F9D8380}"/>
-                </a:ext>
-              </a:extLst>
-            </p:cNvPr>
-            <p:cNvCxnSpPr>
-              <a:cxnSpLocks/>
-            </p:cNvCxnSpPr>
-            <p:nvPr/>
-          </p:nvCxnSpPr>
-          <p:spPr>
-            <a:xfrm>
-              <a:off x="4622867" y="3967630"/>
-              <a:ext cx="683864" cy="0"/>
-            </a:xfrm>
-            <a:prstGeom prst="line">
-              <a:avLst/>
-            </a:prstGeom>
-            <a:ln w="12700">
-              <a:solidFill>
-                <a:schemeClr val="tx1"/>
-              </a:solidFill>
-              <a:prstDash val="sysDash"/>
-            </a:ln>
-            <a:effectLst/>
-          </p:spPr>
-          <p:style>
-            <a:lnRef idx="2">
-              <a:schemeClr val="accent1"/>
-            </a:lnRef>
-            <a:fillRef idx="0">
-              <a:schemeClr val="accent1"/>
-            </a:fillRef>
-            <a:effectRef idx="1">
-              <a:schemeClr val="accent1"/>
-            </a:effectRef>
-            <a:fontRef idx="minor">
-              <a:schemeClr val="tx1"/>
-            </a:fontRef>
-          </p:style>
-        </p:cxnSp>
-        <mc:AlternateContent xmlns:mc="http://schemas.openxmlformats.org/markup-compatibility/2006">
-          <mc:Choice xmlns:a14="http://schemas.microsoft.com/office/drawing/2010/main" Requires="a14">
-            <p:sp>
-              <p:nvSpPr>
-                <p:cNvPr id="24" name="文本框 41">
-                  <a:extLst>
-                    <a:ext uri="{FF2B5EF4-FFF2-40B4-BE49-F238E27FC236}">
-                      <a16:creationId xmlns:a16="http://schemas.microsoft.com/office/drawing/2014/main" id="{6BBFA5D5-5554-D3FE-1E80-8BCB11E0A820}"/>
-                    </a:ext>
-                  </a:extLst>
-                </p:cNvPr>
-                <p:cNvSpPr txBox="1"/>
-                <p:nvPr/>
-              </p:nvSpPr>
-              <p:spPr>
-                <a:xfrm>
-                  <a:off x="5299111" y="3849886"/>
-                  <a:ext cx="633250" cy="394019"/>
-                </a:xfrm>
-                <a:prstGeom prst="rect">
-                  <a:avLst/>
-                </a:prstGeom>
-                <a:noFill/>
-              </p:spPr>
-              <p:txBody>
-                <a:bodyPr wrap="none" rtlCol="0">
-                  <a:spAutoFit/>
-                </a:bodyPr>
-                <a:lstStyle/>
-                <a:p>
-                  <a14:m>
-                    <m:oMathPara xmlns:m="http://schemas.openxmlformats.org/officeDocument/2006/math">
-                      <m:oMathParaPr>
-                        <m:jc m:val="centerGroup"/>
-                      </m:oMathParaPr>
-                      <m:oMath xmlns:m="http://schemas.openxmlformats.org/officeDocument/2006/math">
-                        <m:sSub>
-                          <m:sSubPr>
-                            <m:ctrlPr>
-                              <a:rPr lang="en-GB" altLang="zh-CN" b="0" i="1" smtClean="0">
-                                <a:latin typeface="Cambria Math" panose="02040503050406030204" pitchFamily="18" charset="0"/>
-                              </a:rPr>
-                            </m:ctrlPr>
-                          </m:sSubPr>
-                          <m:e>
-                            <m:r>
-                              <a:rPr lang="en-GB" altLang="zh-CN" b="0" i="1" smtClean="0">
-                                <a:latin typeface="Cambria Math" panose="02040503050406030204" pitchFamily="18" charset="0"/>
-                              </a:rPr>
-                              <m:t>𝑡</m:t>
-                            </m:r>
-                          </m:e>
-                          <m:sub>
-                            <m:r>
-                              <m:rPr>
-                                <m:sty m:val="p"/>
-                              </m:rPr>
-                              <a:rPr lang="en-GB" altLang="zh-CN" b="0" i="0" smtClean="0">
-                                <a:latin typeface="Cambria Math" panose="02040503050406030204" pitchFamily="18" charset="0"/>
-                              </a:rPr>
-                              <m:t>pad</m:t>
-                            </m:r>
-                          </m:sub>
-                        </m:sSub>
-                      </m:oMath>
-                    </m:oMathPara>
-                  </a14:m>
-                  <a:endParaRPr lang="zh-CN" altLang="en-US" dirty="0"/>
-                </a:p>
-              </p:txBody>
-            </p:sp>
-          </mc:Choice>
-          <mc:Fallback>
-            <p:sp>
-              <p:nvSpPr>
-                <p:cNvPr id="24" name="文本框 41">
-                  <a:extLst>
-                    <a:ext uri="{FF2B5EF4-FFF2-40B4-BE49-F238E27FC236}">
-                      <a16:creationId xmlns:a16="http://schemas.microsoft.com/office/drawing/2014/main" id="{6BBFA5D5-5554-D3FE-1E80-8BCB11E0A820}"/>
-                    </a:ext>
-                  </a:extLst>
-                </p:cNvPr>
-                <p:cNvSpPr txBox="1">
-                  <a:spLocks noRot="1" noChangeAspect="1" noMove="1" noResize="1" noEditPoints="1" noAdjustHandles="1" noChangeArrowheads="1" noChangeShapeType="1" noTextEdit="1"/>
-                </p:cNvSpPr>
-                <p:nvPr/>
-              </p:nvSpPr>
-              <p:spPr>
-                <a:xfrm>
-                  <a:off x="5299111" y="3849886"/>
-                  <a:ext cx="633250" cy="394019"/>
-                </a:xfrm>
-                <a:prstGeom prst="rect">
-                  <a:avLst/>
-                </a:prstGeom>
-                <a:blipFill>
-                  <a:blip r:embed="rId3"/>
-                  <a:stretch>
-                    <a:fillRect b="-10938"/>
-                  </a:stretch>
-                </a:blipFill>
-              </p:spPr>
-              <p:txBody>
-                <a:bodyPr/>
-                <a:lstStyle/>
-                <a:p>
-                  <a:r>
-                    <a:rPr lang="nl-NL">
-                      <a:noFill/>
-                    </a:rPr>
-                    <a:t> </a:t>
-                  </a:r>
-                </a:p>
-              </p:txBody>
-            </p:sp>
-          </mc:Fallback>
-        </mc:AlternateContent>
-        <p:cxnSp>
-          <p:nvCxnSpPr>
-            <p:cNvPr id="25" name="直接箭头连接符 44">
-              <a:extLst>
-                <a:ext uri="{FF2B5EF4-FFF2-40B4-BE49-F238E27FC236}">
-                  <a16:creationId xmlns:a16="http://schemas.microsoft.com/office/drawing/2014/main" id="{19D68F92-9C17-4799-F871-079E3D255337}"/>
-                </a:ext>
-              </a:extLst>
-            </p:cNvPr>
-            <p:cNvCxnSpPr>
-              <a:cxnSpLocks/>
-            </p:cNvCxnSpPr>
-            <p:nvPr/>
-          </p:nvCxnSpPr>
-          <p:spPr>
-            <a:xfrm flipV="1">
-              <a:off x="5281116" y="3955865"/>
-              <a:ext cx="0" cy="209885"/>
-            </a:xfrm>
-            <a:prstGeom prst="straightConnector1">
-              <a:avLst/>
-            </a:prstGeom>
-            <a:ln w="12700">
-              <a:solidFill>
-                <a:schemeClr val="tx1"/>
-              </a:solidFill>
-              <a:headEnd type="triangle"/>
-              <a:tailEnd type="triangle"/>
-            </a:ln>
-            <a:effectLst/>
-          </p:spPr>
-          <p:style>
-            <a:lnRef idx="2">
-              <a:schemeClr val="accent1"/>
-            </a:lnRef>
-            <a:fillRef idx="0">
-              <a:schemeClr val="accent1"/>
-            </a:fillRef>
-            <a:effectRef idx="1">
-              <a:schemeClr val="accent1"/>
-            </a:effectRef>
-            <a:fontRef idx="minor">
-              <a:schemeClr val="tx1"/>
-            </a:fontRef>
-          </p:style>
-        </p:cxnSp>
-        <p:cxnSp>
-          <p:nvCxnSpPr>
-            <p:cNvPr id="26" name="直接连接符 48">
-              <a:extLst>
-                <a:ext uri="{FF2B5EF4-FFF2-40B4-BE49-F238E27FC236}">
-                  <a16:creationId xmlns:a16="http://schemas.microsoft.com/office/drawing/2014/main" id="{72A36516-94F5-1AFE-C805-C9CDC98A6AD3}"/>
-                </a:ext>
-              </a:extLst>
-            </p:cNvPr>
-            <p:cNvCxnSpPr>
-              <a:cxnSpLocks/>
-            </p:cNvCxnSpPr>
-            <p:nvPr/>
-          </p:nvCxnSpPr>
-          <p:spPr>
-            <a:xfrm flipV="1">
-              <a:off x="2639763" y="3098950"/>
-              <a:ext cx="0" cy="391589"/>
-            </a:xfrm>
-            <a:prstGeom prst="line">
-              <a:avLst/>
-            </a:prstGeom>
-            <a:ln w="12700">
-              <a:solidFill>
-                <a:schemeClr val="tx1"/>
-              </a:solidFill>
-              <a:prstDash val="sysDash"/>
-            </a:ln>
-            <a:effectLst/>
-          </p:spPr>
-          <p:style>
-            <a:lnRef idx="2">
-              <a:schemeClr val="accent1"/>
-            </a:lnRef>
-            <a:fillRef idx="0">
-              <a:schemeClr val="accent1"/>
-            </a:fillRef>
-            <a:effectRef idx="1">
-              <a:schemeClr val="accent1"/>
-            </a:effectRef>
-            <a:fontRef idx="minor">
-              <a:schemeClr val="tx1"/>
-            </a:fontRef>
-          </p:style>
-        </p:cxnSp>
-        <p:cxnSp>
-          <p:nvCxnSpPr>
-            <p:cNvPr id="27" name="直接连接符 49">
-              <a:extLst>
-                <a:ext uri="{FF2B5EF4-FFF2-40B4-BE49-F238E27FC236}">
-                  <a16:creationId xmlns:a16="http://schemas.microsoft.com/office/drawing/2014/main" id="{28E8C7AA-D4FA-16DD-3140-C5AC95B412C6}"/>
-                </a:ext>
-              </a:extLst>
-            </p:cNvPr>
-            <p:cNvCxnSpPr>
-              <a:cxnSpLocks/>
-            </p:cNvCxnSpPr>
-            <p:nvPr/>
-          </p:nvCxnSpPr>
-          <p:spPr>
-            <a:xfrm flipV="1">
-              <a:off x="3037651" y="3098950"/>
-              <a:ext cx="0" cy="388810"/>
-            </a:xfrm>
-            <a:prstGeom prst="line">
-              <a:avLst/>
-            </a:prstGeom>
-            <a:ln w="12700">
-              <a:solidFill>
-                <a:schemeClr val="tx1"/>
-              </a:solidFill>
-              <a:prstDash val="sysDash"/>
-            </a:ln>
-            <a:effectLst/>
-          </p:spPr>
-          <p:style>
-            <a:lnRef idx="2">
-              <a:schemeClr val="accent1"/>
-            </a:lnRef>
-            <a:fillRef idx="0">
-              <a:schemeClr val="accent1"/>
-            </a:fillRef>
-            <a:effectRef idx="1">
-              <a:schemeClr val="accent1"/>
-            </a:effectRef>
-            <a:fontRef idx="minor">
-              <a:schemeClr val="tx1"/>
-            </a:fontRef>
-          </p:style>
-        </p:cxnSp>
-        <p:cxnSp>
-          <p:nvCxnSpPr>
-            <p:cNvPr id="28" name="直接箭头连接符 51">
-              <a:extLst>
-                <a:ext uri="{FF2B5EF4-FFF2-40B4-BE49-F238E27FC236}">
-                  <a16:creationId xmlns:a16="http://schemas.microsoft.com/office/drawing/2014/main" id="{C5247297-5E4F-5227-3488-B56F169CA607}"/>
-                </a:ext>
-              </a:extLst>
-            </p:cNvPr>
-            <p:cNvCxnSpPr/>
-            <p:nvPr/>
-          </p:nvCxnSpPr>
-          <p:spPr>
-            <a:xfrm>
-              <a:off x="2647383" y="3312412"/>
-              <a:ext cx="379106" cy="0"/>
-            </a:xfrm>
-            <a:prstGeom prst="straightConnector1">
-              <a:avLst/>
-            </a:prstGeom>
-            <a:ln w="12700">
-              <a:solidFill>
-                <a:schemeClr val="tx1"/>
-              </a:solidFill>
-              <a:headEnd type="triangle"/>
-              <a:tailEnd type="triangle"/>
-            </a:ln>
-            <a:effectLst/>
-          </p:spPr>
-          <p:style>
-            <a:lnRef idx="2">
-              <a:schemeClr val="accent1"/>
-            </a:lnRef>
-            <a:fillRef idx="0">
-              <a:schemeClr val="accent1"/>
-            </a:fillRef>
-            <a:effectRef idx="1">
-              <a:schemeClr val="accent1"/>
-            </a:effectRef>
-            <a:fontRef idx="minor">
-              <a:schemeClr val="tx1"/>
-            </a:fontRef>
-          </p:style>
-        </p:cxnSp>
-        <mc:AlternateContent xmlns:mc="http://schemas.openxmlformats.org/markup-compatibility/2006">
-          <mc:Choice xmlns:a14="http://schemas.microsoft.com/office/drawing/2010/main" Requires="a14">
-            <p:sp>
-              <p:nvSpPr>
-                <p:cNvPr id="29" name="文本框 52">
-                  <a:extLst>
-                    <a:ext uri="{FF2B5EF4-FFF2-40B4-BE49-F238E27FC236}">
-                      <a16:creationId xmlns:a16="http://schemas.microsoft.com/office/drawing/2014/main" id="{B4D3E390-0BB2-3EA2-2405-C25CA859BA9F}"/>
-                    </a:ext>
-                  </a:extLst>
-                </p:cNvPr>
-                <p:cNvSpPr txBox="1"/>
-                <p:nvPr/>
-              </p:nvSpPr>
-              <p:spPr>
-                <a:xfrm>
-                  <a:off x="2648950" y="2739153"/>
-                  <a:ext cx="625428" cy="369332"/>
-                </a:xfrm>
-                <a:prstGeom prst="rect">
-                  <a:avLst/>
-                </a:prstGeom>
-                <a:noFill/>
-              </p:spPr>
-              <p:txBody>
-                <a:bodyPr wrap="none" rtlCol="0">
-                  <a:spAutoFit/>
-                </a:bodyPr>
-                <a:lstStyle/>
-                <a:p>
-                  <a14:m>
-                    <m:oMathPara xmlns:m="http://schemas.openxmlformats.org/officeDocument/2006/math">
-                      <m:oMathParaPr>
-                        <m:jc m:val="centerGroup"/>
-                      </m:oMathParaPr>
-                      <m:oMath xmlns:m="http://schemas.openxmlformats.org/officeDocument/2006/math">
-                        <m:sSub>
-                          <m:sSubPr>
-                            <m:ctrlPr>
-                              <a:rPr lang="en-GB" altLang="zh-CN" b="0" i="1" smtClean="0">
-                                <a:latin typeface="Cambria Math" panose="02040503050406030204" pitchFamily="18" charset="0"/>
-                              </a:rPr>
-                            </m:ctrlPr>
-                          </m:sSubPr>
-                          <m:e>
-                            <m:r>
-                              <a:rPr lang="en-GB" altLang="zh-CN" b="0" i="1" smtClean="0">
-                                <a:latin typeface="Cambria Math" panose="02040503050406030204" pitchFamily="18" charset="0"/>
-                              </a:rPr>
-                              <m:t>𝑑</m:t>
-                            </m:r>
-                          </m:e>
-                          <m:sub>
-                            <m:r>
-                              <m:rPr>
-                                <m:sty m:val="p"/>
-                              </m:rPr>
-                              <a:rPr lang="en-GB" altLang="zh-CN" b="0" i="0" smtClean="0">
-                                <a:latin typeface="Cambria Math" panose="02040503050406030204" pitchFamily="18" charset="0"/>
-                              </a:rPr>
-                              <m:t>del</m:t>
-                            </m:r>
-                          </m:sub>
-                        </m:sSub>
-                      </m:oMath>
-                    </m:oMathPara>
-                  </a14:m>
-                  <a:endParaRPr lang="zh-CN" altLang="en-US" dirty="0"/>
-                </a:p>
-              </p:txBody>
-            </p:sp>
-          </mc:Choice>
-          <mc:Fallback>
-            <p:sp>
-              <p:nvSpPr>
-                <p:cNvPr id="29" name="文本框 52">
-                  <a:extLst>
-                    <a:ext uri="{FF2B5EF4-FFF2-40B4-BE49-F238E27FC236}">
-                      <a16:creationId xmlns:a16="http://schemas.microsoft.com/office/drawing/2014/main" id="{B4D3E390-0BB2-3EA2-2405-C25CA859BA9F}"/>
-                    </a:ext>
-                  </a:extLst>
-                </p:cNvPr>
-                <p:cNvSpPr txBox="1">
-                  <a:spLocks noRot="1" noChangeAspect="1" noMove="1" noResize="1" noEditPoints="1" noAdjustHandles="1" noChangeArrowheads="1" noChangeShapeType="1" noTextEdit="1"/>
-                </p:cNvSpPr>
-                <p:nvPr/>
-              </p:nvSpPr>
-              <p:spPr>
-                <a:xfrm>
-                  <a:off x="2648950" y="2739153"/>
-                  <a:ext cx="625428" cy="369332"/>
-                </a:xfrm>
-                <a:prstGeom prst="rect">
-                  <a:avLst/>
-                </a:prstGeom>
-                <a:blipFill>
-                  <a:blip r:embed="rId4"/>
-                  <a:stretch>
-                    <a:fillRect/>
-                  </a:stretch>
-                </a:blipFill>
-              </p:spPr>
-              <p:txBody>
-                <a:bodyPr/>
-                <a:lstStyle/>
-                <a:p>
-                  <a:r>
-                    <a:rPr lang="nl-NL">
-                      <a:noFill/>
-                    </a:rPr>
-                    <a:t> </a:t>
-                  </a:r>
-                </a:p>
-              </p:txBody>
-            </p:sp>
-          </mc:Fallback>
-        </mc:AlternateContent>
-        <p:cxnSp>
-          <p:nvCxnSpPr>
-            <p:cNvPr id="30" name="直接箭头连接符 57">
-              <a:extLst>
-                <a:ext uri="{FF2B5EF4-FFF2-40B4-BE49-F238E27FC236}">
-                  <a16:creationId xmlns:a16="http://schemas.microsoft.com/office/drawing/2014/main" id="{C66D4462-DB2E-230E-EEA7-B8CAA4DB4266}"/>
-                </a:ext>
-              </a:extLst>
-            </p:cNvPr>
-            <p:cNvCxnSpPr>
-              <a:cxnSpLocks/>
-            </p:cNvCxnSpPr>
-            <p:nvPr/>
-          </p:nvCxnSpPr>
-          <p:spPr>
-            <a:xfrm>
-              <a:off x="4780834" y="2374201"/>
-              <a:ext cx="199205" cy="0"/>
-            </a:xfrm>
-            <a:prstGeom prst="straightConnector1">
-              <a:avLst/>
-            </a:prstGeom>
-            <a:ln w="12700">
-              <a:solidFill>
-                <a:schemeClr val="tx1"/>
-              </a:solidFill>
-              <a:tailEnd type="triangle"/>
-            </a:ln>
-          </p:spPr>
-          <p:style>
-            <a:lnRef idx="2">
-              <a:schemeClr val="accent1"/>
-            </a:lnRef>
-            <a:fillRef idx="0">
-              <a:schemeClr val="accent1"/>
-            </a:fillRef>
-            <a:effectRef idx="1">
-              <a:schemeClr val="accent1"/>
-            </a:effectRef>
-            <a:fontRef idx="minor">
-              <a:schemeClr val="tx1"/>
-            </a:fontRef>
-          </p:style>
-        </p:cxnSp>
-        <mc:AlternateContent xmlns:mc="http://schemas.openxmlformats.org/markup-compatibility/2006">
-          <mc:Choice xmlns:a14="http://schemas.microsoft.com/office/drawing/2010/main" Requires="a14">
-            <p:sp>
-              <p:nvSpPr>
-                <p:cNvPr id="31" name="文本框 59">
-                  <a:extLst>
-                    <a:ext uri="{FF2B5EF4-FFF2-40B4-BE49-F238E27FC236}">
-                      <a16:creationId xmlns:a16="http://schemas.microsoft.com/office/drawing/2014/main" id="{09F91885-7197-2E58-95DC-2DF0A89116DA}"/>
-                    </a:ext>
-                  </a:extLst>
-                </p:cNvPr>
-                <p:cNvSpPr txBox="1"/>
-                <p:nvPr/>
-              </p:nvSpPr>
-              <p:spPr>
-                <a:xfrm>
-                  <a:off x="4939384" y="2180918"/>
-                  <a:ext cx="692561" cy="369332"/>
-                </a:xfrm>
-                <a:prstGeom prst="rect">
-                  <a:avLst/>
-                </a:prstGeom>
-                <a:noFill/>
-              </p:spPr>
-              <p:txBody>
-                <a:bodyPr wrap="none" rtlCol="0">
-                  <a:spAutoFit/>
-                </a:bodyPr>
-                <a:lstStyle/>
-                <a:p>
-                  <a14:m>
-                    <m:oMathPara xmlns:m="http://schemas.openxmlformats.org/officeDocument/2006/math">
-                      <m:oMathParaPr>
-                        <m:jc m:val="centerGroup"/>
-                      </m:oMathParaPr>
-                      <m:oMath xmlns:m="http://schemas.openxmlformats.org/officeDocument/2006/math">
-                        <m:sSub>
-                          <m:sSubPr>
-                            <m:ctrlPr>
-                              <a:rPr lang="en-GB" altLang="zh-CN" b="0" i="1" smtClean="0">
-                                <a:latin typeface="Cambria Math" panose="02040503050406030204" pitchFamily="18" charset="0"/>
-                              </a:rPr>
-                            </m:ctrlPr>
-                          </m:sSubPr>
-                          <m:e>
-                            <m:r>
-                              <a:rPr lang="en-GB" altLang="zh-CN" b="0" i="1" smtClean="0">
-                                <a:latin typeface="Cambria Math" panose="02040503050406030204" pitchFamily="18" charset="0"/>
-                              </a:rPr>
-                              <m:t>𝑡</m:t>
-                            </m:r>
-                          </m:e>
-                          <m:sub>
-                            <m:r>
-                              <m:rPr>
-                                <m:sty m:val="p"/>
-                              </m:rPr>
-                              <a:rPr lang="en-GB" altLang="zh-CN" b="0" i="0" smtClean="0">
-                                <a:latin typeface="Cambria Math" panose="02040503050406030204" pitchFamily="18" charset="0"/>
-                              </a:rPr>
-                              <m:t>ubm</m:t>
-                            </m:r>
-                          </m:sub>
-                        </m:sSub>
-                      </m:oMath>
-                    </m:oMathPara>
-                  </a14:m>
-                  <a:endParaRPr lang="zh-CN" altLang="en-US" dirty="0"/>
-                </a:p>
-              </p:txBody>
-            </p:sp>
-          </mc:Choice>
-          <mc:Fallback>
-            <p:sp>
-              <p:nvSpPr>
-                <p:cNvPr id="31" name="文本框 59">
-                  <a:extLst>
-                    <a:ext uri="{FF2B5EF4-FFF2-40B4-BE49-F238E27FC236}">
-                      <a16:creationId xmlns:a16="http://schemas.microsoft.com/office/drawing/2014/main" id="{09F91885-7197-2E58-95DC-2DF0A89116DA}"/>
-                    </a:ext>
-                  </a:extLst>
-                </p:cNvPr>
-                <p:cNvSpPr txBox="1">
-                  <a:spLocks noRot="1" noChangeAspect="1" noMove="1" noResize="1" noEditPoints="1" noAdjustHandles="1" noChangeArrowheads="1" noChangeShapeType="1" noTextEdit="1"/>
-                </p:cNvSpPr>
-                <p:nvPr/>
-              </p:nvSpPr>
-              <p:spPr>
-                <a:xfrm>
-                  <a:off x="4939384" y="2180918"/>
-                  <a:ext cx="692561" cy="369332"/>
-                </a:xfrm>
-                <a:prstGeom prst="rect">
-                  <a:avLst/>
-                </a:prstGeom>
-                <a:blipFill>
-                  <a:blip r:embed="rId5"/>
-                  <a:stretch>
-                    <a:fillRect b="-1667"/>
-                  </a:stretch>
-                </a:blipFill>
-              </p:spPr>
-              <p:txBody>
-                <a:bodyPr/>
-                <a:lstStyle/>
-                <a:p>
-                  <a:r>
-                    <a:rPr lang="nl-NL">
-                      <a:noFill/>
-                    </a:rPr>
-                    <a:t> </a:t>
-                  </a:r>
-                </a:p>
-              </p:txBody>
-            </p:sp>
-          </mc:Fallback>
-        </mc:AlternateContent>
-        <mc:AlternateContent xmlns:mc="http://schemas.openxmlformats.org/markup-compatibility/2006">
-          <mc:Choice xmlns:a14="http://schemas.microsoft.com/office/drawing/2010/main" Requires="a14">
-            <p:sp>
-              <p:nvSpPr>
-                <p:cNvPr id="32" name="文本框 64">
-                  <a:extLst>
-                    <a:ext uri="{FF2B5EF4-FFF2-40B4-BE49-F238E27FC236}">
-                      <a16:creationId xmlns:a16="http://schemas.microsoft.com/office/drawing/2014/main" id="{73EA87E7-47EB-1079-3C03-BE8B8FE4F9D3}"/>
-                    </a:ext>
-                  </a:extLst>
-                </p:cNvPr>
-                <p:cNvSpPr txBox="1"/>
-                <p:nvPr/>
-              </p:nvSpPr>
-              <p:spPr>
-                <a:xfrm>
-                  <a:off x="1852307" y="2936163"/>
-                  <a:ext cx="671915" cy="369332"/>
-                </a:xfrm>
-                <a:prstGeom prst="rect">
-                  <a:avLst/>
-                </a:prstGeom>
-                <a:noFill/>
-              </p:spPr>
-              <p:txBody>
-                <a:bodyPr wrap="none" rtlCol="0">
-                  <a:spAutoFit/>
-                </a:bodyPr>
-                <a:lstStyle/>
-                <a:p>
-                  <a14:m>
-                    <m:oMathPara xmlns:m="http://schemas.openxmlformats.org/officeDocument/2006/math">
-                      <m:oMathParaPr>
-                        <m:jc m:val="centerGroup"/>
-                      </m:oMathParaPr>
-                      <m:oMath xmlns:m="http://schemas.openxmlformats.org/officeDocument/2006/math">
-                        <m:sSub>
-                          <m:sSubPr>
-                            <m:ctrlPr>
-                              <a:rPr lang="en-GB" altLang="zh-CN" b="0" i="1" smtClean="0">
-                                <a:latin typeface="Cambria Math" panose="02040503050406030204" pitchFamily="18" charset="0"/>
-                              </a:rPr>
-                            </m:ctrlPr>
-                          </m:sSubPr>
-                          <m:e>
-                            <m:r>
-                              <a:rPr lang="en-GB" altLang="zh-CN" b="0" i="1" smtClean="0">
-                                <a:latin typeface="Cambria Math" panose="02040503050406030204" pitchFamily="18" charset="0"/>
-                              </a:rPr>
-                              <m:t>h</m:t>
-                            </m:r>
-                          </m:e>
-                          <m:sub>
-                            <m:r>
-                              <m:rPr>
-                                <m:sty m:val="p"/>
-                              </m:rPr>
-                              <a:rPr lang="en-GB" altLang="zh-CN" b="0" i="0" smtClean="0">
-                                <a:latin typeface="Cambria Math" panose="02040503050406030204" pitchFamily="18" charset="0"/>
-                              </a:rPr>
-                              <m:t>ball</m:t>
-                            </m:r>
-                          </m:sub>
-                        </m:sSub>
-                      </m:oMath>
-                    </m:oMathPara>
-                  </a14:m>
-                  <a:endParaRPr lang="zh-CN" altLang="en-US" dirty="0"/>
-                </a:p>
-              </p:txBody>
-            </p:sp>
-          </mc:Choice>
-          <mc:Fallback>
-            <p:sp>
-              <p:nvSpPr>
-                <p:cNvPr id="32" name="文本框 64">
-                  <a:extLst>
-                    <a:ext uri="{FF2B5EF4-FFF2-40B4-BE49-F238E27FC236}">
-                      <a16:creationId xmlns:a16="http://schemas.microsoft.com/office/drawing/2014/main" id="{73EA87E7-47EB-1079-3C03-BE8B8FE4F9D3}"/>
-                    </a:ext>
-                  </a:extLst>
-                </p:cNvPr>
-                <p:cNvSpPr txBox="1">
-                  <a:spLocks noRot="1" noChangeAspect="1" noMove="1" noResize="1" noEditPoints="1" noAdjustHandles="1" noChangeArrowheads="1" noChangeShapeType="1" noTextEdit="1"/>
-                </p:cNvSpPr>
-                <p:nvPr/>
-              </p:nvSpPr>
-              <p:spPr>
-                <a:xfrm>
-                  <a:off x="1852307" y="2936163"/>
-                  <a:ext cx="671915" cy="369332"/>
-                </a:xfrm>
-                <a:prstGeom prst="rect">
-                  <a:avLst/>
-                </a:prstGeom>
-                <a:blipFill>
-                  <a:blip r:embed="rId6"/>
-                  <a:stretch>
-                    <a:fillRect b="-1667"/>
-                  </a:stretch>
-                </a:blipFill>
-              </p:spPr>
-              <p:txBody>
-                <a:bodyPr/>
-                <a:lstStyle/>
-                <a:p>
-                  <a:r>
-                    <a:rPr lang="nl-NL">
-                      <a:noFill/>
-                    </a:rPr>
-                    <a:t> </a:t>
-                  </a:r>
-                </a:p>
-              </p:txBody>
-            </p:sp>
-          </mc:Fallback>
-        </mc:AlternateContent>
-        <p:cxnSp>
-          <p:nvCxnSpPr>
-            <p:cNvPr id="33" name="直接连接符 65">
-              <a:extLst>
-                <a:ext uri="{FF2B5EF4-FFF2-40B4-BE49-F238E27FC236}">
-                  <a16:creationId xmlns:a16="http://schemas.microsoft.com/office/drawing/2014/main" id="{71B99A2D-F457-70DF-B787-BA3573F0FADA}"/>
-                </a:ext>
-              </a:extLst>
-            </p:cNvPr>
-            <p:cNvCxnSpPr>
-              <a:cxnSpLocks/>
-            </p:cNvCxnSpPr>
-            <p:nvPr/>
-          </p:nvCxnSpPr>
-          <p:spPr>
-            <a:xfrm>
-              <a:off x="2441642" y="2278024"/>
-              <a:ext cx="1484682" cy="0"/>
-            </a:xfrm>
-            <a:prstGeom prst="line">
-              <a:avLst/>
-            </a:prstGeom>
-            <a:ln w="12700">
-              <a:solidFill>
-                <a:schemeClr val="tx1"/>
-              </a:solidFill>
-              <a:prstDash val="sysDash"/>
-            </a:ln>
-            <a:effectLst/>
-          </p:spPr>
-          <p:style>
-            <a:lnRef idx="2">
-              <a:schemeClr val="accent1"/>
-            </a:lnRef>
-            <a:fillRef idx="0">
-              <a:schemeClr val="accent1"/>
-            </a:fillRef>
-            <a:effectRef idx="1">
-              <a:schemeClr val="accent1"/>
-            </a:effectRef>
-            <a:fontRef idx="minor">
-              <a:schemeClr val="tx1"/>
-            </a:fontRef>
-          </p:style>
-        </p:cxnSp>
-        <p:cxnSp>
-          <p:nvCxnSpPr>
-            <p:cNvPr id="34" name="直接连接符 67">
-              <a:extLst>
-                <a:ext uri="{FF2B5EF4-FFF2-40B4-BE49-F238E27FC236}">
-                  <a16:creationId xmlns:a16="http://schemas.microsoft.com/office/drawing/2014/main" id="{6BFE6BDF-6B0A-7CC4-0E5F-971409CF404F}"/>
-                </a:ext>
-              </a:extLst>
-            </p:cNvPr>
-            <p:cNvCxnSpPr>
-              <a:cxnSpLocks/>
-            </p:cNvCxnSpPr>
-            <p:nvPr/>
-          </p:nvCxnSpPr>
-          <p:spPr>
-            <a:xfrm>
-              <a:off x="2451751" y="3967461"/>
-              <a:ext cx="1484682" cy="0"/>
-            </a:xfrm>
-            <a:prstGeom prst="line">
-              <a:avLst/>
-            </a:prstGeom>
-            <a:ln w="12700">
-              <a:solidFill>
-                <a:schemeClr val="tx1"/>
-              </a:solidFill>
-              <a:prstDash val="sysDash"/>
-            </a:ln>
-            <a:effectLst/>
-          </p:spPr>
-          <p:style>
-            <a:lnRef idx="2">
-              <a:schemeClr val="accent1"/>
-            </a:lnRef>
-            <a:fillRef idx="0">
-              <a:schemeClr val="accent1"/>
-            </a:fillRef>
-            <a:effectRef idx="1">
-              <a:schemeClr val="accent1"/>
-            </a:effectRef>
-            <a:fontRef idx="minor">
-              <a:schemeClr val="tx1"/>
-            </a:fontRef>
-          </p:style>
-        </p:cxnSp>
-        <p:cxnSp>
-          <p:nvCxnSpPr>
-            <p:cNvPr id="35" name="直接箭头连接符 68">
-              <a:extLst>
-                <a:ext uri="{FF2B5EF4-FFF2-40B4-BE49-F238E27FC236}">
-                  <a16:creationId xmlns:a16="http://schemas.microsoft.com/office/drawing/2014/main" id="{F87B1142-BD76-6E5D-FC1D-31929D2ACB2A}"/>
-                </a:ext>
-              </a:extLst>
-            </p:cNvPr>
-            <p:cNvCxnSpPr>
-              <a:cxnSpLocks/>
-            </p:cNvCxnSpPr>
-            <p:nvPr/>
-          </p:nvCxnSpPr>
-          <p:spPr>
-            <a:xfrm flipV="1">
-              <a:off x="2466991" y="2278126"/>
-              <a:ext cx="0" cy="1689335"/>
-            </a:xfrm>
-            <a:prstGeom prst="straightConnector1">
-              <a:avLst/>
-            </a:prstGeom>
-            <a:ln w="12700">
-              <a:solidFill>
-                <a:schemeClr val="tx1"/>
-              </a:solidFill>
-              <a:prstDash val="solid"/>
-              <a:headEnd type="triangle"/>
-              <a:tailEnd type="triangle"/>
-            </a:ln>
-            <a:effectLst/>
-          </p:spPr>
-          <p:style>
-            <a:lnRef idx="2">
-              <a:schemeClr val="accent1"/>
-            </a:lnRef>
-            <a:fillRef idx="0">
-              <a:schemeClr val="accent1"/>
-            </a:fillRef>
-            <a:effectRef idx="1">
-              <a:schemeClr val="accent1"/>
-            </a:effectRef>
-            <a:fontRef idx="minor">
-              <a:schemeClr val="tx1"/>
-            </a:fontRef>
-          </p:style>
-        </p:cxnSp>
-        <p:cxnSp>
-          <p:nvCxnSpPr>
-            <p:cNvPr id="36" name="直接连接符 69">
-              <a:extLst>
-                <a:ext uri="{FF2B5EF4-FFF2-40B4-BE49-F238E27FC236}">
-                  <a16:creationId xmlns:a16="http://schemas.microsoft.com/office/drawing/2014/main" id="{83E07AD7-19F2-8EFF-E574-E23CE09B280E}"/>
-                </a:ext>
-              </a:extLst>
-            </p:cNvPr>
-            <p:cNvCxnSpPr>
-              <a:cxnSpLocks/>
-            </p:cNvCxnSpPr>
-            <p:nvPr/>
-          </p:nvCxnSpPr>
-          <p:spPr>
-            <a:xfrm flipV="1">
-              <a:off x="3037651" y="1534437"/>
-              <a:ext cx="0" cy="785858"/>
-            </a:xfrm>
-            <a:prstGeom prst="line">
-              <a:avLst/>
-            </a:prstGeom>
-            <a:ln w="12700">
-              <a:solidFill>
-                <a:schemeClr val="tx1"/>
-              </a:solidFill>
-              <a:prstDash val="sysDash"/>
-            </a:ln>
-            <a:effectLst/>
-          </p:spPr>
-          <p:style>
-            <a:lnRef idx="2">
-              <a:schemeClr val="accent1"/>
-            </a:lnRef>
-            <a:fillRef idx="0">
-              <a:schemeClr val="accent1"/>
-            </a:fillRef>
-            <a:effectRef idx="1">
-              <a:schemeClr val="accent1"/>
-            </a:effectRef>
-            <a:fontRef idx="minor">
-              <a:schemeClr val="tx1"/>
-            </a:fontRef>
-          </p:style>
-        </p:cxnSp>
-        <p:cxnSp>
-          <p:nvCxnSpPr>
-            <p:cNvPr id="37" name="直接连接符 70">
-              <a:extLst>
-                <a:ext uri="{FF2B5EF4-FFF2-40B4-BE49-F238E27FC236}">
-                  <a16:creationId xmlns:a16="http://schemas.microsoft.com/office/drawing/2014/main" id="{DAFA7AB6-81CD-39F3-C5F2-CD5F6F9AAD07}"/>
-                </a:ext>
-              </a:extLst>
-            </p:cNvPr>
-            <p:cNvCxnSpPr>
-              <a:cxnSpLocks/>
-            </p:cNvCxnSpPr>
-            <p:nvPr/>
-          </p:nvCxnSpPr>
-          <p:spPr>
-            <a:xfrm flipV="1">
-              <a:off x="4771406" y="1534437"/>
-              <a:ext cx="0" cy="785858"/>
-            </a:xfrm>
-            <a:prstGeom prst="line">
-              <a:avLst/>
-            </a:prstGeom>
-            <a:ln w="12700">
-              <a:solidFill>
-                <a:schemeClr val="tx1"/>
-              </a:solidFill>
-              <a:prstDash val="sysDash"/>
-            </a:ln>
-            <a:effectLst/>
-          </p:spPr>
-          <p:style>
-            <a:lnRef idx="2">
-              <a:schemeClr val="accent1"/>
-            </a:lnRef>
-            <a:fillRef idx="0">
-              <a:schemeClr val="accent1"/>
-            </a:fillRef>
-            <a:effectRef idx="1">
-              <a:schemeClr val="accent1"/>
-            </a:effectRef>
-            <a:fontRef idx="minor">
-              <a:schemeClr val="tx1"/>
-            </a:fontRef>
-          </p:style>
-        </p:cxnSp>
-        <mc:AlternateContent xmlns:mc="http://schemas.openxmlformats.org/markup-compatibility/2006">
-          <mc:Choice xmlns:a14="http://schemas.microsoft.com/office/drawing/2010/main" Requires="a14">
-            <p:sp>
-              <p:nvSpPr>
-                <p:cNvPr id="38" name="文本框 71">
-                  <a:extLst>
-                    <a:ext uri="{FF2B5EF4-FFF2-40B4-BE49-F238E27FC236}">
-                      <a16:creationId xmlns:a16="http://schemas.microsoft.com/office/drawing/2014/main" id="{CE3F4E67-F389-FBD0-2888-7426EF1E3216}"/>
-                    </a:ext>
-                  </a:extLst>
-                </p:cNvPr>
-                <p:cNvSpPr txBox="1"/>
-                <p:nvPr/>
-              </p:nvSpPr>
-              <p:spPr>
-                <a:xfrm>
-                  <a:off x="3556864" y="1348341"/>
-                  <a:ext cx="738920" cy="369332"/>
-                </a:xfrm>
-                <a:prstGeom prst="rect">
-                  <a:avLst/>
-                </a:prstGeom>
-                <a:noFill/>
-              </p:spPr>
-              <p:txBody>
-                <a:bodyPr wrap="none" rtlCol="0">
-                  <a:spAutoFit/>
-                </a:bodyPr>
-                <a:lstStyle/>
-                <a:p>
-                  <a14:m>
-                    <m:oMathPara xmlns:m="http://schemas.openxmlformats.org/officeDocument/2006/math">
-                      <m:oMathParaPr>
-                        <m:jc m:val="centerGroup"/>
-                      </m:oMathParaPr>
-                      <m:oMath xmlns:m="http://schemas.openxmlformats.org/officeDocument/2006/math">
-                        <m:sSub>
-                          <m:sSubPr>
-                            <m:ctrlPr>
-                              <a:rPr lang="en-GB" altLang="zh-CN" b="0" i="1" smtClean="0">
-                                <a:latin typeface="Cambria Math" panose="02040503050406030204" pitchFamily="18" charset="0"/>
-                              </a:rPr>
-                            </m:ctrlPr>
-                          </m:sSubPr>
-                          <m:e>
-                            <m:r>
-                              <a:rPr lang="en-GB" altLang="zh-CN" b="0" i="1" smtClean="0">
-                                <a:latin typeface="Cambria Math" panose="02040503050406030204" pitchFamily="18" charset="0"/>
-                              </a:rPr>
-                              <m:t>𝑑</m:t>
-                            </m:r>
-                          </m:e>
-                          <m:sub>
-                            <m:r>
-                              <m:rPr>
-                                <m:sty m:val="p"/>
-                              </m:rPr>
-                              <a:rPr lang="en-GB" altLang="zh-CN" b="0" i="0" smtClean="0">
-                                <a:latin typeface="Cambria Math" panose="02040503050406030204" pitchFamily="18" charset="0"/>
-                              </a:rPr>
-                              <m:t>ubm</m:t>
-                            </m:r>
-                          </m:sub>
-                        </m:sSub>
-                      </m:oMath>
-                    </m:oMathPara>
-                  </a14:m>
-                  <a:endParaRPr lang="zh-CN" altLang="en-US" dirty="0"/>
-                </a:p>
-              </p:txBody>
-            </p:sp>
-          </mc:Choice>
-          <mc:Fallback>
-            <p:sp>
-              <p:nvSpPr>
-                <p:cNvPr id="38" name="文本框 71">
-                  <a:extLst>
-                    <a:ext uri="{FF2B5EF4-FFF2-40B4-BE49-F238E27FC236}">
-                      <a16:creationId xmlns:a16="http://schemas.microsoft.com/office/drawing/2014/main" id="{CE3F4E67-F389-FBD0-2888-7426EF1E3216}"/>
-                    </a:ext>
-                  </a:extLst>
-                </p:cNvPr>
-                <p:cNvSpPr txBox="1">
-                  <a:spLocks noRot="1" noChangeAspect="1" noMove="1" noResize="1" noEditPoints="1" noAdjustHandles="1" noChangeArrowheads="1" noChangeShapeType="1" noTextEdit="1"/>
-                </p:cNvSpPr>
-                <p:nvPr/>
-              </p:nvSpPr>
-              <p:spPr>
-                <a:xfrm>
-                  <a:off x="3556864" y="1348341"/>
-                  <a:ext cx="738920" cy="369332"/>
-                </a:xfrm>
-                <a:prstGeom prst="rect">
-                  <a:avLst/>
-                </a:prstGeom>
-                <a:blipFill>
-                  <a:blip r:embed="rId7"/>
-                  <a:stretch>
-                    <a:fillRect/>
-                  </a:stretch>
-                </a:blipFill>
-              </p:spPr>
-              <p:txBody>
-                <a:bodyPr/>
-                <a:lstStyle/>
-                <a:p>
-                  <a:r>
-                    <a:rPr lang="nl-NL">
-                      <a:noFill/>
-                    </a:rPr>
-                    <a:t> </a:t>
-                  </a:r>
-                </a:p>
-              </p:txBody>
-            </p:sp>
-          </mc:Fallback>
-        </mc:AlternateContent>
-        <p:cxnSp>
-          <p:nvCxnSpPr>
-            <p:cNvPr id="39" name="直接箭头连接符 72">
-              <a:extLst>
-                <a:ext uri="{FF2B5EF4-FFF2-40B4-BE49-F238E27FC236}">
-                  <a16:creationId xmlns:a16="http://schemas.microsoft.com/office/drawing/2014/main" id="{CAAEF860-14D0-E92C-E928-B30B76FE844C}"/>
-                </a:ext>
-              </a:extLst>
-            </p:cNvPr>
-            <p:cNvCxnSpPr>
-              <a:cxnSpLocks/>
-            </p:cNvCxnSpPr>
-            <p:nvPr/>
-          </p:nvCxnSpPr>
-          <p:spPr>
-            <a:xfrm flipH="1">
-              <a:off x="3027998" y="1558509"/>
-              <a:ext cx="492760" cy="0"/>
-            </a:xfrm>
-            <a:prstGeom prst="straightConnector1">
-              <a:avLst/>
-            </a:prstGeom>
-            <a:ln w="12700">
-              <a:solidFill>
-                <a:schemeClr val="tx1"/>
-              </a:solidFill>
-              <a:tailEnd type="triangle"/>
-            </a:ln>
-          </p:spPr>
-          <p:style>
-            <a:lnRef idx="2">
-              <a:schemeClr val="accent1"/>
-            </a:lnRef>
-            <a:fillRef idx="0">
-              <a:schemeClr val="accent1"/>
-            </a:fillRef>
-            <a:effectRef idx="1">
-              <a:schemeClr val="accent1"/>
-            </a:effectRef>
-            <a:fontRef idx="minor">
-              <a:schemeClr val="tx1"/>
-            </a:fontRef>
-          </p:style>
-        </p:cxnSp>
-        <p:cxnSp>
-          <p:nvCxnSpPr>
-            <p:cNvPr id="40" name="直接箭头连接符 73">
-              <a:extLst>
-                <a:ext uri="{FF2B5EF4-FFF2-40B4-BE49-F238E27FC236}">
-                  <a16:creationId xmlns:a16="http://schemas.microsoft.com/office/drawing/2014/main" id="{11D78BCD-D451-10B4-4159-45779EAE517B}"/>
-                </a:ext>
-              </a:extLst>
-            </p:cNvPr>
-            <p:cNvCxnSpPr>
-              <a:cxnSpLocks/>
-            </p:cNvCxnSpPr>
-            <p:nvPr/>
-          </p:nvCxnSpPr>
-          <p:spPr>
-            <a:xfrm>
-              <a:off x="4287967" y="1558509"/>
-              <a:ext cx="492760" cy="0"/>
-            </a:xfrm>
-            <a:prstGeom prst="straightConnector1">
-              <a:avLst/>
-            </a:prstGeom>
-            <a:ln w="12700">
-              <a:solidFill>
-                <a:schemeClr val="tx1"/>
-              </a:solidFill>
-              <a:tailEnd type="triangle"/>
-            </a:ln>
-          </p:spPr>
-          <p:style>
-            <a:lnRef idx="2">
-              <a:schemeClr val="accent1"/>
-            </a:lnRef>
-            <a:fillRef idx="0">
-              <a:schemeClr val="accent1"/>
-            </a:fillRef>
-            <a:effectRef idx="1">
-              <a:schemeClr val="accent1"/>
-            </a:effectRef>
-            <a:fontRef idx="minor">
-              <a:schemeClr val="tx1"/>
-            </a:fontRef>
-          </p:style>
-        </p:cxnSp>
-        <p:cxnSp>
-          <p:nvCxnSpPr>
-            <p:cNvPr id="41" name="直接连接符 74">
-              <a:extLst>
-                <a:ext uri="{FF2B5EF4-FFF2-40B4-BE49-F238E27FC236}">
-                  <a16:creationId xmlns:a16="http://schemas.microsoft.com/office/drawing/2014/main" id="{88EF6689-4377-2960-C7D9-C2A640BD7C68}"/>
-                </a:ext>
-              </a:extLst>
-            </p:cNvPr>
-            <p:cNvCxnSpPr>
-              <a:cxnSpLocks/>
-            </p:cNvCxnSpPr>
-            <p:nvPr/>
-          </p:nvCxnSpPr>
-          <p:spPr>
-            <a:xfrm flipV="1">
-              <a:off x="3220595" y="1917952"/>
-              <a:ext cx="0" cy="298491"/>
-            </a:xfrm>
-            <a:prstGeom prst="line">
-              <a:avLst/>
-            </a:prstGeom>
-            <a:ln w="12700">
-              <a:solidFill>
-                <a:schemeClr val="tx1"/>
-              </a:solidFill>
-              <a:prstDash val="sysDash"/>
-            </a:ln>
-            <a:effectLst/>
-          </p:spPr>
-          <p:style>
-            <a:lnRef idx="2">
-              <a:schemeClr val="accent1"/>
-            </a:lnRef>
-            <a:fillRef idx="0">
-              <a:schemeClr val="accent1"/>
-            </a:fillRef>
-            <a:effectRef idx="1">
-              <a:schemeClr val="accent1"/>
-            </a:effectRef>
-            <a:fontRef idx="minor">
-              <a:schemeClr val="tx1"/>
-            </a:fontRef>
-          </p:style>
-        </p:cxnSp>
-        <p:cxnSp>
-          <p:nvCxnSpPr>
-            <p:cNvPr id="42" name="直接连接符 78">
-              <a:extLst>
-                <a:ext uri="{FF2B5EF4-FFF2-40B4-BE49-F238E27FC236}">
-                  <a16:creationId xmlns:a16="http://schemas.microsoft.com/office/drawing/2014/main" id="{0A6FBBB7-7357-A281-527C-7D4E41E285F1}"/>
-                </a:ext>
-              </a:extLst>
-            </p:cNvPr>
-            <p:cNvCxnSpPr>
-              <a:cxnSpLocks/>
-            </p:cNvCxnSpPr>
-            <p:nvPr/>
-          </p:nvCxnSpPr>
-          <p:spPr>
-            <a:xfrm flipV="1">
-              <a:off x="4590451" y="1915960"/>
-              <a:ext cx="0" cy="298491"/>
-            </a:xfrm>
-            <a:prstGeom prst="line">
-              <a:avLst/>
-            </a:prstGeom>
-            <a:ln w="12700">
-              <a:solidFill>
-                <a:schemeClr val="tx1"/>
-              </a:solidFill>
-              <a:prstDash val="sysDash"/>
-            </a:ln>
-            <a:effectLst/>
-          </p:spPr>
-          <p:style>
-            <a:lnRef idx="2">
-              <a:schemeClr val="accent1"/>
-            </a:lnRef>
-            <a:fillRef idx="0">
-              <a:schemeClr val="accent1"/>
-            </a:fillRef>
-            <a:effectRef idx="1">
-              <a:schemeClr val="accent1"/>
-            </a:effectRef>
-            <a:fontRef idx="minor">
-              <a:schemeClr val="tx1"/>
-            </a:fontRef>
-          </p:style>
-        </p:cxnSp>
-        <mc:AlternateContent xmlns:mc="http://schemas.openxmlformats.org/markup-compatibility/2006">
-          <mc:Choice xmlns:a14="http://schemas.microsoft.com/office/drawing/2010/main" Requires="a14">
-            <p:sp>
-              <p:nvSpPr>
-                <p:cNvPr id="43" name="文本框 79">
-                  <a:extLst>
-                    <a:ext uri="{FF2B5EF4-FFF2-40B4-BE49-F238E27FC236}">
-                      <a16:creationId xmlns:a16="http://schemas.microsoft.com/office/drawing/2014/main" id="{81CC1F50-44EA-8119-C996-8916A8E1E77D}"/>
-                    </a:ext>
-                  </a:extLst>
-                </p:cNvPr>
-                <p:cNvSpPr txBox="1"/>
-                <p:nvPr/>
-              </p:nvSpPr>
-              <p:spPr>
-                <a:xfrm>
-                  <a:off x="3528927" y="1719292"/>
-                  <a:ext cx="750462" cy="394019"/>
-                </a:xfrm>
-                <a:prstGeom prst="rect">
-                  <a:avLst/>
-                </a:prstGeom>
-                <a:noFill/>
-              </p:spPr>
-              <p:txBody>
-                <a:bodyPr wrap="none" rtlCol="0">
-                  <a:spAutoFit/>
-                </a:bodyPr>
-                <a:lstStyle/>
-                <a:p>
-                  <a14:m>
-                    <m:oMathPara xmlns:m="http://schemas.openxmlformats.org/officeDocument/2006/math">
-                      <m:oMathParaPr>
-                        <m:jc m:val="centerGroup"/>
-                      </m:oMathParaPr>
-                      <m:oMath xmlns:m="http://schemas.openxmlformats.org/officeDocument/2006/math">
-                        <m:sSub>
-                          <m:sSubPr>
-                            <m:ctrlPr>
-                              <a:rPr lang="en-GB" altLang="zh-CN" b="0" i="1" smtClean="0">
-                                <a:latin typeface="Cambria Math" panose="02040503050406030204" pitchFamily="18" charset="0"/>
-                              </a:rPr>
-                            </m:ctrlPr>
-                          </m:sSubPr>
-                          <m:e>
-                            <m:r>
-                              <a:rPr lang="en-GB" altLang="zh-CN" b="0" i="1" smtClean="0">
-                                <a:latin typeface="Cambria Math" panose="02040503050406030204" pitchFamily="18" charset="0"/>
-                              </a:rPr>
-                              <m:t>𝑑</m:t>
-                            </m:r>
-                          </m:e>
-                          <m:sub>
-                            <m:r>
-                              <m:rPr>
-                                <m:sty m:val="p"/>
-                              </m:rPr>
-                              <a:rPr lang="en-GB" altLang="zh-CN" b="0" i="0" smtClean="0">
-                                <a:latin typeface="Cambria Math" panose="02040503050406030204" pitchFamily="18" charset="0"/>
-                              </a:rPr>
-                              <m:t>rep</m:t>
-                            </m:r>
-                            <m:r>
-                              <a:rPr lang="en-GB" altLang="zh-CN" b="0" i="0" smtClean="0">
-                                <a:latin typeface="Cambria Math" panose="02040503050406030204" pitchFamily="18" charset="0"/>
-                              </a:rPr>
-                              <m:t>1</m:t>
-                            </m:r>
-                          </m:sub>
-                        </m:sSub>
-                      </m:oMath>
-                    </m:oMathPara>
-                  </a14:m>
-                  <a:endParaRPr lang="zh-CN" altLang="en-US" dirty="0"/>
-                </a:p>
-              </p:txBody>
-            </p:sp>
-          </mc:Choice>
-          <mc:Fallback>
-            <p:sp>
-              <p:nvSpPr>
-                <p:cNvPr id="43" name="文本框 79">
-                  <a:extLst>
-                    <a:ext uri="{FF2B5EF4-FFF2-40B4-BE49-F238E27FC236}">
-                      <a16:creationId xmlns:a16="http://schemas.microsoft.com/office/drawing/2014/main" id="{81CC1F50-44EA-8119-C996-8916A8E1E77D}"/>
-                    </a:ext>
-                  </a:extLst>
-                </p:cNvPr>
-                <p:cNvSpPr txBox="1">
-                  <a:spLocks noRot="1" noChangeAspect="1" noMove="1" noResize="1" noEditPoints="1" noAdjustHandles="1" noChangeArrowheads="1" noChangeShapeType="1" noTextEdit="1"/>
-                </p:cNvSpPr>
-                <p:nvPr/>
-              </p:nvSpPr>
-              <p:spPr>
-                <a:xfrm>
-                  <a:off x="3528927" y="1719292"/>
-                  <a:ext cx="750462" cy="394019"/>
-                </a:xfrm>
-                <a:prstGeom prst="rect">
-                  <a:avLst/>
-                </a:prstGeom>
-                <a:blipFill>
-                  <a:blip r:embed="rId8"/>
-                  <a:stretch>
-                    <a:fillRect b="-7692"/>
-                  </a:stretch>
-                </a:blipFill>
-              </p:spPr>
-              <p:txBody>
-                <a:bodyPr/>
-                <a:lstStyle/>
-                <a:p>
-                  <a:r>
-                    <a:rPr lang="nl-NL">
-                      <a:noFill/>
-                    </a:rPr>
-                    <a:t> </a:t>
-                  </a:r>
-                </a:p>
-              </p:txBody>
-            </p:sp>
-          </mc:Fallback>
-        </mc:AlternateContent>
-        <p:cxnSp>
-          <p:nvCxnSpPr>
-            <p:cNvPr id="44" name="直接箭头连接符 80">
-              <a:extLst>
-                <a:ext uri="{FF2B5EF4-FFF2-40B4-BE49-F238E27FC236}">
-                  <a16:creationId xmlns:a16="http://schemas.microsoft.com/office/drawing/2014/main" id="{86CCBB68-1842-0B78-C2AE-A7092EAB83A5}"/>
-                </a:ext>
-              </a:extLst>
-            </p:cNvPr>
-            <p:cNvCxnSpPr>
-              <a:cxnSpLocks/>
-            </p:cNvCxnSpPr>
-            <p:nvPr/>
-          </p:nvCxnSpPr>
-          <p:spPr>
-            <a:xfrm flipV="1">
-              <a:off x="4271218" y="1922277"/>
-              <a:ext cx="328767" cy="0"/>
-            </a:xfrm>
-            <a:prstGeom prst="straightConnector1">
-              <a:avLst/>
-            </a:prstGeom>
-            <a:ln w="12700">
-              <a:solidFill>
-                <a:schemeClr val="tx1"/>
-              </a:solidFill>
-              <a:tailEnd type="triangle"/>
-            </a:ln>
-          </p:spPr>
-          <p:style>
-            <a:lnRef idx="2">
-              <a:schemeClr val="accent1"/>
-            </a:lnRef>
-            <a:fillRef idx="0">
-              <a:schemeClr val="accent1"/>
-            </a:fillRef>
-            <a:effectRef idx="1">
-              <a:schemeClr val="accent1"/>
-            </a:effectRef>
-            <a:fontRef idx="minor">
-              <a:schemeClr val="tx1"/>
-            </a:fontRef>
-          </p:style>
-        </p:cxnSp>
-        <p:cxnSp>
-          <p:nvCxnSpPr>
-            <p:cNvPr id="45" name="直接箭头连接符 82">
-              <a:extLst>
-                <a:ext uri="{FF2B5EF4-FFF2-40B4-BE49-F238E27FC236}">
-                  <a16:creationId xmlns:a16="http://schemas.microsoft.com/office/drawing/2014/main" id="{965FFF52-AE36-2131-2903-C46D161DAF19}"/>
-                </a:ext>
-              </a:extLst>
-            </p:cNvPr>
-            <p:cNvCxnSpPr>
-              <a:cxnSpLocks/>
-            </p:cNvCxnSpPr>
-            <p:nvPr/>
-          </p:nvCxnSpPr>
-          <p:spPr>
-            <a:xfrm flipH="1" flipV="1">
-              <a:off x="3220595" y="1927366"/>
-              <a:ext cx="328767" cy="0"/>
-            </a:xfrm>
-            <a:prstGeom prst="straightConnector1">
-              <a:avLst/>
-            </a:prstGeom>
-            <a:ln w="12700">
-              <a:solidFill>
-                <a:schemeClr val="tx1"/>
-              </a:solidFill>
-              <a:tailEnd type="triangle"/>
-            </a:ln>
-          </p:spPr>
-          <p:style>
-            <a:lnRef idx="2">
-              <a:schemeClr val="accent1"/>
-            </a:lnRef>
-            <a:fillRef idx="0">
-              <a:schemeClr val="accent1"/>
-            </a:fillRef>
-            <a:effectRef idx="1">
-              <a:schemeClr val="accent1"/>
-            </a:effectRef>
-            <a:fontRef idx="minor">
-              <a:schemeClr val="tx1"/>
-            </a:fontRef>
-          </p:style>
-        </p:cxnSp>
-        <p:sp>
-          <p:nvSpPr>
-            <p:cNvPr id="46" name="文本框 84">
-              <a:extLst>
-                <a:ext uri="{FF2B5EF4-FFF2-40B4-BE49-F238E27FC236}">
-                  <a16:creationId xmlns:a16="http://schemas.microsoft.com/office/drawing/2014/main" id="{EA28D7A3-6BDE-2E56-E1E4-1B8C2DE57A6D}"/>
-                </a:ext>
-              </a:extLst>
-            </p:cNvPr>
-            <p:cNvSpPr txBox="1"/>
-            <p:nvPr/>
-          </p:nvSpPr>
-          <p:spPr>
-            <a:xfrm>
-              <a:off x="3477032" y="3967004"/>
-              <a:ext cx="902811" cy="369332"/>
-            </a:xfrm>
-            <a:prstGeom prst="rect">
-              <a:avLst/>
-            </a:prstGeom>
-            <a:noFill/>
-          </p:spPr>
-          <p:txBody>
-            <a:bodyPr wrap="none" rtlCol="0">
-              <a:spAutoFit/>
-            </a:bodyPr>
-            <a:lstStyle/>
-            <a:p>
-              <a:r>
-                <a:rPr lang="en-US" altLang="zh-CN" dirty="0">
-                  <a:solidFill>
-                    <a:schemeClr val="tx1">
-                      <a:lumMod val="75000"/>
-                      <a:lumOff val="25000"/>
-                    </a:schemeClr>
-                  </a:solidFill>
-                </a:rPr>
-                <a:t>Cu pad</a:t>
-              </a:r>
-              <a:endParaRPr lang="zh-CN" altLang="en-US" dirty="0">
+            <a:tailEnd type="triangle"/>
+          </a:ln>
+        </p:spPr>
+        <p:style>
+          <a:lnRef idx="2">
+            <a:schemeClr val="accent1"/>
+          </a:lnRef>
+          <a:fillRef idx="0">
+            <a:schemeClr val="accent1"/>
+          </a:fillRef>
+          <a:effectRef idx="1">
+            <a:schemeClr val="accent1"/>
+          </a:effectRef>
+          <a:fontRef idx="minor">
+            <a:schemeClr val="tx1"/>
+          </a:fontRef>
+        </p:style>
+      </p:cxnSp>
+      <p:sp>
+        <p:nvSpPr>
+          <p:cNvPr id="46" name="文本框 84">
+            <a:extLst>
+              <a:ext uri="{FF2B5EF4-FFF2-40B4-BE49-F238E27FC236}">
+                <a16:creationId xmlns:a16="http://schemas.microsoft.com/office/drawing/2014/main" id="{EA28D7A3-6BDE-2E56-E1E4-1B8C2DE57A6D}"/>
+              </a:ext>
+            </a:extLst>
+          </p:cNvPr>
+          <p:cNvSpPr txBox="1"/>
+          <p:nvPr/>
+        </p:nvSpPr>
+        <p:spPr>
+          <a:xfrm>
+            <a:off x="2972207" y="3681254"/>
+            <a:ext cx="902811" cy="369332"/>
+          </a:xfrm>
+          <a:prstGeom prst="rect">
+            <a:avLst/>
+          </a:prstGeom>
+          <a:noFill/>
+        </p:spPr>
+        <p:txBody>
+          <a:bodyPr wrap="none" rtlCol="0">
+            <a:spAutoFit/>
+          </a:bodyPr>
+          <a:lstStyle/>
+          <a:p>
+            <a:r>
+              <a:rPr lang="en-US" altLang="zh-CN" dirty="0">
                 <a:solidFill>
                   <a:schemeClr val="tx1">
                     <a:lumMod val="75000"/>
                     <a:lumOff val="25000"/>
                   </a:schemeClr>
                 </a:solidFill>
-              </a:endParaRPr>
-            </a:p>
-          </p:txBody>
-        </p:sp>
-        <p:sp>
-          <p:nvSpPr>
-            <p:cNvPr id="3" name="文本框 84">
-              <a:extLst>
-                <a:ext uri="{FF2B5EF4-FFF2-40B4-BE49-F238E27FC236}">
-                  <a16:creationId xmlns:a16="http://schemas.microsoft.com/office/drawing/2014/main" id="{3AD97EF6-6A32-48B0-1825-E56CC8254EBC}"/>
-                </a:ext>
-              </a:extLst>
-            </p:cNvPr>
-            <p:cNvSpPr txBox="1"/>
-            <p:nvPr/>
-          </p:nvSpPr>
-          <p:spPr>
-            <a:xfrm>
-              <a:off x="3176513" y="3056667"/>
-              <a:ext cx="1460656" cy="369332"/>
-            </a:xfrm>
-            <a:prstGeom prst="rect">
-              <a:avLst/>
-            </a:prstGeom>
-            <a:noFill/>
-          </p:spPr>
-          <p:txBody>
-            <a:bodyPr wrap="none" rtlCol="0">
-              <a:spAutoFit/>
-            </a:bodyPr>
-            <a:lstStyle/>
-            <a:p>
-              <a:r>
-                <a:rPr lang="en-US" altLang="zh-CN" dirty="0">
-                  <a:solidFill>
-                    <a:schemeClr val="tx1">
-                      <a:lumMod val="75000"/>
-                      <a:lumOff val="25000"/>
-                    </a:schemeClr>
-                  </a:solidFill>
-                </a:rPr>
-                <a:t>Solder bump</a:t>
-              </a:r>
-              <a:endParaRPr lang="zh-CN" altLang="en-US" dirty="0">
+              </a:rPr>
+              <a:t>Cu pad</a:t>
+            </a:r>
+            <a:endParaRPr lang="zh-CN" altLang="en-US" dirty="0">
+              <a:solidFill>
+                <a:schemeClr val="tx1">
+                  <a:lumMod val="75000"/>
+                  <a:lumOff val="25000"/>
+                </a:schemeClr>
+              </a:solidFill>
+            </a:endParaRPr>
+          </a:p>
+        </p:txBody>
+      </p:sp>
+      <p:sp>
+        <p:nvSpPr>
+          <p:cNvPr id="3" name="文本框 84">
+            <a:extLst>
+              <a:ext uri="{FF2B5EF4-FFF2-40B4-BE49-F238E27FC236}">
+                <a16:creationId xmlns:a16="http://schemas.microsoft.com/office/drawing/2014/main" id="{3AD97EF6-6A32-48B0-1825-E56CC8254EBC}"/>
+              </a:ext>
+            </a:extLst>
+          </p:cNvPr>
+          <p:cNvSpPr txBox="1"/>
+          <p:nvPr/>
+        </p:nvSpPr>
+        <p:spPr>
+          <a:xfrm>
+            <a:off x="2671688" y="2770917"/>
+            <a:ext cx="1460656" cy="369332"/>
+          </a:xfrm>
+          <a:prstGeom prst="rect">
+            <a:avLst/>
+          </a:prstGeom>
+          <a:noFill/>
+        </p:spPr>
+        <p:txBody>
+          <a:bodyPr wrap="none" rtlCol="0">
+            <a:spAutoFit/>
+          </a:bodyPr>
+          <a:lstStyle/>
+          <a:p>
+            <a:r>
+              <a:rPr lang="en-US" altLang="zh-CN" dirty="0">
                 <a:solidFill>
                   <a:schemeClr val="tx1">
                     <a:lumMod val="75000"/>
                     <a:lumOff val="25000"/>
                   </a:schemeClr>
                 </a:solidFill>
-              </a:endParaRPr>
-            </a:p>
-          </p:txBody>
-        </p:sp>
-      </p:grpSp>
+              </a:rPr>
+              <a:t>Solder bump</a:t>
+            </a:r>
+            <a:endParaRPr lang="zh-CN" altLang="en-US" dirty="0">
+              <a:solidFill>
+                <a:schemeClr val="tx1">
+                  <a:lumMod val="75000"/>
+                  <a:lumOff val="25000"/>
+                </a:schemeClr>
+              </a:solidFill>
+            </a:endParaRPr>
+          </a:p>
+        </p:txBody>
+      </p:sp>
+      <p:sp>
+        <p:nvSpPr>
+          <p:cNvPr id="47" name="文本框 84">
+            <a:extLst>
+              <a:ext uri="{FF2B5EF4-FFF2-40B4-BE49-F238E27FC236}">
+                <a16:creationId xmlns:a16="http://schemas.microsoft.com/office/drawing/2014/main" id="{FCAB3DB9-E578-5CAE-DB46-4FA1B26D0CE1}"/>
+              </a:ext>
+            </a:extLst>
+          </p:cNvPr>
+          <p:cNvSpPr txBox="1"/>
+          <p:nvPr/>
+        </p:nvSpPr>
+        <p:spPr>
+          <a:xfrm>
+            <a:off x="3322459" y="2092797"/>
+            <a:ext cx="663964" cy="369332"/>
+          </a:xfrm>
+          <a:prstGeom prst="rect">
+            <a:avLst/>
+          </a:prstGeom>
+          <a:noFill/>
+        </p:spPr>
+        <p:txBody>
+          <a:bodyPr wrap="none" rtlCol="0">
+            <a:spAutoFit/>
+          </a:bodyPr>
+          <a:lstStyle/>
+          <a:p>
+            <a:r>
+              <a:rPr lang="en-US" altLang="zh-CN" dirty="0">
+                <a:solidFill>
+                  <a:schemeClr val="tx1">
+                    <a:lumMod val="75000"/>
+                    <a:lumOff val="25000"/>
+                  </a:schemeClr>
+                </a:solidFill>
+              </a:rPr>
+              <a:t>UBM</a:t>
+            </a:r>
+            <a:endParaRPr lang="zh-CN" altLang="en-US" dirty="0">
+              <a:solidFill>
+                <a:schemeClr val="tx1">
+                  <a:lumMod val="75000"/>
+                  <a:lumOff val="25000"/>
+                </a:schemeClr>
+              </a:solidFill>
+            </a:endParaRPr>
+          </a:p>
+        </p:txBody>
+      </p:sp>
+      <p:cxnSp>
+        <p:nvCxnSpPr>
+          <p:cNvPr id="50" name="Straight Arrow Connector 49">
+            <a:extLst>
+              <a:ext uri="{FF2B5EF4-FFF2-40B4-BE49-F238E27FC236}">
+                <a16:creationId xmlns:a16="http://schemas.microsoft.com/office/drawing/2014/main" id="{DE17EC24-3DB8-A573-50FF-11807AF79E80}"/>
+              </a:ext>
+            </a:extLst>
+          </p:cNvPr>
+          <p:cNvCxnSpPr>
+            <a:cxnSpLocks/>
+            <a:stCxn id="47" idx="0"/>
+          </p:cNvCxnSpPr>
+          <p:nvPr/>
+        </p:nvCxnSpPr>
+        <p:spPr>
+          <a:xfrm flipV="1">
+            <a:off x="3654441" y="1962294"/>
+            <a:ext cx="0" cy="206483"/>
+          </a:xfrm>
+          <a:prstGeom prst="straightConnector1">
+            <a:avLst/>
+          </a:prstGeom>
+          <a:ln>
+            <a:solidFill>
+              <a:schemeClr val="tx1">
+                <a:lumMod val="75000"/>
+                <a:lumOff val="25000"/>
+              </a:schemeClr>
+            </a:solidFill>
+            <a:tailEnd type="triangle"/>
+          </a:ln>
+        </p:spPr>
+        <p:style>
+          <a:lnRef idx="2">
+            <a:schemeClr val="accent1"/>
+          </a:lnRef>
+          <a:fillRef idx="0">
+            <a:schemeClr val="accent1"/>
+          </a:fillRef>
+          <a:effectRef idx="1">
+            <a:schemeClr val="accent1"/>
+          </a:effectRef>
+          <a:fontRef idx="minor">
+            <a:schemeClr val="tx1"/>
+          </a:fontRef>
+        </p:style>
+      </p:cxnSp>
     </p:spTree>
     <p:extLst>
       <p:ext uri="{BB962C8B-B14F-4D97-AF65-F5344CB8AC3E}">
         <p14:creationId xmlns:p14="http://schemas.microsoft.com/office/powerpoint/2010/main" val="3212952049"/>
+      </p:ext>
+    </p:extLst>
+  </p:cSld>
+  <p:clrMapOvr>
+    <a:masterClrMapping/>
+  </p:clrMapOvr>
+</p:sld>
+</file>
+
+<file path=ppt/slides/slide2.xml><?xml version="1.0" encoding="utf-8"?>
+<p:sld xmlns:a="http://schemas.openxmlformats.org/drawingml/2006/main" xmlns:r="http://schemas.openxmlformats.org/officeDocument/2006/relationships" xmlns:p="http://schemas.openxmlformats.org/presentationml/2006/main">
+  <p:cSld>
+    <p:spTree>
+      <p:nvGrpSpPr>
+        <p:cNvPr id="1" name=""/>
+        <p:cNvGrpSpPr/>
+        <p:nvPr/>
+      </p:nvGrpSpPr>
+      <p:grpSpPr>
+        <a:xfrm>
+          <a:off x="0" y="0"/>
+          <a:ext cx="0" cy="0"/>
+          <a:chOff x="0" y="0"/>
+          <a:chExt cx="0" cy="0"/>
+        </a:xfrm>
+      </p:grpSpPr>
+      <p:pic>
+        <p:nvPicPr>
+          <p:cNvPr id="4" name="图片 5">
+            <a:extLst>
+              <a:ext uri="{FF2B5EF4-FFF2-40B4-BE49-F238E27FC236}">
+                <a16:creationId xmlns:a16="http://schemas.microsoft.com/office/drawing/2014/main" id="{8B712A12-09F0-5367-83B1-A9C9A630F3F8}"/>
+              </a:ext>
+            </a:extLst>
+          </p:cNvPr>
+          <p:cNvPicPr>
+            <a:picLocks noChangeAspect="1"/>
+          </p:cNvPicPr>
+          <p:nvPr/>
+        </p:nvPicPr>
+        <p:blipFill>
+          <a:blip r:embed="rId2">
+            <a:extLst>
+              <a:ext uri="{28A0092B-C50C-407E-A947-70E740481C1C}">
+                <a14:useLocalDpi xmlns:a14="http://schemas.microsoft.com/office/drawing/2010/main" val="0"/>
+              </a:ext>
+            </a:extLst>
+          </a:blip>
+          <a:stretch>
+            <a:fillRect/>
+          </a:stretch>
+        </p:blipFill>
+        <p:spPr>
+          <a:xfrm>
+            <a:off x="6076005" y="387943"/>
+            <a:ext cx="4043479" cy="3041058"/>
+          </a:xfrm>
+          <a:prstGeom prst="rect">
+            <a:avLst/>
+          </a:prstGeom>
+        </p:spPr>
+      </p:pic>
+      <p:pic>
+        <p:nvPicPr>
+          <p:cNvPr id="59" name="图片 4">
+            <a:extLst>
+              <a:ext uri="{FF2B5EF4-FFF2-40B4-BE49-F238E27FC236}">
+                <a16:creationId xmlns:a16="http://schemas.microsoft.com/office/drawing/2014/main" id="{71BFC070-91D5-8F3C-95FD-9139BA9A4949}"/>
+              </a:ext>
+            </a:extLst>
+          </p:cNvPr>
+          <p:cNvPicPr>
+            <a:picLocks noChangeAspect="1"/>
+          </p:cNvPicPr>
+          <p:nvPr/>
+        </p:nvPicPr>
+        <p:blipFill>
+          <a:blip r:embed="rId3">
+            <a:extLst>
+              <a:ext uri="{28A0092B-C50C-407E-A947-70E740481C1C}">
+                <a14:useLocalDpi xmlns:a14="http://schemas.microsoft.com/office/drawing/2010/main" val="0"/>
+              </a:ext>
+            </a:extLst>
+          </a:blip>
+          <a:stretch>
+            <a:fillRect/>
+          </a:stretch>
+        </p:blipFill>
+        <p:spPr>
+          <a:xfrm>
+            <a:off x="2032524" y="387943"/>
+            <a:ext cx="4043481" cy="3041057"/>
+          </a:xfrm>
+          <a:prstGeom prst="rect">
+            <a:avLst/>
+          </a:prstGeom>
+        </p:spPr>
+      </p:pic>
+      <p:pic>
+        <p:nvPicPr>
+          <p:cNvPr id="60" name="图片 7">
+            <a:extLst>
+              <a:ext uri="{FF2B5EF4-FFF2-40B4-BE49-F238E27FC236}">
+                <a16:creationId xmlns:a16="http://schemas.microsoft.com/office/drawing/2014/main" id="{DA3DCD6C-B6D4-3A6D-51E9-25104935862E}"/>
+              </a:ext>
+            </a:extLst>
+          </p:cNvPr>
+          <p:cNvPicPr>
+            <a:picLocks noChangeAspect="1"/>
+          </p:cNvPicPr>
+          <p:nvPr/>
+        </p:nvPicPr>
+        <p:blipFill>
+          <a:blip r:embed="rId4"/>
+          <a:stretch>
+            <a:fillRect/>
+          </a:stretch>
+        </p:blipFill>
+        <p:spPr>
+          <a:xfrm>
+            <a:off x="3995619" y="3429000"/>
+            <a:ext cx="4043481" cy="3041058"/>
+          </a:xfrm>
+          <a:prstGeom prst="rect">
+            <a:avLst/>
+          </a:prstGeom>
+        </p:spPr>
+      </p:pic>
+    </p:spTree>
+    <p:extLst>
+      <p:ext uri="{BB962C8B-B14F-4D97-AF65-F5344CB8AC3E}">
+        <p14:creationId xmlns:p14="http://schemas.microsoft.com/office/powerpoint/2010/main" val="99308784"/>
+      </p:ext>
+    </p:extLst>
+  </p:cSld>
+  <p:clrMapOvr>
+    <a:masterClrMapping/>
+  </p:clrMapOvr>
+</p:sld>
+</file>
+
+<file path=ppt/slides/slide3.xml><?xml version="1.0" encoding="utf-8"?>
+<p:sld xmlns:a="http://schemas.openxmlformats.org/drawingml/2006/main" xmlns:r="http://schemas.openxmlformats.org/officeDocument/2006/relationships" xmlns:p="http://schemas.openxmlformats.org/presentationml/2006/main">
+  <p:cSld>
+    <p:spTree>
+      <p:nvGrpSpPr>
+        <p:cNvPr id="1" name=""/>
+        <p:cNvGrpSpPr/>
+        <p:nvPr/>
+      </p:nvGrpSpPr>
+      <p:grpSpPr>
+        <a:xfrm>
+          <a:off x="0" y="0"/>
+          <a:ext cx="0" cy="0"/>
+          <a:chOff x="0" y="0"/>
+          <a:chExt cx="0" cy="0"/>
+        </a:xfrm>
+      </p:grpSpPr>
+      <p:pic>
+        <p:nvPicPr>
+          <p:cNvPr id="5" name="图片 2">
+            <a:extLst>
+              <a:ext uri="{FF2B5EF4-FFF2-40B4-BE49-F238E27FC236}">
+                <a16:creationId xmlns:a16="http://schemas.microsoft.com/office/drawing/2014/main" id="{2E0D6D79-0A24-8707-ADC8-6C0F7F24A842}"/>
+              </a:ext>
+            </a:extLst>
+          </p:cNvPr>
+          <p:cNvPicPr>
+            <a:picLocks noChangeAspect="1"/>
+          </p:cNvPicPr>
+          <p:nvPr/>
+        </p:nvPicPr>
+        <p:blipFill>
+          <a:blip r:embed="rId2"/>
+          <a:stretch>
+            <a:fillRect/>
+          </a:stretch>
+        </p:blipFill>
+        <p:spPr>
+          <a:xfrm>
+            <a:off x="424538" y="962244"/>
+            <a:ext cx="10428523" cy="4705318"/>
+          </a:xfrm>
+          <a:prstGeom prst="rect">
+            <a:avLst/>
+          </a:prstGeom>
+        </p:spPr>
+      </p:pic>
+    </p:spTree>
+    <p:extLst>
+      <p:ext uri="{BB962C8B-B14F-4D97-AF65-F5344CB8AC3E}">
+        <p14:creationId xmlns:p14="http://schemas.microsoft.com/office/powerpoint/2010/main" val="2559872138"/>
+      </p:ext>
+    </p:extLst>
+  </p:cSld>
+  <p:clrMapOvr>
+    <a:masterClrMapping/>
+  </p:clrMapOvr>
+</p:sld>
+</file>
+
+<file path=ppt/slides/slide4.xml><?xml version="1.0" encoding="utf-8"?>
+<p:sld xmlns:a="http://schemas.openxmlformats.org/drawingml/2006/main" xmlns:r="http://schemas.openxmlformats.org/officeDocument/2006/relationships" xmlns:p="http://schemas.openxmlformats.org/presentationml/2006/main">
+  <p:cSld>
+    <p:spTree>
+      <p:nvGrpSpPr>
+        <p:cNvPr id="1" name=""/>
+        <p:cNvGrpSpPr/>
+        <p:nvPr/>
+      </p:nvGrpSpPr>
+      <p:grpSpPr>
+        <a:xfrm>
+          <a:off x="0" y="0"/>
+          <a:ext cx="0" cy="0"/>
+          <a:chOff x="0" y="0"/>
+          <a:chExt cx="0" cy="0"/>
+        </a:xfrm>
+      </p:grpSpPr>
+      <p:pic>
+        <p:nvPicPr>
+          <p:cNvPr id="4" name="图片 88">
+            <a:extLst>
+              <a:ext uri="{FF2B5EF4-FFF2-40B4-BE49-F238E27FC236}">
+                <a16:creationId xmlns:a16="http://schemas.microsoft.com/office/drawing/2014/main" id="{EE8E1AC1-E6C1-50ED-8544-460946A3F1DD}"/>
+              </a:ext>
+            </a:extLst>
+          </p:cNvPr>
+          <p:cNvPicPr>
+            <a:picLocks noChangeAspect="1"/>
+          </p:cNvPicPr>
+          <p:nvPr/>
+        </p:nvPicPr>
+        <p:blipFill>
+          <a:blip r:embed="rId2"/>
+          <a:stretch>
+            <a:fillRect/>
+          </a:stretch>
+        </p:blipFill>
+        <p:spPr>
+          <a:xfrm>
+            <a:off x="3099832" y="1097078"/>
+            <a:ext cx="5992335" cy="4663844"/>
+          </a:xfrm>
+          <a:prstGeom prst="rect">
+            <a:avLst/>
+          </a:prstGeom>
+        </p:spPr>
+      </p:pic>
+    </p:spTree>
+    <p:extLst>
+      <p:ext uri="{BB962C8B-B14F-4D97-AF65-F5344CB8AC3E}">
+        <p14:creationId xmlns:p14="http://schemas.microsoft.com/office/powerpoint/2010/main" val="1636160779"/>
       </p:ext>
     </p:extLst>
   </p:cSld>
